--- a/VelaSync_Sales_Process_WithLogo.pptx
+++ b/VelaSync_Sales_Process_WithLogo.pptx
@@ -16,8 +16,6 @@
     <p:sldId id="264" r:id="rId15"/>
     <p:sldId id="265" r:id="rId16"/>
     <p:sldId id="266" r:id="rId17"/>
-    <p:sldId id="267" r:id="rId18"/>
-    <p:sldId id="268" r:id="rId19"/>
   </p:sldIdLst>
   <p:sldSz cx="12188952" cy="6858000" type="screen4x3"/>
   <p:notesSz cx="6858000" cy="9144000"/>
@@ -9281,6275 +9279,6 @@
                 </a:solidFill>
               </a:rPr>
               <a:t>© 2026 Vela Sync Ltd · Co. No. 17051204 · Internal Sales Playbook — Confidential — Not for Distribution</a:t>
-            </a:r>
-          </a:p>
-        </p:txBody>
-      </p:sp>
-    </p:spTree>
-  </p:cSld>
-  <p:clrMapOvr>
-    <a:masterClrMapping/>
-  </p:clrMapOvr>
-</p:sld>
-</file>
-
-<file path=ppt/slides/slide12.xml><?xml version="1.0" encoding="utf-8"?>
-<p:sld xmlns:a="http://schemas.openxmlformats.org/drawingml/2006/main" xmlns:p="http://schemas.openxmlformats.org/presentationml/2006/main" xmlns:r="http://schemas.openxmlformats.org/officeDocument/2006/relationships">
-  <p:cSld>
-    <p:spTree>
-      <p:nvGrpSpPr>
-        <p:cNvPr id="1" name=""/>
-        <p:cNvGrpSpPr/>
-        <p:nvPr/>
-      </p:nvGrpSpPr>
-      <p:grpSpPr/>
-      <p:sp>
-        <p:nvSpPr>
-          <p:cNvPr id="2" name="Rectangle 1"/>
-          <p:cNvSpPr/>
-          <p:nvPr/>
-        </p:nvSpPr>
-        <p:spPr>
-          <a:xfrm>
-            <a:off x="0" y="0"/>
-            <a:ext cx="12188952" cy="6858000"/>
-          </a:xfrm>
-          <a:prstGeom prst="rect">
-            <a:avLst/>
-          </a:prstGeom>
-          <a:solidFill>
-            <a:srgbClr val="050A0A"/>
-          </a:solidFill>
-          <a:ln>
-            <a:noFill/>
-          </a:ln>
-        </p:spPr>
-        <p:style>
-          <a:lnRef idx="1">
-            <a:schemeClr val="accent1"/>
-          </a:lnRef>
-          <a:fillRef idx="3">
-            <a:schemeClr val="accent1"/>
-          </a:fillRef>
-          <a:effectRef idx="2">
-            <a:schemeClr val="accent1"/>
-          </a:effectRef>
-          <a:fontRef idx="minor">
-            <a:schemeClr val="lt1"/>
-          </a:fontRef>
-        </p:style>
-        <p:txBody>
-          <a:bodyPr rtlCol="0" anchor="ctr"/>
-          <a:lstStyle/>
-          <a:p>
-            <a:pPr algn="ctr"/>
-          </a:p>
-        </p:txBody>
-      </p:sp>
-      <p:sp>
-        <p:nvSpPr>
-          <p:cNvPr id="3" name="Rectangle 2"/>
-          <p:cNvSpPr/>
-          <p:nvPr/>
-        </p:nvSpPr>
-        <p:spPr>
-          <a:xfrm>
-            <a:off x="0" y="0"/>
-            <a:ext cx="54864" cy="6858000"/>
-          </a:xfrm>
-          <a:prstGeom prst="rect">
-            <a:avLst/>
-          </a:prstGeom>
-          <a:solidFill>
-            <a:srgbClr val="2B8E8E"/>
-          </a:solidFill>
-          <a:ln>
-            <a:noFill/>
-          </a:ln>
-        </p:spPr>
-        <p:style>
-          <a:lnRef idx="1">
-            <a:schemeClr val="accent1"/>
-          </a:lnRef>
-          <a:fillRef idx="3">
-            <a:schemeClr val="accent1"/>
-          </a:fillRef>
-          <a:effectRef idx="2">
-            <a:schemeClr val="accent1"/>
-          </a:effectRef>
-          <a:fontRef idx="minor">
-            <a:schemeClr val="lt1"/>
-          </a:fontRef>
-        </p:style>
-        <p:txBody>
-          <a:bodyPr rtlCol="0" anchor="ctr"/>
-          <a:lstStyle/>
-          <a:p>
-            <a:pPr algn="ctr"/>
-          </a:p>
-        </p:txBody>
-      </p:sp>
-      <p:sp>
-        <p:nvSpPr>
-          <p:cNvPr id="4" name="Rectangle 3"/>
-          <p:cNvSpPr/>
-          <p:nvPr/>
-        </p:nvSpPr>
-        <p:spPr>
-          <a:xfrm>
-            <a:off x="54864" y="0"/>
-            <a:ext cx="12134088" cy="1005840"/>
-          </a:xfrm>
-          <a:prstGeom prst="rect">
-            <a:avLst/>
-          </a:prstGeom>
-          <a:solidFill>
-            <a:srgbClr val="0F1A1A"/>
-          </a:solidFill>
-          <a:ln>
-            <a:noFill/>
-          </a:ln>
-        </p:spPr>
-        <p:style>
-          <a:lnRef idx="1">
-            <a:schemeClr val="accent1"/>
-          </a:lnRef>
-          <a:fillRef idx="3">
-            <a:schemeClr val="accent1"/>
-          </a:fillRef>
-          <a:effectRef idx="2">
-            <a:schemeClr val="accent1"/>
-          </a:effectRef>
-          <a:fontRef idx="minor">
-            <a:schemeClr val="lt1"/>
-          </a:fontRef>
-        </p:style>
-        <p:txBody>
-          <a:bodyPr rtlCol="0" anchor="ctr"/>
-          <a:lstStyle/>
-          <a:p>
-            <a:pPr algn="ctr"/>
-          </a:p>
-        </p:txBody>
-      </p:sp>
-      <p:sp>
-        <p:nvSpPr>
-          <p:cNvPr id="5" name="Rectangle 4"/>
-          <p:cNvSpPr/>
-          <p:nvPr/>
-        </p:nvSpPr>
-        <p:spPr>
-          <a:xfrm>
-            <a:off x="411480" y="804672"/>
-            <a:ext cx="11365992" cy="27432"/>
-          </a:xfrm>
-          <a:prstGeom prst="rect">
-            <a:avLst/>
-          </a:prstGeom>
-          <a:solidFill>
-            <a:srgbClr val="2B8E8E"/>
-          </a:solidFill>
-          <a:ln>
-            <a:noFill/>
-          </a:ln>
-        </p:spPr>
-        <p:style>
-          <a:lnRef idx="1">
-            <a:schemeClr val="accent1"/>
-          </a:lnRef>
-          <a:fillRef idx="3">
-            <a:schemeClr val="accent1"/>
-          </a:fillRef>
-          <a:effectRef idx="2">
-            <a:schemeClr val="accent1"/>
-          </a:effectRef>
-          <a:fontRef idx="minor">
-            <a:schemeClr val="lt1"/>
-          </a:fontRef>
-        </p:style>
-        <p:txBody>
-          <a:bodyPr rtlCol="0" anchor="ctr"/>
-          <a:lstStyle/>
-          <a:p>
-            <a:pPr algn="ctr"/>
-          </a:p>
-        </p:txBody>
-      </p:sp>
-      <p:sp>
-        <p:nvSpPr>
-          <p:cNvPr id="6" name="Rectangle 5"/>
-          <p:cNvSpPr/>
-          <p:nvPr/>
-        </p:nvSpPr>
-        <p:spPr>
-          <a:xfrm>
-            <a:off x="11228832" y="164592"/>
-            <a:ext cx="457200" cy="457200"/>
-          </a:xfrm>
-          <a:prstGeom prst="rect">
-            <a:avLst/>
-          </a:prstGeom>
-          <a:solidFill>
-            <a:srgbClr val="2B8E8E"/>
-          </a:solidFill>
-          <a:ln>
-            <a:noFill/>
-          </a:ln>
-        </p:spPr>
-        <p:style>
-          <a:lnRef idx="1">
-            <a:schemeClr val="accent1"/>
-          </a:lnRef>
-          <a:fillRef idx="3">
-            <a:schemeClr val="accent1"/>
-          </a:fillRef>
-          <a:effectRef idx="2">
-            <a:schemeClr val="accent1"/>
-          </a:effectRef>
-          <a:fontRef idx="minor">
-            <a:schemeClr val="lt1"/>
-          </a:fontRef>
-        </p:style>
-        <p:txBody>
-          <a:bodyPr rtlCol="0" anchor="ctr"/>
-          <a:lstStyle/>
-          <a:p>
-            <a:pPr algn="ctr"/>
-          </a:p>
-        </p:txBody>
-      </p:sp>
-      <p:sp>
-        <p:nvSpPr>
-          <p:cNvPr id="7" name="TextBox 6"/>
-          <p:cNvSpPr txBox="1"/>
-          <p:nvPr/>
-        </p:nvSpPr>
-        <p:spPr>
-          <a:xfrm>
-            <a:off x="11228832" y="164592"/>
-            <a:ext cx="457200" cy="457200"/>
-          </a:xfrm>
-          <a:prstGeom prst="rect">
-            <a:avLst/>
-          </a:prstGeom>
-          <a:noFill/>
-        </p:spPr>
-        <p:txBody>
-          <a:bodyPr wrap="square">
-            <a:spAutoFit/>
-          </a:bodyPr>
-          <a:lstStyle/>
-          <a:p>
-            <a:pPr algn="ctr"/>
-            <a:r>
-              <a:rPr sz="1400" b="1" i="0">
-                <a:solidFill>
-                  <a:srgbClr val="FFFFFF"/>
-                </a:solidFill>
-              </a:rPr>
-              <a:t>VS</a:t>
-            </a:r>
-          </a:p>
-        </p:txBody>
-      </p:sp>
-      <p:sp>
-        <p:nvSpPr>
-          <p:cNvPr id="8" name="TextBox 7"/>
-          <p:cNvSpPr txBox="1"/>
-          <p:nvPr/>
-        </p:nvSpPr>
-        <p:spPr>
-          <a:xfrm>
-            <a:off x="10040112" y="265176"/>
-            <a:ext cx="1143000" cy="256032"/>
-          </a:xfrm>
-          <a:prstGeom prst="rect">
-            <a:avLst/>
-          </a:prstGeom>
-          <a:noFill/>
-        </p:spPr>
-        <p:txBody>
-          <a:bodyPr wrap="square">
-            <a:spAutoFit/>
-          </a:bodyPr>
-          <a:lstStyle/>
-          <a:p>
-            <a:pPr algn="r"/>
-            <a:r>
-              <a:rPr sz="800" b="1" i="0">
-                <a:solidFill>
-                  <a:srgbClr val="EEF7F7"/>
-                </a:solidFill>
-              </a:rPr>
-              <a:t>VELA SYNC</a:t>
-            </a:r>
-          </a:p>
-        </p:txBody>
-      </p:sp>
-      <p:sp>
-        <p:nvSpPr>
-          <p:cNvPr id="9" name="TextBox 8"/>
-          <p:cNvSpPr txBox="1"/>
-          <p:nvPr/>
-        </p:nvSpPr>
-        <p:spPr>
-          <a:xfrm>
-            <a:off x="502920" y="128016"/>
-            <a:ext cx="7315200" cy="201168"/>
-          </a:xfrm>
-          <a:prstGeom prst="rect">
-            <a:avLst/>
-          </a:prstGeom>
-          <a:noFill/>
-        </p:spPr>
-        <p:txBody>
-          <a:bodyPr wrap="square">
-            <a:spAutoFit/>
-          </a:bodyPr>
-          <a:lstStyle/>
-          <a:p>
-            <a:pPr algn="l"/>
-            <a:r>
-              <a:rPr sz="750" b="1" i="0">
-                <a:solidFill>
-                  <a:srgbClr val="2B8E8E"/>
-                </a:solidFill>
-              </a:rPr>
-              <a:t>SALES ADVISOR QUICK REFERENCE  ·  PAGE 1 OF 2</a:t>
-            </a:r>
-          </a:p>
-        </p:txBody>
-      </p:sp>
-      <p:sp>
-        <p:nvSpPr>
-          <p:cNvPr id="10" name="TextBox 9"/>
-          <p:cNvSpPr txBox="1"/>
-          <p:nvPr/>
-        </p:nvSpPr>
-        <p:spPr>
-          <a:xfrm>
-            <a:off x="411480" y="347472"/>
-            <a:ext cx="8229600" cy="475488"/>
-          </a:xfrm>
-          <a:prstGeom prst="rect">
-            <a:avLst/>
-          </a:prstGeom>
-          <a:noFill/>
-        </p:spPr>
-        <p:txBody>
-          <a:bodyPr wrap="square">
-            <a:spAutoFit/>
-          </a:bodyPr>
-          <a:lstStyle/>
-          <a:p>
-            <a:pPr algn="l"/>
-            <a:r>
-              <a:rPr sz="2600" b="1" i="0">
-                <a:solidFill>
-                  <a:srgbClr val="FFFFFF"/>
-                </a:solidFill>
-              </a:rPr>
-              <a:t>The Complete Pipeline</a:t>
-            </a:r>
-          </a:p>
-        </p:txBody>
-      </p:sp>
-      <p:sp>
-        <p:nvSpPr>
-          <p:cNvPr id="11" name="TextBox 10"/>
-          <p:cNvSpPr txBox="1"/>
-          <p:nvPr/>
-        </p:nvSpPr>
-        <p:spPr>
-          <a:xfrm>
-            <a:off x="411480" y="804672"/>
-            <a:ext cx="8229600" cy="201168"/>
-          </a:xfrm>
-          <a:prstGeom prst="rect">
-            <a:avLst/>
-          </a:prstGeom>
-          <a:noFill/>
-        </p:spPr>
-        <p:txBody>
-          <a:bodyPr wrap="square">
-            <a:spAutoFit/>
-          </a:bodyPr>
-          <a:lstStyle/>
-          <a:p>
-            <a:pPr algn="l"/>
-            <a:r>
-              <a:rPr sz="850" b="0" i="0">
-                <a:solidFill>
-                  <a:srgbClr val="AACCCC"/>
-                </a:solidFill>
-              </a:rPr>
-              <a:t>Know every stage. Hit every beat. Close every room.</a:t>
-            </a:r>
-          </a:p>
-        </p:txBody>
-      </p:sp>
-      <p:sp>
-        <p:nvSpPr>
-          <p:cNvPr id="12" name="Rectangle 11"/>
-          <p:cNvSpPr/>
-          <p:nvPr/>
-        </p:nvSpPr>
-        <p:spPr>
-          <a:xfrm>
-            <a:off x="411480" y="1143000"/>
-            <a:ext cx="5577840" cy="777240"/>
-          </a:xfrm>
-          <a:prstGeom prst="rect">
-            <a:avLst/>
-          </a:prstGeom>
-          <a:solidFill>
-            <a:srgbClr val="1C2E2E"/>
-          </a:solidFill>
-          <a:ln>
-            <a:noFill/>
-          </a:ln>
-        </p:spPr>
-        <p:style>
-          <a:lnRef idx="1">
-            <a:schemeClr val="accent1"/>
-          </a:lnRef>
-          <a:fillRef idx="3">
-            <a:schemeClr val="accent1"/>
-          </a:fillRef>
-          <a:effectRef idx="2">
-            <a:schemeClr val="accent1"/>
-          </a:effectRef>
-          <a:fontRef idx="minor">
-            <a:schemeClr val="lt1"/>
-          </a:fontRef>
-        </p:style>
-        <p:txBody>
-          <a:bodyPr rtlCol="0" anchor="ctr"/>
-          <a:lstStyle/>
-          <a:p>
-            <a:pPr algn="ctr"/>
-          </a:p>
-        </p:txBody>
-      </p:sp>
-      <p:sp>
-        <p:nvSpPr>
-          <p:cNvPr id="13" name="Rectangle 12"/>
-          <p:cNvSpPr/>
-          <p:nvPr/>
-        </p:nvSpPr>
-        <p:spPr>
-          <a:xfrm>
-            <a:off x="411480" y="1143000"/>
-            <a:ext cx="457200" cy="777240"/>
-          </a:xfrm>
-          <a:prstGeom prst="rect">
-            <a:avLst/>
-          </a:prstGeom>
-          <a:solidFill>
-            <a:srgbClr val="2B8E8E"/>
-          </a:solidFill>
-          <a:ln>
-            <a:noFill/>
-          </a:ln>
-        </p:spPr>
-        <p:style>
-          <a:lnRef idx="1">
-            <a:schemeClr val="accent1"/>
-          </a:lnRef>
-          <a:fillRef idx="3">
-            <a:schemeClr val="accent1"/>
-          </a:fillRef>
-          <a:effectRef idx="2">
-            <a:schemeClr val="accent1"/>
-          </a:effectRef>
-          <a:fontRef idx="minor">
-            <a:schemeClr val="lt1"/>
-          </a:fontRef>
-        </p:style>
-        <p:txBody>
-          <a:bodyPr rtlCol="0" anchor="ctr"/>
-          <a:lstStyle/>
-          <a:p>
-            <a:pPr algn="ctr"/>
-          </a:p>
-        </p:txBody>
-      </p:sp>
-      <p:sp>
-        <p:nvSpPr>
-          <p:cNvPr id="14" name="TextBox 13"/>
-          <p:cNvSpPr txBox="1"/>
-          <p:nvPr/>
-        </p:nvSpPr>
-        <p:spPr>
-          <a:xfrm>
-            <a:off x="411480" y="1344168"/>
-            <a:ext cx="457200" cy="384048"/>
-          </a:xfrm>
-          <a:prstGeom prst="rect">
-            <a:avLst/>
-          </a:prstGeom>
-          <a:noFill/>
-        </p:spPr>
-        <p:txBody>
-          <a:bodyPr wrap="square">
-            <a:spAutoFit/>
-          </a:bodyPr>
-          <a:lstStyle/>
-          <a:p>
-            <a:pPr algn="ctr"/>
-            <a:r>
-              <a:rPr sz="1300" b="1" i="0">
-                <a:solidFill>
-                  <a:srgbClr val="FFFFFF"/>
-                </a:solidFill>
-              </a:rPr>
-              <a:t>01</a:t>
-            </a:r>
-          </a:p>
-        </p:txBody>
-      </p:sp>
-      <p:sp>
-        <p:nvSpPr>
-          <p:cNvPr id="15" name="TextBox 14"/>
-          <p:cNvSpPr txBox="1"/>
-          <p:nvPr/>
-        </p:nvSpPr>
-        <p:spPr>
-          <a:xfrm>
-            <a:off x="941832" y="1216152"/>
-            <a:ext cx="4983479" cy="256032"/>
-          </a:xfrm>
-          <a:prstGeom prst="rect">
-            <a:avLst/>
-          </a:prstGeom>
-          <a:noFill/>
-        </p:spPr>
-        <p:txBody>
-          <a:bodyPr wrap="square">
-            <a:spAutoFit/>
-          </a:bodyPr>
-          <a:lstStyle/>
-          <a:p>
-            <a:pPr algn="l"/>
-            <a:r>
-              <a:rPr sz="900" b="1" i="0">
-                <a:solidFill>
-                  <a:srgbClr val="3AAEAE"/>
-                </a:solidFill>
-              </a:rPr>
-              <a:t>ONBOARDING</a:t>
-            </a:r>
-          </a:p>
-        </p:txBody>
-      </p:sp>
-      <p:sp>
-        <p:nvSpPr>
-          <p:cNvPr id="16" name="TextBox 15"/>
-          <p:cNvSpPr txBox="1"/>
-          <p:nvPr/>
-        </p:nvSpPr>
-        <p:spPr>
-          <a:xfrm>
-            <a:off x="941832" y="1472184"/>
-            <a:ext cx="4983479" cy="411480"/>
-          </a:xfrm>
-          <a:prstGeom prst="rect">
-            <a:avLst/>
-          </a:prstGeom>
-          <a:noFill/>
-        </p:spPr>
-        <p:txBody>
-          <a:bodyPr wrap="square">
-            <a:spAutoFit/>
-          </a:bodyPr>
-          <a:lstStyle/>
-          <a:p>
-            <a:pPr algn="l"/>
-            <a:r>
-              <a:rPr sz="750" b="0" i="0">
-                <a:solidFill>
-                  <a:srgbClr val="CCE5E5"/>
-                </a:solidFill>
-              </a:rPr>
-              <a:t>Know product, tools &amp; KPIs cold before any call.</a:t>
-            </a:r>
-          </a:p>
-        </p:txBody>
-      </p:sp>
-      <p:sp>
-        <p:nvSpPr>
-          <p:cNvPr id="17" name="Rectangle 16"/>
-          <p:cNvSpPr/>
-          <p:nvPr/>
-        </p:nvSpPr>
-        <p:spPr>
-          <a:xfrm>
-            <a:off x="6108192" y="1143000"/>
-            <a:ext cx="5577840" cy="777240"/>
-          </a:xfrm>
-          <a:prstGeom prst="rect">
-            <a:avLst/>
-          </a:prstGeom>
-          <a:solidFill>
-            <a:srgbClr val="1C2E2E"/>
-          </a:solidFill>
-          <a:ln>
-            <a:noFill/>
-          </a:ln>
-        </p:spPr>
-        <p:style>
-          <a:lnRef idx="1">
-            <a:schemeClr val="accent1"/>
-          </a:lnRef>
-          <a:fillRef idx="3">
-            <a:schemeClr val="accent1"/>
-          </a:fillRef>
-          <a:effectRef idx="2">
-            <a:schemeClr val="accent1"/>
-          </a:effectRef>
-          <a:fontRef idx="minor">
-            <a:schemeClr val="lt1"/>
-          </a:fontRef>
-        </p:style>
-        <p:txBody>
-          <a:bodyPr rtlCol="0" anchor="ctr"/>
-          <a:lstStyle/>
-          <a:p>
-            <a:pPr algn="ctr"/>
-          </a:p>
-        </p:txBody>
-      </p:sp>
-      <p:sp>
-        <p:nvSpPr>
-          <p:cNvPr id="18" name="Rectangle 17"/>
-          <p:cNvSpPr/>
-          <p:nvPr/>
-        </p:nvSpPr>
-        <p:spPr>
-          <a:xfrm>
-            <a:off x="6108192" y="1143000"/>
-            <a:ext cx="457200" cy="777240"/>
-          </a:xfrm>
-          <a:prstGeom prst="rect">
-            <a:avLst/>
-          </a:prstGeom>
-          <a:solidFill>
-            <a:srgbClr val="2B8E8E"/>
-          </a:solidFill>
-          <a:ln>
-            <a:noFill/>
-          </a:ln>
-        </p:spPr>
-        <p:style>
-          <a:lnRef idx="1">
-            <a:schemeClr val="accent1"/>
-          </a:lnRef>
-          <a:fillRef idx="3">
-            <a:schemeClr val="accent1"/>
-          </a:fillRef>
-          <a:effectRef idx="2">
-            <a:schemeClr val="accent1"/>
-          </a:effectRef>
-          <a:fontRef idx="minor">
-            <a:schemeClr val="lt1"/>
-          </a:fontRef>
-        </p:style>
-        <p:txBody>
-          <a:bodyPr rtlCol="0" anchor="ctr"/>
-          <a:lstStyle/>
-          <a:p>
-            <a:pPr algn="ctr"/>
-          </a:p>
-        </p:txBody>
-      </p:sp>
-      <p:sp>
-        <p:nvSpPr>
-          <p:cNvPr id="19" name="TextBox 18"/>
-          <p:cNvSpPr txBox="1"/>
-          <p:nvPr/>
-        </p:nvSpPr>
-        <p:spPr>
-          <a:xfrm>
-            <a:off x="6108192" y="1344168"/>
-            <a:ext cx="457200" cy="384048"/>
-          </a:xfrm>
-          <a:prstGeom prst="rect">
-            <a:avLst/>
-          </a:prstGeom>
-          <a:noFill/>
-        </p:spPr>
-        <p:txBody>
-          <a:bodyPr wrap="square">
-            <a:spAutoFit/>
-          </a:bodyPr>
-          <a:lstStyle/>
-          <a:p>
-            <a:pPr algn="ctr"/>
-            <a:r>
-              <a:rPr sz="1300" b="1" i="0">
-                <a:solidFill>
-                  <a:srgbClr val="FFFFFF"/>
-                </a:solidFill>
-              </a:rPr>
-              <a:t>02</a:t>
-            </a:r>
-          </a:p>
-        </p:txBody>
-      </p:sp>
-      <p:sp>
-        <p:nvSpPr>
-          <p:cNvPr id="20" name="TextBox 19"/>
-          <p:cNvSpPr txBox="1"/>
-          <p:nvPr/>
-        </p:nvSpPr>
-        <p:spPr>
-          <a:xfrm>
-            <a:off x="6638544" y="1216152"/>
-            <a:ext cx="4983479" cy="256032"/>
-          </a:xfrm>
-          <a:prstGeom prst="rect">
-            <a:avLst/>
-          </a:prstGeom>
-          <a:noFill/>
-        </p:spPr>
-        <p:txBody>
-          <a:bodyPr wrap="square">
-            <a:spAutoFit/>
-          </a:bodyPr>
-          <a:lstStyle/>
-          <a:p>
-            <a:pPr algn="l"/>
-            <a:r>
-              <a:rPr sz="900" b="1" i="0">
-                <a:solidFill>
-                  <a:srgbClr val="3AAEAE"/>
-                </a:solidFill>
-              </a:rPr>
-              <a:t>RESEARCH</a:t>
-            </a:r>
-          </a:p>
-        </p:txBody>
-      </p:sp>
-      <p:sp>
-        <p:nvSpPr>
-          <p:cNvPr id="21" name="TextBox 20"/>
-          <p:cNvSpPr txBox="1"/>
-          <p:nvPr/>
-        </p:nvSpPr>
-        <p:spPr>
-          <a:xfrm>
-            <a:off x="6638544" y="1472184"/>
-            <a:ext cx="4983479" cy="411480"/>
-          </a:xfrm>
-          <a:prstGeom prst="rect">
-            <a:avLst/>
-          </a:prstGeom>
-          <a:noFill/>
-        </p:spPr>
-        <p:txBody>
-          <a:bodyPr wrap="square">
-            <a:spAutoFit/>
-          </a:bodyPr>
-          <a:lstStyle/>
-          <a:p>
-            <a:pPr algn="l"/>
-            <a:r>
-              <a:rPr sz="750" b="0" i="0">
-                <a:solidFill>
-                  <a:srgbClr val="CCE5E5"/>
-                </a:solidFill>
-              </a:rPr>
-              <a:t>10 min prep: Google, site check, maps, competitors.</a:t>
-            </a:r>
-          </a:p>
-        </p:txBody>
-      </p:sp>
-      <p:sp>
-        <p:nvSpPr>
-          <p:cNvPr id="22" name="Rectangle 21"/>
-          <p:cNvSpPr/>
-          <p:nvPr/>
-        </p:nvSpPr>
-        <p:spPr>
-          <a:xfrm>
-            <a:off x="411480" y="2011680"/>
-            <a:ext cx="5577840" cy="777240"/>
-          </a:xfrm>
-          <a:prstGeom prst="rect">
-            <a:avLst/>
-          </a:prstGeom>
-          <a:solidFill>
-            <a:srgbClr val="1C2E2E"/>
-          </a:solidFill>
-          <a:ln>
-            <a:noFill/>
-          </a:ln>
-        </p:spPr>
-        <p:style>
-          <a:lnRef idx="1">
-            <a:schemeClr val="accent1"/>
-          </a:lnRef>
-          <a:fillRef idx="3">
-            <a:schemeClr val="accent1"/>
-          </a:fillRef>
-          <a:effectRef idx="2">
-            <a:schemeClr val="accent1"/>
-          </a:effectRef>
-          <a:fontRef idx="minor">
-            <a:schemeClr val="lt1"/>
-          </a:fontRef>
-        </p:style>
-        <p:txBody>
-          <a:bodyPr rtlCol="0" anchor="ctr"/>
-          <a:lstStyle/>
-          <a:p>
-            <a:pPr algn="ctr"/>
-          </a:p>
-        </p:txBody>
-      </p:sp>
-      <p:sp>
-        <p:nvSpPr>
-          <p:cNvPr id="23" name="Rectangle 22"/>
-          <p:cNvSpPr/>
-          <p:nvPr/>
-        </p:nvSpPr>
-        <p:spPr>
-          <a:xfrm>
-            <a:off x="411480" y="2011680"/>
-            <a:ext cx="457200" cy="777240"/>
-          </a:xfrm>
-          <a:prstGeom prst="rect">
-            <a:avLst/>
-          </a:prstGeom>
-          <a:solidFill>
-            <a:srgbClr val="2B8E8E"/>
-          </a:solidFill>
-          <a:ln>
-            <a:noFill/>
-          </a:ln>
-        </p:spPr>
-        <p:style>
-          <a:lnRef idx="1">
-            <a:schemeClr val="accent1"/>
-          </a:lnRef>
-          <a:fillRef idx="3">
-            <a:schemeClr val="accent1"/>
-          </a:fillRef>
-          <a:effectRef idx="2">
-            <a:schemeClr val="accent1"/>
-          </a:effectRef>
-          <a:fontRef idx="minor">
-            <a:schemeClr val="lt1"/>
-          </a:fontRef>
-        </p:style>
-        <p:txBody>
-          <a:bodyPr rtlCol="0" anchor="ctr"/>
-          <a:lstStyle/>
-          <a:p>
-            <a:pPr algn="ctr"/>
-          </a:p>
-        </p:txBody>
-      </p:sp>
-      <p:sp>
-        <p:nvSpPr>
-          <p:cNvPr id="24" name="TextBox 23"/>
-          <p:cNvSpPr txBox="1"/>
-          <p:nvPr/>
-        </p:nvSpPr>
-        <p:spPr>
-          <a:xfrm>
-            <a:off x="411480" y="2212848"/>
-            <a:ext cx="457200" cy="384048"/>
-          </a:xfrm>
-          <a:prstGeom prst="rect">
-            <a:avLst/>
-          </a:prstGeom>
-          <a:noFill/>
-        </p:spPr>
-        <p:txBody>
-          <a:bodyPr wrap="square">
-            <a:spAutoFit/>
-          </a:bodyPr>
-          <a:lstStyle/>
-          <a:p>
-            <a:pPr algn="ctr"/>
-            <a:r>
-              <a:rPr sz="1300" b="1" i="0">
-                <a:solidFill>
-                  <a:srgbClr val="FFFFFF"/>
-                </a:solidFill>
-              </a:rPr>
-              <a:t>03</a:t>
-            </a:r>
-          </a:p>
-        </p:txBody>
-      </p:sp>
-      <p:sp>
-        <p:nvSpPr>
-          <p:cNvPr id="25" name="TextBox 24"/>
-          <p:cNvSpPr txBox="1"/>
-          <p:nvPr/>
-        </p:nvSpPr>
-        <p:spPr>
-          <a:xfrm>
-            <a:off x="941832" y="2084832"/>
-            <a:ext cx="4983479" cy="256032"/>
-          </a:xfrm>
-          <a:prstGeom prst="rect">
-            <a:avLst/>
-          </a:prstGeom>
-          <a:noFill/>
-        </p:spPr>
-        <p:txBody>
-          <a:bodyPr wrap="square">
-            <a:spAutoFit/>
-          </a:bodyPr>
-          <a:lstStyle/>
-          <a:p>
-            <a:pPr algn="l"/>
-            <a:r>
-              <a:rPr sz="900" b="1" i="0">
-                <a:solidFill>
-                  <a:srgbClr val="3AAEAE"/>
-                </a:solidFill>
-              </a:rPr>
-              <a:t>DISCOVERY</a:t>
-            </a:r>
-          </a:p>
-        </p:txBody>
-      </p:sp>
-      <p:sp>
-        <p:nvSpPr>
-          <p:cNvPr id="26" name="TextBox 25"/>
-          <p:cNvSpPr txBox="1"/>
-          <p:nvPr/>
-        </p:nvSpPr>
-        <p:spPr>
-          <a:xfrm>
-            <a:off x="941832" y="2340864"/>
-            <a:ext cx="4983479" cy="411480"/>
-          </a:xfrm>
-          <a:prstGeom prst="rect">
-            <a:avLst/>
-          </a:prstGeom>
-          <a:noFill/>
-        </p:spPr>
-        <p:txBody>
-          <a:bodyPr wrap="square">
-            <a:spAutoFit/>
-          </a:bodyPr>
-          <a:lstStyle/>
-          <a:p>
-            <a:pPr algn="l"/>
-            <a:r>
-              <a:rPr sz="750" b="0" i="0">
-                <a:solidFill>
-                  <a:srgbClr val="CCE5E5"/>
-                </a:solidFill>
-              </a:rPr>
-              <a:t>6 Qs in sequence. Feed answers back verbatim.</a:t>
-            </a:r>
-          </a:p>
-        </p:txBody>
-      </p:sp>
-      <p:sp>
-        <p:nvSpPr>
-          <p:cNvPr id="27" name="Rectangle 26"/>
-          <p:cNvSpPr/>
-          <p:nvPr/>
-        </p:nvSpPr>
-        <p:spPr>
-          <a:xfrm>
-            <a:off x="6108192" y="2011680"/>
-            <a:ext cx="5577840" cy="777240"/>
-          </a:xfrm>
-          <a:prstGeom prst="rect">
-            <a:avLst/>
-          </a:prstGeom>
-          <a:solidFill>
-            <a:srgbClr val="1C2E2E"/>
-          </a:solidFill>
-          <a:ln>
-            <a:noFill/>
-          </a:ln>
-        </p:spPr>
-        <p:style>
-          <a:lnRef idx="1">
-            <a:schemeClr val="accent1"/>
-          </a:lnRef>
-          <a:fillRef idx="3">
-            <a:schemeClr val="accent1"/>
-          </a:fillRef>
-          <a:effectRef idx="2">
-            <a:schemeClr val="accent1"/>
-          </a:effectRef>
-          <a:fontRef idx="minor">
-            <a:schemeClr val="lt1"/>
-          </a:fontRef>
-        </p:style>
-        <p:txBody>
-          <a:bodyPr rtlCol="0" anchor="ctr"/>
-          <a:lstStyle/>
-          <a:p>
-            <a:pPr algn="ctr"/>
-          </a:p>
-        </p:txBody>
-      </p:sp>
-      <p:sp>
-        <p:nvSpPr>
-          <p:cNvPr id="28" name="Rectangle 27"/>
-          <p:cNvSpPr/>
-          <p:nvPr/>
-        </p:nvSpPr>
-        <p:spPr>
-          <a:xfrm>
-            <a:off x="6108192" y="2011680"/>
-            <a:ext cx="457200" cy="777240"/>
-          </a:xfrm>
-          <a:prstGeom prst="rect">
-            <a:avLst/>
-          </a:prstGeom>
-          <a:solidFill>
-            <a:srgbClr val="2B8E8E"/>
-          </a:solidFill>
-          <a:ln>
-            <a:noFill/>
-          </a:ln>
-        </p:spPr>
-        <p:style>
-          <a:lnRef idx="1">
-            <a:schemeClr val="accent1"/>
-          </a:lnRef>
-          <a:fillRef idx="3">
-            <a:schemeClr val="accent1"/>
-          </a:fillRef>
-          <a:effectRef idx="2">
-            <a:schemeClr val="accent1"/>
-          </a:effectRef>
-          <a:fontRef idx="minor">
-            <a:schemeClr val="lt1"/>
-          </a:fontRef>
-        </p:style>
-        <p:txBody>
-          <a:bodyPr rtlCol="0" anchor="ctr"/>
-          <a:lstStyle/>
-          <a:p>
-            <a:pPr algn="ctr"/>
-          </a:p>
-        </p:txBody>
-      </p:sp>
-      <p:sp>
-        <p:nvSpPr>
-          <p:cNvPr id="29" name="TextBox 28"/>
-          <p:cNvSpPr txBox="1"/>
-          <p:nvPr/>
-        </p:nvSpPr>
-        <p:spPr>
-          <a:xfrm>
-            <a:off x="6108192" y="2212848"/>
-            <a:ext cx="457200" cy="384048"/>
-          </a:xfrm>
-          <a:prstGeom prst="rect">
-            <a:avLst/>
-          </a:prstGeom>
-          <a:noFill/>
-        </p:spPr>
-        <p:txBody>
-          <a:bodyPr wrap="square">
-            <a:spAutoFit/>
-          </a:bodyPr>
-          <a:lstStyle/>
-          <a:p>
-            <a:pPr algn="ctr"/>
-            <a:r>
-              <a:rPr sz="1300" b="1" i="0">
-                <a:solidFill>
-                  <a:srgbClr val="FFFFFF"/>
-                </a:solidFill>
-              </a:rPr>
-              <a:t>04</a:t>
-            </a:r>
-          </a:p>
-        </p:txBody>
-      </p:sp>
-      <p:sp>
-        <p:nvSpPr>
-          <p:cNvPr id="30" name="TextBox 29"/>
-          <p:cNvSpPr txBox="1"/>
-          <p:nvPr/>
-        </p:nvSpPr>
-        <p:spPr>
-          <a:xfrm>
-            <a:off x="6638544" y="2084832"/>
-            <a:ext cx="4983479" cy="256032"/>
-          </a:xfrm>
-          <a:prstGeom prst="rect">
-            <a:avLst/>
-          </a:prstGeom>
-          <a:noFill/>
-        </p:spPr>
-        <p:txBody>
-          <a:bodyPr wrap="square">
-            <a:spAutoFit/>
-          </a:bodyPr>
-          <a:lstStyle/>
-          <a:p>
-            <a:pPr algn="l"/>
-            <a:r>
-              <a:rPr sz="900" b="1" i="0">
-                <a:solidFill>
-                  <a:srgbClr val="3AAEAE"/>
-                </a:solidFill>
-              </a:rPr>
-              <a:t>REVEAL</a:t>
-            </a:r>
-          </a:p>
-        </p:txBody>
-      </p:sp>
-      <p:sp>
-        <p:nvSpPr>
-          <p:cNvPr id="31" name="TextBox 30"/>
-          <p:cNvSpPr txBox="1"/>
-          <p:nvPr/>
-        </p:nvSpPr>
-        <p:spPr>
-          <a:xfrm>
-            <a:off x="6638544" y="2340864"/>
-            <a:ext cx="4983479" cy="411480"/>
-          </a:xfrm>
-          <a:prstGeom prst="rect">
-            <a:avLst/>
-          </a:prstGeom>
-          <a:noFill/>
-        </p:spPr>
-        <p:txBody>
-          <a:bodyPr wrap="square">
-            <a:spAutoFit/>
-          </a:bodyPr>
-          <a:lstStyle/>
-          <a:p>
-            <a:pPr algn="l"/>
-            <a:r>
-              <a:rPr sz="750" b="0" i="0">
-                <a:solidFill>
-                  <a:srgbClr val="CCE5E5"/>
-                </a:solidFill>
-              </a:rPr>
-              <a:t>Silent demo → anchor £2,000+ → land £450/£650.</a:t>
-            </a:r>
-          </a:p>
-        </p:txBody>
-      </p:sp>
-      <p:sp>
-        <p:nvSpPr>
-          <p:cNvPr id="32" name="Rectangle 31"/>
-          <p:cNvSpPr/>
-          <p:nvPr/>
-        </p:nvSpPr>
-        <p:spPr>
-          <a:xfrm>
-            <a:off x="411480" y="2880360"/>
-            <a:ext cx="5577840" cy="777240"/>
-          </a:xfrm>
-          <a:prstGeom prst="rect">
-            <a:avLst/>
-          </a:prstGeom>
-          <a:solidFill>
-            <a:srgbClr val="1C2E2E"/>
-          </a:solidFill>
-          <a:ln>
-            <a:noFill/>
-          </a:ln>
-        </p:spPr>
-        <p:style>
-          <a:lnRef idx="1">
-            <a:schemeClr val="accent1"/>
-          </a:lnRef>
-          <a:fillRef idx="3">
-            <a:schemeClr val="accent1"/>
-          </a:fillRef>
-          <a:effectRef idx="2">
-            <a:schemeClr val="accent1"/>
-          </a:effectRef>
-          <a:fontRef idx="minor">
-            <a:schemeClr val="lt1"/>
-          </a:fontRef>
-        </p:style>
-        <p:txBody>
-          <a:bodyPr rtlCol="0" anchor="ctr"/>
-          <a:lstStyle/>
-          <a:p>
-            <a:pPr algn="ctr"/>
-          </a:p>
-        </p:txBody>
-      </p:sp>
-      <p:sp>
-        <p:nvSpPr>
-          <p:cNvPr id="33" name="Rectangle 32"/>
-          <p:cNvSpPr/>
-          <p:nvPr/>
-        </p:nvSpPr>
-        <p:spPr>
-          <a:xfrm>
-            <a:off x="411480" y="2880360"/>
-            <a:ext cx="457200" cy="777240"/>
-          </a:xfrm>
-          <a:prstGeom prst="rect">
-            <a:avLst/>
-          </a:prstGeom>
-          <a:solidFill>
-            <a:srgbClr val="2B8E8E"/>
-          </a:solidFill>
-          <a:ln>
-            <a:noFill/>
-          </a:ln>
-        </p:spPr>
-        <p:style>
-          <a:lnRef idx="1">
-            <a:schemeClr val="accent1"/>
-          </a:lnRef>
-          <a:fillRef idx="3">
-            <a:schemeClr val="accent1"/>
-          </a:fillRef>
-          <a:effectRef idx="2">
-            <a:schemeClr val="accent1"/>
-          </a:effectRef>
-          <a:fontRef idx="minor">
-            <a:schemeClr val="lt1"/>
-          </a:fontRef>
-        </p:style>
-        <p:txBody>
-          <a:bodyPr rtlCol="0" anchor="ctr"/>
-          <a:lstStyle/>
-          <a:p>
-            <a:pPr algn="ctr"/>
-          </a:p>
-        </p:txBody>
-      </p:sp>
-      <p:sp>
-        <p:nvSpPr>
-          <p:cNvPr id="34" name="TextBox 33"/>
-          <p:cNvSpPr txBox="1"/>
-          <p:nvPr/>
-        </p:nvSpPr>
-        <p:spPr>
-          <a:xfrm>
-            <a:off x="411480" y="3081528"/>
-            <a:ext cx="457200" cy="384048"/>
-          </a:xfrm>
-          <a:prstGeom prst="rect">
-            <a:avLst/>
-          </a:prstGeom>
-          <a:noFill/>
-        </p:spPr>
-        <p:txBody>
-          <a:bodyPr wrap="square">
-            <a:spAutoFit/>
-          </a:bodyPr>
-          <a:lstStyle/>
-          <a:p>
-            <a:pPr algn="ctr"/>
-            <a:r>
-              <a:rPr sz="1300" b="1" i="0">
-                <a:solidFill>
-                  <a:srgbClr val="FFFFFF"/>
-                </a:solidFill>
-              </a:rPr>
-              <a:t>05</a:t>
-            </a:r>
-          </a:p>
-        </p:txBody>
-      </p:sp>
-      <p:sp>
-        <p:nvSpPr>
-          <p:cNvPr id="35" name="TextBox 34"/>
-          <p:cNvSpPr txBox="1"/>
-          <p:nvPr/>
-        </p:nvSpPr>
-        <p:spPr>
-          <a:xfrm>
-            <a:off x="941832" y="2953512"/>
-            <a:ext cx="4983479" cy="256032"/>
-          </a:xfrm>
-          <a:prstGeom prst="rect">
-            <a:avLst/>
-          </a:prstGeom>
-          <a:noFill/>
-        </p:spPr>
-        <p:txBody>
-          <a:bodyPr wrap="square">
-            <a:spAutoFit/>
-          </a:bodyPr>
-          <a:lstStyle/>
-          <a:p>
-            <a:pPr algn="l"/>
-            <a:r>
-              <a:rPr sz="900" b="1" i="0">
-                <a:solidFill>
-                  <a:srgbClr val="3AAEAE"/>
-                </a:solidFill>
-              </a:rPr>
-              <a:t>CLOSE</a:t>
-            </a:r>
-          </a:p>
-        </p:txBody>
-      </p:sp>
-      <p:sp>
-        <p:nvSpPr>
-          <p:cNvPr id="36" name="TextBox 35"/>
-          <p:cNvSpPr txBox="1"/>
-          <p:nvPr/>
-        </p:nvSpPr>
-        <p:spPr>
-          <a:xfrm>
-            <a:off x="941832" y="3209544"/>
-            <a:ext cx="4983479" cy="411480"/>
-          </a:xfrm>
-          <a:prstGeom prst="rect">
-            <a:avLst/>
-          </a:prstGeom>
-          <a:noFill/>
-        </p:spPr>
-        <p:txBody>
-          <a:bodyPr wrap="square">
-            <a:spAutoFit/>
-          </a:bodyPr>
-          <a:lstStyle/>
-          <a:p>
-            <a:pPr algn="l"/>
-            <a:r>
-              <a:rPr sz="750" b="0" i="0">
-                <a:solidFill>
-                  <a:srgbClr val="CCE5E5"/>
-                </a:solidFill>
-              </a:rPr>
-              <a:t>Handle every objection. Pick a close technique. Silence.</a:t>
-            </a:r>
-          </a:p>
-        </p:txBody>
-      </p:sp>
-      <p:sp>
-        <p:nvSpPr>
-          <p:cNvPr id="37" name="Rectangle 36"/>
-          <p:cNvSpPr/>
-          <p:nvPr/>
-        </p:nvSpPr>
-        <p:spPr>
-          <a:xfrm>
-            <a:off x="6108192" y="2880360"/>
-            <a:ext cx="5577840" cy="777240"/>
-          </a:xfrm>
-          <a:prstGeom prst="rect">
-            <a:avLst/>
-          </a:prstGeom>
-          <a:solidFill>
-            <a:srgbClr val="1C2E2E"/>
-          </a:solidFill>
-          <a:ln>
-            <a:noFill/>
-          </a:ln>
-        </p:spPr>
-        <p:style>
-          <a:lnRef idx="1">
-            <a:schemeClr val="accent1"/>
-          </a:lnRef>
-          <a:fillRef idx="3">
-            <a:schemeClr val="accent1"/>
-          </a:fillRef>
-          <a:effectRef idx="2">
-            <a:schemeClr val="accent1"/>
-          </a:effectRef>
-          <a:fontRef idx="minor">
-            <a:schemeClr val="lt1"/>
-          </a:fontRef>
-        </p:style>
-        <p:txBody>
-          <a:bodyPr rtlCol="0" anchor="ctr"/>
-          <a:lstStyle/>
-          <a:p>
-            <a:pPr algn="ctr"/>
-          </a:p>
-        </p:txBody>
-      </p:sp>
-      <p:sp>
-        <p:nvSpPr>
-          <p:cNvPr id="38" name="Rectangle 37"/>
-          <p:cNvSpPr/>
-          <p:nvPr/>
-        </p:nvSpPr>
-        <p:spPr>
-          <a:xfrm>
-            <a:off x="6108192" y="2880360"/>
-            <a:ext cx="457200" cy="777240"/>
-          </a:xfrm>
-          <a:prstGeom prst="rect">
-            <a:avLst/>
-          </a:prstGeom>
-          <a:solidFill>
-            <a:srgbClr val="2B8E8E"/>
-          </a:solidFill>
-          <a:ln>
-            <a:noFill/>
-          </a:ln>
-        </p:spPr>
-        <p:style>
-          <a:lnRef idx="1">
-            <a:schemeClr val="accent1"/>
-          </a:lnRef>
-          <a:fillRef idx="3">
-            <a:schemeClr val="accent1"/>
-          </a:fillRef>
-          <a:effectRef idx="2">
-            <a:schemeClr val="accent1"/>
-          </a:effectRef>
-          <a:fontRef idx="minor">
-            <a:schemeClr val="lt1"/>
-          </a:fontRef>
-        </p:style>
-        <p:txBody>
-          <a:bodyPr rtlCol="0" anchor="ctr"/>
-          <a:lstStyle/>
-          <a:p>
-            <a:pPr algn="ctr"/>
-          </a:p>
-        </p:txBody>
-      </p:sp>
-      <p:sp>
-        <p:nvSpPr>
-          <p:cNvPr id="39" name="TextBox 38"/>
-          <p:cNvSpPr txBox="1"/>
-          <p:nvPr/>
-        </p:nvSpPr>
-        <p:spPr>
-          <a:xfrm>
-            <a:off x="6108192" y="3081528"/>
-            <a:ext cx="457200" cy="384048"/>
-          </a:xfrm>
-          <a:prstGeom prst="rect">
-            <a:avLst/>
-          </a:prstGeom>
-          <a:noFill/>
-        </p:spPr>
-        <p:txBody>
-          <a:bodyPr wrap="square">
-            <a:spAutoFit/>
-          </a:bodyPr>
-          <a:lstStyle/>
-          <a:p>
-            <a:pPr algn="ctr"/>
-            <a:r>
-              <a:rPr sz="1300" b="1" i="0">
-                <a:solidFill>
-                  <a:srgbClr val="FFFFFF"/>
-                </a:solidFill>
-              </a:rPr>
-              <a:t>06</a:t>
-            </a:r>
-          </a:p>
-        </p:txBody>
-      </p:sp>
-      <p:sp>
-        <p:nvSpPr>
-          <p:cNvPr id="40" name="TextBox 39"/>
-          <p:cNvSpPr txBox="1"/>
-          <p:nvPr/>
-        </p:nvSpPr>
-        <p:spPr>
-          <a:xfrm>
-            <a:off x="6638544" y="2953512"/>
-            <a:ext cx="4983479" cy="256032"/>
-          </a:xfrm>
-          <a:prstGeom prst="rect">
-            <a:avLst/>
-          </a:prstGeom>
-          <a:noFill/>
-        </p:spPr>
-        <p:txBody>
-          <a:bodyPr wrap="square">
-            <a:spAutoFit/>
-          </a:bodyPr>
-          <a:lstStyle/>
-          <a:p>
-            <a:pPr algn="l"/>
-            <a:r>
-              <a:rPr sz="900" b="1" i="0">
-                <a:solidFill>
-                  <a:srgbClr val="3AAEAE"/>
-                </a:solidFill>
-              </a:rPr>
-              <a:t>POST-CLOSE</a:t>
-            </a:r>
-          </a:p>
-        </p:txBody>
-      </p:sp>
-      <p:sp>
-        <p:nvSpPr>
-          <p:cNvPr id="41" name="TextBox 40"/>
-          <p:cNvSpPr txBox="1"/>
-          <p:nvPr/>
-        </p:nvSpPr>
-        <p:spPr>
-          <a:xfrm>
-            <a:off x="6638544" y="3209544"/>
-            <a:ext cx="4983479" cy="411480"/>
-          </a:xfrm>
-          <a:prstGeom prst="rect">
-            <a:avLst/>
-          </a:prstGeom>
-          <a:noFill/>
-        </p:spPr>
-        <p:txBody>
-          <a:bodyPr wrap="square">
-            <a:spAutoFit/>
-          </a:bodyPr>
-          <a:lstStyle/>
-          <a:p>
-            <a:pPr algn="l"/>
-            <a:r>
-              <a:rPr sz="750" b="0" i="0">
-                <a:solidFill>
-                  <a:srgbClr val="CCE5E5"/>
-                </a:solidFill>
-              </a:rPr>
-              <a:t>Invoice → CRM → brief call → site live in 24 hours.</a:t>
-            </a:r>
-          </a:p>
-        </p:txBody>
-      </p:sp>
-      <p:sp>
-        <p:nvSpPr>
-          <p:cNvPr id="42" name="Rectangle 41"/>
-          <p:cNvSpPr/>
-          <p:nvPr/>
-        </p:nvSpPr>
-        <p:spPr>
-          <a:xfrm>
-            <a:off x="411480" y="3794759"/>
-            <a:ext cx="11365992" cy="27432"/>
-          </a:xfrm>
-          <a:prstGeom prst="rect">
-            <a:avLst/>
-          </a:prstGeom>
-          <a:solidFill>
-            <a:srgbClr val="2B8E8E"/>
-          </a:solidFill>
-          <a:ln>
-            <a:noFill/>
-          </a:ln>
-        </p:spPr>
-        <p:style>
-          <a:lnRef idx="1">
-            <a:schemeClr val="accent1"/>
-          </a:lnRef>
-          <a:fillRef idx="3">
-            <a:schemeClr val="accent1"/>
-          </a:fillRef>
-          <a:effectRef idx="2">
-            <a:schemeClr val="accent1"/>
-          </a:effectRef>
-          <a:fontRef idx="minor">
-            <a:schemeClr val="lt1"/>
-          </a:fontRef>
-        </p:style>
-        <p:txBody>
-          <a:bodyPr rtlCol="0" anchor="ctr"/>
-          <a:lstStyle/>
-          <a:p>
-            <a:pPr algn="ctr"/>
-          </a:p>
-        </p:txBody>
-      </p:sp>
-      <p:sp>
-        <p:nvSpPr>
-          <p:cNvPr id="43" name="TextBox 42"/>
-          <p:cNvSpPr txBox="1"/>
-          <p:nvPr/>
-        </p:nvSpPr>
-        <p:spPr>
-          <a:xfrm>
-            <a:off x="411480" y="3886199"/>
-            <a:ext cx="4572000" cy="228600"/>
-          </a:xfrm>
-          <a:prstGeom prst="rect">
-            <a:avLst/>
-          </a:prstGeom>
-          <a:noFill/>
-        </p:spPr>
-        <p:txBody>
-          <a:bodyPr wrap="square">
-            <a:spAutoFit/>
-          </a:bodyPr>
-          <a:lstStyle/>
-          <a:p>
-            <a:pPr algn="l"/>
-            <a:r>
-              <a:rPr sz="800" b="1" i="0">
-                <a:solidFill>
-                  <a:srgbClr val="2B8E8E"/>
-                </a:solidFill>
-              </a:rPr>
-              <a:t>TARGETS — NON-NEGOTIABLE</a:t>
-            </a:r>
-          </a:p>
-        </p:txBody>
-      </p:sp>
-      <p:sp>
-        <p:nvSpPr>
-          <p:cNvPr id="44" name="Rectangle 43"/>
-          <p:cNvSpPr/>
-          <p:nvPr/>
-        </p:nvSpPr>
-        <p:spPr>
-          <a:xfrm>
-            <a:off x="411480" y="4178807"/>
-            <a:ext cx="2194560" cy="658368"/>
-          </a:xfrm>
-          <a:prstGeom prst="rect">
-            <a:avLst/>
-          </a:prstGeom>
-          <a:solidFill>
-            <a:srgbClr val="1C2E2E"/>
-          </a:solidFill>
-          <a:ln>
-            <a:noFill/>
-          </a:ln>
-        </p:spPr>
-        <p:style>
-          <a:lnRef idx="1">
-            <a:schemeClr val="accent1"/>
-          </a:lnRef>
-          <a:fillRef idx="3">
-            <a:schemeClr val="accent1"/>
-          </a:fillRef>
-          <a:effectRef idx="2">
-            <a:schemeClr val="accent1"/>
-          </a:effectRef>
-          <a:fontRef idx="minor">
-            <a:schemeClr val="lt1"/>
-          </a:fontRef>
-        </p:style>
-        <p:txBody>
-          <a:bodyPr rtlCol="0" anchor="ctr"/>
-          <a:lstStyle/>
-          <a:p>
-            <a:pPr algn="ctr"/>
-          </a:p>
-        </p:txBody>
-      </p:sp>
-      <p:sp>
-        <p:nvSpPr>
-          <p:cNvPr id="45" name="Rectangle 44"/>
-          <p:cNvSpPr/>
-          <p:nvPr/>
-        </p:nvSpPr>
-        <p:spPr>
-          <a:xfrm>
-            <a:off x="411480" y="4178807"/>
-            <a:ext cx="2194560" cy="27432"/>
-          </a:xfrm>
-          <a:prstGeom prst="rect">
-            <a:avLst/>
-          </a:prstGeom>
-          <a:solidFill>
-            <a:srgbClr val="2B8E8E"/>
-          </a:solidFill>
-          <a:ln>
-            <a:noFill/>
-          </a:ln>
-        </p:spPr>
-        <p:style>
-          <a:lnRef idx="1">
-            <a:schemeClr val="accent1"/>
-          </a:lnRef>
-          <a:fillRef idx="3">
-            <a:schemeClr val="accent1"/>
-          </a:fillRef>
-          <a:effectRef idx="2">
-            <a:schemeClr val="accent1"/>
-          </a:effectRef>
-          <a:fontRef idx="minor">
-            <a:schemeClr val="lt1"/>
-          </a:fontRef>
-        </p:style>
-        <p:txBody>
-          <a:bodyPr rtlCol="0" anchor="ctr"/>
-          <a:lstStyle/>
-          <a:p>
-            <a:pPr algn="ctr"/>
-          </a:p>
-        </p:txBody>
-      </p:sp>
-      <p:sp>
-        <p:nvSpPr>
-          <p:cNvPr id="46" name="TextBox 45"/>
-          <p:cNvSpPr txBox="1"/>
-          <p:nvPr/>
-        </p:nvSpPr>
-        <p:spPr>
-          <a:xfrm>
-            <a:off x="411480" y="4215383"/>
-            <a:ext cx="2194560" cy="320040"/>
-          </a:xfrm>
-          <a:prstGeom prst="rect">
-            <a:avLst/>
-          </a:prstGeom>
-          <a:noFill/>
-        </p:spPr>
-        <p:txBody>
-          <a:bodyPr wrap="square">
-            <a:spAutoFit/>
-          </a:bodyPr>
-          <a:lstStyle/>
-          <a:p>
-            <a:pPr algn="ctr"/>
-            <a:r>
-              <a:rPr sz="1800" b="1" i="0">
-                <a:solidFill>
-                  <a:srgbClr val="3AAEAE"/>
-                </a:solidFill>
-              </a:rPr>
-              <a:t>500+</a:t>
-            </a:r>
-          </a:p>
-        </p:txBody>
-      </p:sp>
-      <p:sp>
-        <p:nvSpPr>
-          <p:cNvPr id="47" name="TextBox 46"/>
-          <p:cNvSpPr txBox="1"/>
-          <p:nvPr/>
-        </p:nvSpPr>
-        <p:spPr>
-          <a:xfrm>
-            <a:off x="411480" y="4544568"/>
-            <a:ext cx="2194560" cy="256032"/>
-          </a:xfrm>
-          <a:prstGeom prst="rect">
-            <a:avLst/>
-          </a:prstGeom>
-          <a:noFill/>
-        </p:spPr>
-        <p:txBody>
-          <a:bodyPr wrap="square">
-            <a:spAutoFit/>
-          </a:bodyPr>
-          <a:lstStyle/>
-          <a:p>
-            <a:pPr algn="ctr"/>
-            <a:r>
-              <a:rPr sz="700" b="0" i="0">
-                <a:solidFill>
-                  <a:srgbClr val="AACCCC"/>
-                </a:solidFill>
-              </a:rPr>
-              <a:t>Outbound calls / week</a:t>
-            </a:r>
-          </a:p>
-        </p:txBody>
-      </p:sp>
-      <p:sp>
-        <p:nvSpPr>
-          <p:cNvPr id="48" name="Rectangle 47"/>
-          <p:cNvSpPr/>
-          <p:nvPr/>
-        </p:nvSpPr>
-        <p:spPr>
-          <a:xfrm>
-            <a:off x="2679192" y="4178807"/>
-            <a:ext cx="2194560" cy="658368"/>
-          </a:xfrm>
-          <a:prstGeom prst="rect">
-            <a:avLst/>
-          </a:prstGeom>
-          <a:solidFill>
-            <a:srgbClr val="1C2E2E"/>
-          </a:solidFill>
-          <a:ln>
-            <a:noFill/>
-          </a:ln>
-        </p:spPr>
-        <p:style>
-          <a:lnRef idx="1">
-            <a:schemeClr val="accent1"/>
-          </a:lnRef>
-          <a:fillRef idx="3">
-            <a:schemeClr val="accent1"/>
-          </a:fillRef>
-          <a:effectRef idx="2">
-            <a:schemeClr val="accent1"/>
-          </a:effectRef>
-          <a:fontRef idx="minor">
-            <a:schemeClr val="lt1"/>
-          </a:fontRef>
-        </p:style>
-        <p:txBody>
-          <a:bodyPr rtlCol="0" anchor="ctr"/>
-          <a:lstStyle/>
-          <a:p>
-            <a:pPr algn="ctr"/>
-          </a:p>
-        </p:txBody>
-      </p:sp>
-      <p:sp>
-        <p:nvSpPr>
-          <p:cNvPr id="49" name="Rectangle 48"/>
-          <p:cNvSpPr/>
-          <p:nvPr/>
-        </p:nvSpPr>
-        <p:spPr>
-          <a:xfrm>
-            <a:off x="2679192" y="4178807"/>
-            <a:ext cx="2194560" cy="27432"/>
-          </a:xfrm>
-          <a:prstGeom prst="rect">
-            <a:avLst/>
-          </a:prstGeom>
-          <a:solidFill>
-            <a:srgbClr val="2B8E8E"/>
-          </a:solidFill>
-          <a:ln>
-            <a:noFill/>
-          </a:ln>
-        </p:spPr>
-        <p:style>
-          <a:lnRef idx="1">
-            <a:schemeClr val="accent1"/>
-          </a:lnRef>
-          <a:fillRef idx="3">
-            <a:schemeClr val="accent1"/>
-          </a:fillRef>
-          <a:effectRef idx="2">
-            <a:schemeClr val="accent1"/>
-          </a:effectRef>
-          <a:fontRef idx="minor">
-            <a:schemeClr val="lt1"/>
-          </a:fontRef>
-        </p:style>
-        <p:txBody>
-          <a:bodyPr rtlCol="0" anchor="ctr"/>
-          <a:lstStyle/>
-          <a:p>
-            <a:pPr algn="ctr"/>
-          </a:p>
-        </p:txBody>
-      </p:sp>
-      <p:sp>
-        <p:nvSpPr>
-          <p:cNvPr id="50" name="TextBox 49"/>
-          <p:cNvSpPr txBox="1"/>
-          <p:nvPr/>
-        </p:nvSpPr>
-        <p:spPr>
-          <a:xfrm>
-            <a:off x="2679192" y="4215383"/>
-            <a:ext cx="2194560" cy="320040"/>
-          </a:xfrm>
-          <a:prstGeom prst="rect">
-            <a:avLst/>
-          </a:prstGeom>
-          <a:noFill/>
-        </p:spPr>
-        <p:txBody>
-          <a:bodyPr wrap="square">
-            <a:spAutoFit/>
-          </a:bodyPr>
-          <a:lstStyle/>
-          <a:p>
-            <a:pPr algn="ctr"/>
-            <a:r>
-              <a:rPr sz="1800" b="1" i="0">
-                <a:solidFill>
-                  <a:srgbClr val="3AAEAE"/>
-                </a:solidFill>
-              </a:rPr>
-              <a:t>5+</a:t>
-            </a:r>
-          </a:p>
-        </p:txBody>
-      </p:sp>
-      <p:sp>
-        <p:nvSpPr>
-          <p:cNvPr id="51" name="TextBox 50"/>
-          <p:cNvSpPr txBox="1"/>
-          <p:nvPr/>
-        </p:nvSpPr>
-        <p:spPr>
-          <a:xfrm>
-            <a:off x="2679192" y="4544568"/>
-            <a:ext cx="2194560" cy="256032"/>
-          </a:xfrm>
-          <a:prstGeom prst="rect">
-            <a:avLst/>
-          </a:prstGeom>
-          <a:noFill/>
-        </p:spPr>
-        <p:txBody>
-          <a:bodyPr wrap="square">
-            <a:spAutoFit/>
-          </a:bodyPr>
-          <a:lstStyle/>
-          <a:p>
-            <a:pPr algn="ctr"/>
-            <a:r>
-              <a:rPr sz="700" b="0" i="0">
-                <a:solidFill>
-                  <a:srgbClr val="AACCCC"/>
-                </a:solidFill>
-              </a:rPr>
-              <a:t>Closes / week</a:t>
-            </a:r>
-          </a:p>
-        </p:txBody>
-      </p:sp>
-      <p:sp>
-        <p:nvSpPr>
-          <p:cNvPr id="52" name="Rectangle 51"/>
-          <p:cNvSpPr/>
-          <p:nvPr/>
-        </p:nvSpPr>
-        <p:spPr>
-          <a:xfrm>
-            <a:off x="4946904" y="4178807"/>
-            <a:ext cx="2194560" cy="658368"/>
-          </a:xfrm>
-          <a:prstGeom prst="rect">
-            <a:avLst/>
-          </a:prstGeom>
-          <a:solidFill>
-            <a:srgbClr val="1C2E2E"/>
-          </a:solidFill>
-          <a:ln>
-            <a:noFill/>
-          </a:ln>
-        </p:spPr>
-        <p:style>
-          <a:lnRef idx="1">
-            <a:schemeClr val="accent1"/>
-          </a:lnRef>
-          <a:fillRef idx="3">
-            <a:schemeClr val="accent1"/>
-          </a:fillRef>
-          <a:effectRef idx="2">
-            <a:schemeClr val="accent1"/>
-          </a:effectRef>
-          <a:fontRef idx="minor">
-            <a:schemeClr val="lt1"/>
-          </a:fontRef>
-        </p:style>
-        <p:txBody>
-          <a:bodyPr rtlCol="0" anchor="ctr"/>
-          <a:lstStyle/>
-          <a:p>
-            <a:pPr algn="ctr"/>
-          </a:p>
-        </p:txBody>
-      </p:sp>
-      <p:sp>
-        <p:nvSpPr>
-          <p:cNvPr id="53" name="Rectangle 52"/>
-          <p:cNvSpPr/>
-          <p:nvPr/>
-        </p:nvSpPr>
-        <p:spPr>
-          <a:xfrm>
-            <a:off x="4946904" y="4178807"/>
-            <a:ext cx="2194560" cy="27432"/>
-          </a:xfrm>
-          <a:prstGeom prst="rect">
-            <a:avLst/>
-          </a:prstGeom>
-          <a:solidFill>
-            <a:srgbClr val="2B8E8E"/>
-          </a:solidFill>
-          <a:ln>
-            <a:noFill/>
-          </a:ln>
-        </p:spPr>
-        <p:style>
-          <a:lnRef idx="1">
-            <a:schemeClr val="accent1"/>
-          </a:lnRef>
-          <a:fillRef idx="3">
-            <a:schemeClr val="accent1"/>
-          </a:fillRef>
-          <a:effectRef idx="2">
-            <a:schemeClr val="accent1"/>
-          </a:effectRef>
-          <a:fontRef idx="minor">
-            <a:schemeClr val="lt1"/>
-          </a:fontRef>
-        </p:style>
-        <p:txBody>
-          <a:bodyPr rtlCol="0" anchor="ctr"/>
-          <a:lstStyle/>
-          <a:p>
-            <a:pPr algn="ctr"/>
-          </a:p>
-        </p:txBody>
-      </p:sp>
-      <p:sp>
-        <p:nvSpPr>
-          <p:cNvPr id="54" name="TextBox 53"/>
-          <p:cNvSpPr txBox="1"/>
-          <p:nvPr/>
-        </p:nvSpPr>
-        <p:spPr>
-          <a:xfrm>
-            <a:off x="4946904" y="4215383"/>
-            <a:ext cx="2194560" cy="320040"/>
-          </a:xfrm>
-          <a:prstGeom prst="rect">
-            <a:avLst/>
-          </a:prstGeom>
-          <a:noFill/>
-        </p:spPr>
-        <p:txBody>
-          <a:bodyPr wrap="square">
-            <a:spAutoFit/>
-          </a:bodyPr>
-          <a:lstStyle/>
-          <a:p>
-            <a:pPr algn="ctr"/>
-            <a:r>
-              <a:rPr sz="1800" b="1" i="0">
-                <a:solidFill>
-                  <a:srgbClr val="3AAEAE"/>
-                </a:solidFill>
-              </a:rPr>
-              <a:t>£450</a:t>
-            </a:r>
-          </a:p>
-        </p:txBody>
-      </p:sp>
-      <p:sp>
-        <p:nvSpPr>
-          <p:cNvPr id="55" name="TextBox 54"/>
-          <p:cNvSpPr txBox="1"/>
-          <p:nvPr/>
-        </p:nvSpPr>
-        <p:spPr>
-          <a:xfrm>
-            <a:off x="4946904" y="4544568"/>
-            <a:ext cx="2194560" cy="256032"/>
-          </a:xfrm>
-          <a:prstGeom prst="rect">
-            <a:avLst/>
-          </a:prstGeom>
-          <a:noFill/>
-        </p:spPr>
-        <p:txBody>
-          <a:bodyPr wrap="square">
-            <a:spAutoFit/>
-          </a:bodyPr>
-          <a:lstStyle/>
-          <a:p>
-            <a:pPr algn="ctr"/>
-            <a:r>
-              <a:rPr sz="700" b="0" i="0">
-                <a:solidFill>
-                  <a:srgbClr val="AACCCC"/>
-                </a:solidFill>
-              </a:rPr>
-              <a:t>Min deal value</a:t>
-            </a:r>
-          </a:p>
-        </p:txBody>
-      </p:sp>
-      <p:sp>
-        <p:nvSpPr>
-          <p:cNvPr id="56" name="Rectangle 55"/>
-          <p:cNvSpPr/>
-          <p:nvPr/>
-        </p:nvSpPr>
-        <p:spPr>
-          <a:xfrm>
-            <a:off x="7214616" y="4178807"/>
-            <a:ext cx="2194560" cy="658368"/>
-          </a:xfrm>
-          <a:prstGeom prst="rect">
-            <a:avLst/>
-          </a:prstGeom>
-          <a:solidFill>
-            <a:srgbClr val="1C2E2E"/>
-          </a:solidFill>
-          <a:ln>
-            <a:noFill/>
-          </a:ln>
-        </p:spPr>
-        <p:style>
-          <a:lnRef idx="1">
-            <a:schemeClr val="accent1"/>
-          </a:lnRef>
-          <a:fillRef idx="3">
-            <a:schemeClr val="accent1"/>
-          </a:fillRef>
-          <a:effectRef idx="2">
-            <a:schemeClr val="accent1"/>
-          </a:effectRef>
-          <a:fontRef idx="minor">
-            <a:schemeClr val="lt1"/>
-          </a:fontRef>
-        </p:style>
-        <p:txBody>
-          <a:bodyPr rtlCol="0" anchor="ctr"/>
-          <a:lstStyle/>
-          <a:p>
-            <a:pPr algn="ctr"/>
-          </a:p>
-        </p:txBody>
-      </p:sp>
-      <p:sp>
-        <p:nvSpPr>
-          <p:cNvPr id="57" name="Rectangle 56"/>
-          <p:cNvSpPr/>
-          <p:nvPr/>
-        </p:nvSpPr>
-        <p:spPr>
-          <a:xfrm>
-            <a:off x="7214616" y="4178807"/>
-            <a:ext cx="2194560" cy="27432"/>
-          </a:xfrm>
-          <a:prstGeom prst="rect">
-            <a:avLst/>
-          </a:prstGeom>
-          <a:solidFill>
-            <a:srgbClr val="2B8E8E"/>
-          </a:solidFill>
-          <a:ln>
-            <a:noFill/>
-          </a:ln>
-        </p:spPr>
-        <p:style>
-          <a:lnRef idx="1">
-            <a:schemeClr val="accent1"/>
-          </a:lnRef>
-          <a:fillRef idx="3">
-            <a:schemeClr val="accent1"/>
-          </a:fillRef>
-          <a:effectRef idx="2">
-            <a:schemeClr val="accent1"/>
-          </a:effectRef>
-          <a:fontRef idx="minor">
-            <a:schemeClr val="lt1"/>
-          </a:fontRef>
-        </p:style>
-        <p:txBody>
-          <a:bodyPr rtlCol="0" anchor="ctr"/>
-          <a:lstStyle/>
-          <a:p>
-            <a:pPr algn="ctr"/>
-          </a:p>
-        </p:txBody>
-      </p:sp>
-      <p:sp>
-        <p:nvSpPr>
-          <p:cNvPr id="58" name="TextBox 57"/>
-          <p:cNvSpPr txBox="1"/>
-          <p:nvPr/>
-        </p:nvSpPr>
-        <p:spPr>
-          <a:xfrm>
-            <a:off x="7214616" y="4215383"/>
-            <a:ext cx="2194560" cy="320040"/>
-          </a:xfrm>
-          <a:prstGeom prst="rect">
-            <a:avLst/>
-          </a:prstGeom>
-          <a:noFill/>
-        </p:spPr>
-        <p:txBody>
-          <a:bodyPr wrap="square">
-            <a:spAutoFit/>
-          </a:bodyPr>
-          <a:lstStyle/>
-          <a:p>
-            <a:pPr algn="ctr"/>
-            <a:r>
-              <a:rPr sz="1800" b="1" i="0">
-                <a:solidFill>
-                  <a:srgbClr val="3AAEAE"/>
-                </a:solidFill>
-              </a:rPr>
-              <a:t>24h</a:t>
-            </a:r>
-          </a:p>
-        </p:txBody>
-      </p:sp>
-      <p:sp>
-        <p:nvSpPr>
-          <p:cNvPr id="59" name="TextBox 58"/>
-          <p:cNvSpPr txBox="1"/>
-          <p:nvPr/>
-        </p:nvSpPr>
-        <p:spPr>
-          <a:xfrm>
-            <a:off x="7214616" y="4544568"/>
-            <a:ext cx="2194560" cy="256032"/>
-          </a:xfrm>
-          <a:prstGeom prst="rect">
-            <a:avLst/>
-          </a:prstGeom>
-          <a:noFill/>
-        </p:spPr>
-        <p:txBody>
-          <a:bodyPr wrap="square">
-            <a:spAutoFit/>
-          </a:bodyPr>
-          <a:lstStyle/>
-          <a:p>
-            <a:pPr algn="ctr"/>
-            <a:r>
-              <a:rPr sz="700" b="0" i="0">
-                <a:solidFill>
-                  <a:srgbClr val="AACCCC"/>
-                </a:solidFill>
-              </a:rPr>
-              <a:t>Site live after close</a:t>
-            </a:r>
-          </a:p>
-        </p:txBody>
-      </p:sp>
-      <p:sp>
-        <p:nvSpPr>
-          <p:cNvPr id="60" name="Rectangle 59"/>
-          <p:cNvSpPr/>
-          <p:nvPr/>
-        </p:nvSpPr>
-        <p:spPr>
-          <a:xfrm>
-            <a:off x="9482328" y="4178807"/>
-            <a:ext cx="2194560" cy="658368"/>
-          </a:xfrm>
-          <a:prstGeom prst="rect">
-            <a:avLst/>
-          </a:prstGeom>
-          <a:solidFill>
-            <a:srgbClr val="1C2E2E"/>
-          </a:solidFill>
-          <a:ln>
-            <a:noFill/>
-          </a:ln>
-        </p:spPr>
-        <p:style>
-          <a:lnRef idx="1">
-            <a:schemeClr val="accent1"/>
-          </a:lnRef>
-          <a:fillRef idx="3">
-            <a:schemeClr val="accent1"/>
-          </a:fillRef>
-          <a:effectRef idx="2">
-            <a:schemeClr val="accent1"/>
-          </a:effectRef>
-          <a:fontRef idx="minor">
-            <a:schemeClr val="lt1"/>
-          </a:fontRef>
-        </p:style>
-        <p:txBody>
-          <a:bodyPr rtlCol="0" anchor="ctr"/>
-          <a:lstStyle/>
-          <a:p>
-            <a:pPr algn="ctr"/>
-          </a:p>
-        </p:txBody>
-      </p:sp>
-      <p:sp>
-        <p:nvSpPr>
-          <p:cNvPr id="61" name="Rectangle 60"/>
-          <p:cNvSpPr/>
-          <p:nvPr/>
-        </p:nvSpPr>
-        <p:spPr>
-          <a:xfrm>
-            <a:off x="9482328" y="4178807"/>
-            <a:ext cx="2194560" cy="27432"/>
-          </a:xfrm>
-          <a:prstGeom prst="rect">
-            <a:avLst/>
-          </a:prstGeom>
-          <a:solidFill>
-            <a:srgbClr val="2B8E8E"/>
-          </a:solidFill>
-          <a:ln>
-            <a:noFill/>
-          </a:ln>
-        </p:spPr>
-        <p:style>
-          <a:lnRef idx="1">
-            <a:schemeClr val="accent1"/>
-          </a:lnRef>
-          <a:fillRef idx="3">
-            <a:schemeClr val="accent1"/>
-          </a:fillRef>
-          <a:effectRef idx="2">
-            <a:schemeClr val="accent1"/>
-          </a:effectRef>
-          <a:fontRef idx="minor">
-            <a:schemeClr val="lt1"/>
-          </a:fontRef>
-        </p:style>
-        <p:txBody>
-          <a:bodyPr rtlCol="0" anchor="ctr"/>
-          <a:lstStyle/>
-          <a:p>
-            <a:pPr algn="ctr"/>
-          </a:p>
-        </p:txBody>
-      </p:sp>
-      <p:sp>
-        <p:nvSpPr>
-          <p:cNvPr id="62" name="TextBox 61"/>
-          <p:cNvSpPr txBox="1"/>
-          <p:nvPr/>
-        </p:nvSpPr>
-        <p:spPr>
-          <a:xfrm>
-            <a:off x="9482328" y="4215383"/>
-            <a:ext cx="2194560" cy="320040"/>
-          </a:xfrm>
-          <a:prstGeom prst="rect">
-            <a:avLst/>
-          </a:prstGeom>
-          <a:noFill/>
-        </p:spPr>
-        <p:txBody>
-          <a:bodyPr wrap="square">
-            <a:spAutoFit/>
-          </a:bodyPr>
-          <a:lstStyle/>
-          <a:p>
-            <a:pPr algn="ctr"/>
-            <a:r>
-              <a:rPr sz="1800" b="1" i="0">
-                <a:solidFill>
-                  <a:srgbClr val="3AAEAE"/>
-                </a:solidFill>
-              </a:rPr>
-              <a:t>100%</a:t>
-            </a:r>
-          </a:p>
-        </p:txBody>
-      </p:sp>
-      <p:sp>
-        <p:nvSpPr>
-          <p:cNvPr id="63" name="TextBox 62"/>
-          <p:cNvSpPr txBox="1"/>
-          <p:nvPr/>
-        </p:nvSpPr>
-        <p:spPr>
-          <a:xfrm>
-            <a:off x="9482328" y="4544568"/>
-            <a:ext cx="2194560" cy="256032"/>
-          </a:xfrm>
-          <a:prstGeom prst="rect">
-            <a:avLst/>
-          </a:prstGeom>
-          <a:noFill/>
-        </p:spPr>
-        <p:txBody>
-          <a:bodyPr wrap="square">
-            <a:spAutoFit/>
-          </a:bodyPr>
-          <a:lstStyle/>
-          <a:p>
-            <a:pPr algn="ctr"/>
-            <a:r>
-              <a:rPr sz="700" b="0" i="0">
-                <a:solidFill>
-                  <a:srgbClr val="AACCCC"/>
-                </a:solidFill>
-              </a:rPr>
-              <a:t>Warm lead follow-up</a:t>
-            </a:r>
-          </a:p>
-        </p:txBody>
-      </p:sp>
-      <p:sp>
-        <p:nvSpPr>
-          <p:cNvPr id="64" name="Rectangle 63"/>
-          <p:cNvSpPr/>
-          <p:nvPr/>
-        </p:nvSpPr>
-        <p:spPr>
-          <a:xfrm>
-            <a:off x="0" y="6629400"/>
-            <a:ext cx="12188952" cy="228600"/>
-          </a:xfrm>
-          <a:prstGeom prst="rect">
-            <a:avLst/>
-          </a:prstGeom>
-          <a:solidFill>
-            <a:srgbClr val="1C2E2E"/>
-          </a:solidFill>
-          <a:ln>
-            <a:noFill/>
-          </a:ln>
-        </p:spPr>
-        <p:style>
-          <a:lnRef idx="1">
-            <a:schemeClr val="accent1"/>
-          </a:lnRef>
-          <a:fillRef idx="3">
-            <a:schemeClr val="accent1"/>
-          </a:fillRef>
-          <a:effectRef idx="2">
-            <a:schemeClr val="accent1"/>
-          </a:effectRef>
-          <a:fontRef idx="minor">
-            <a:schemeClr val="lt1"/>
-          </a:fontRef>
-        </p:style>
-        <p:txBody>
-          <a:bodyPr rtlCol="0" anchor="ctr"/>
-          <a:lstStyle/>
-          <a:p>
-            <a:pPr algn="ctr"/>
-          </a:p>
-        </p:txBody>
-      </p:sp>
-      <p:sp>
-        <p:nvSpPr>
-          <p:cNvPr id="65" name="TextBox 64"/>
-          <p:cNvSpPr txBox="1"/>
-          <p:nvPr/>
-        </p:nvSpPr>
-        <p:spPr>
-          <a:xfrm>
-            <a:off x="411480" y="6656832"/>
-            <a:ext cx="11365992" cy="164592"/>
-          </a:xfrm>
-          <a:prstGeom prst="rect">
-            <a:avLst/>
-          </a:prstGeom>
-          <a:noFill/>
-        </p:spPr>
-        <p:txBody>
-          <a:bodyPr wrap="square">
-            <a:spAutoFit/>
-          </a:bodyPr>
-          <a:lstStyle/>
-          <a:p>
-            <a:pPr algn="ctr"/>
-            <a:r>
-              <a:rPr sz="650" b="0" i="0">
-                <a:solidFill>
-                  <a:srgbClr val="2B8E8E"/>
-                </a:solidFill>
-              </a:rPr>
-              <a:t>INTERNAL OPERATIONS  ·  CONFIDENTIAL  ·  NOT FOR DISTRIBUTION  ·  © 2026 VELA SYNC LTD  ·  CO. 17051204</a:t>
-            </a:r>
-          </a:p>
-        </p:txBody>
-      </p:sp>
-    </p:spTree>
-  </p:cSld>
-  <p:clrMapOvr>
-    <a:masterClrMapping/>
-  </p:clrMapOvr>
-</p:sld>
-</file>
-
-<file path=ppt/slides/slide13.xml><?xml version="1.0" encoding="utf-8"?>
-<p:sld xmlns:a="http://schemas.openxmlformats.org/drawingml/2006/main" xmlns:p="http://schemas.openxmlformats.org/presentationml/2006/main" xmlns:r="http://schemas.openxmlformats.org/officeDocument/2006/relationships">
-  <p:cSld>
-    <p:spTree>
-      <p:nvGrpSpPr>
-        <p:cNvPr id="1" name=""/>
-        <p:cNvGrpSpPr/>
-        <p:nvPr/>
-      </p:nvGrpSpPr>
-      <p:grpSpPr/>
-      <p:sp>
-        <p:nvSpPr>
-          <p:cNvPr id="2" name="Rectangle 1"/>
-          <p:cNvSpPr/>
-          <p:nvPr/>
-        </p:nvSpPr>
-        <p:spPr>
-          <a:xfrm>
-            <a:off x="0" y="0"/>
-            <a:ext cx="12188952" cy="6858000"/>
-          </a:xfrm>
-          <a:prstGeom prst="rect">
-            <a:avLst/>
-          </a:prstGeom>
-          <a:solidFill>
-            <a:srgbClr val="050A0A"/>
-          </a:solidFill>
-          <a:ln>
-            <a:noFill/>
-          </a:ln>
-        </p:spPr>
-        <p:style>
-          <a:lnRef idx="1">
-            <a:schemeClr val="accent1"/>
-          </a:lnRef>
-          <a:fillRef idx="3">
-            <a:schemeClr val="accent1"/>
-          </a:fillRef>
-          <a:effectRef idx="2">
-            <a:schemeClr val="accent1"/>
-          </a:effectRef>
-          <a:fontRef idx="minor">
-            <a:schemeClr val="lt1"/>
-          </a:fontRef>
-        </p:style>
-        <p:txBody>
-          <a:bodyPr rtlCol="0" anchor="ctr"/>
-          <a:lstStyle/>
-          <a:p>
-            <a:pPr algn="ctr"/>
-          </a:p>
-        </p:txBody>
-      </p:sp>
-      <p:sp>
-        <p:nvSpPr>
-          <p:cNvPr id="3" name="Rectangle 2"/>
-          <p:cNvSpPr/>
-          <p:nvPr/>
-        </p:nvSpPr>
-        <p:spPr>
-          <a:xfrm>
-            <a:off x="0" y="0"/>
-            <a:ext cx="54864" cy="6858000"/>
-          </a:xfrm>
-          <a:prstGeom prst="rect">
-            <a:avLst/>
-          </a:prstGeom>
-          <a:solidFill>
-            <a:srgbClr val="2B8E8E"/>
-          </a:solidFill>
-          <a:ln>
-            <a:noFill/>
-          </a:ln>
-        </p:spPr>
-        <p:style>
-          <a:lnRef idx="1">
-            <a:schemeClr val="accent1"/>
-          </a:lnRef>
-          <a:fillRef idx="3">
-            <a:schemeClr val="accent1"/>
-          </a:fillRef>
-          <a:effectRef idx="2">
-            <a:schemeClr val="accent1"/>
-          </a:effectRef>
-          <a:fontRef idx="minor">
-            <a:schemeClr val="lt1"/>
-          </a:fontRef>
-        </p:style>
-        <p:txBody>
-          <a:bodyPr rtlCol="0" anchor="ctr"/>
-          <a:lstStyle/>
-          <a:p>
-            <a:pPr algn="ctr"/>
-          </a:p>
-        </p:txBody>
-      </p:sp>
-      <p:sp>
-        <p:nvSpPr>
-          <p:cNvPr id="4" name="Rectangle 3"/>
-          <p:cNvSpPr/>
-          <p:nvPr/>
-        </p:nvSpPr>
-        <p:spPr>
-          <a:xfrm>
-            <a:off x="54864" y="0"/>
-            <a:ext cx="12134088" cy="1005840"/>
-          </a:xfrm>
-          <a:prstGeom prst="rect">
-            <a:avLst/>
-          </a:prstGeom>
-          <a:solidFill>
-            <a:srgbClr val="0F1A1A"/>
-          </a:solidFill>
-          <a:ln>
-            <a:noFill/>
-          </a:ln>
-        </p:spPr>
-        <p:style>
-          <a:lnRef idx="1">
-            <a:schemeClr val="accent1"/>
-          </a:lnRef>
-          <a:fillRef idx="3">
-            <a:schemeClr val="accent1"/>
-          </a:fillRef>
-          <a:effectRef idx="2">
-            <a:schemeClr val="accent1"/>
-          </a:effectRef>
-          <a:fontRef idx="minor">
-            <a:schemeClr val="lt1"/>
-          </a:fontRef>
-        </p:style>
-        <p:txBody>
-          <a:bodyPr rtlCol="0" anchor="ctr"/>
-          <a:lstStyle/>
-          <a:p>
-            <a:pPr algn="ctr"/>
-          </a:p>
-        </p:txBody>
-      </p:sp>
-      <p:sp>
-        <p:nvSpPr>
-          <p:cNvPr id="5" name="Rectangle 4"/>
-          <p:cNvSpPr/>
-          <p:nvPr/>
-        </p:nvSpPr>
-        <p:spPr>
-          <a:xfrm>
-            <a:off x="411480" y="804672"/>
-            <a:ext cx="11365992" cy="27432"/>
-          </a:xfrm>
-          <a:prstGeom prst="rect">
-            <a:avLst/>
-          </a:prstGeom>
-          <a:solidFill>
-            <a:srgbClr val="2B8E8E"/>
-          </a:solidFill>
-          <a:ln>
-            <a:noFill/>
-          </a:ln>
-        </p:spPr>
-        <p:style>
-          <a:lnRef idx="1">
-            <a:schemeClr val="accent1"/>
-          </a:lnRef>
-          <a:fillRef idx="3">
-            <a:schemeClr val="accent1"/>
-          </a:fillRef>
-          <a:effectRef idx="2">
-            <a:schemeClr val="accent1"/>
-          </a:effectRef>
-          <a:fontRef idx="minor">
-            <a:schemeClr val="lt1"/>
-          </a:fontRef>
-        </p:style>
-        <p:txBody>
-          <a:bodyPr rtlCol="0" anchor="ctr"/>
-          <a:lstStyle/>
-          <a:p>
-            <a:pPr algn="ctr"/>
-          </a:p>
-        </p:txBody>
-      </p:sp>
-      <p:sp>
-        <p:nvSpPr>
-          <p:cNvPr id="6" name="Rectangle 5"/>
-          <p:cNvSpPr/>
-          <p:nvPr/>
-        </p:nvSpPr>
-        <p:spPr>
-          <a:xfrm>
-            <a:off x="11228832" y="164592"/>
-            <a:ext cx="457200" cy="457200"/>
-          </a:xfrm>
-          <a:prstGeom prst="rect">
-            <a:avLst/>
-          </a:prstGeom>
-          <a:solidFill>
-            <a:srgbClr val="2B8E8E"/>
-          </a:solidFill>
-          <a:ln>
-            <a:noFill/>
-          </a:ln>
-        </p:spPr>
-        <p:style>
-          <a:lnRef idx="1">
-            <a:schemeClr val="accent1"/>
-          </a:lnRef>
-          <a:fillRef idx="3">
-            <a:schemeClr val="accent1"/>
-          </a:fillRef>
-          <a:effectRef idx="2">
-            <a:schemeClr val="accent1"/>
-          </a:effectRef>
-          <a:fontRef idx="minor">
-            <a:schemeClr val="lt1"/>
-          </a:fontRef>
-        </p:style>
-        <p:txBody>
-          <a:bodyPr rtlCol="0" anchor="ctr"/>
-          <a:lstStyle/>
-          <a:p>
-            <a:pPr algn="ctr"/>
-          </a:p>
-        </p:txBody>
-      </p:sp>
-      <p:sp>
-        <p:nvSpPr>
-          <p:cNvPr id="7" name="TextBox 6"/>
-          <p:cNvSpPr txBox="1"/>
-          <p:nvPr/>
-        </p:nvSpPr>
-        <p:spPr>
-          <a:xfrm>
-            <a:off x="11228832" y="164592"/>
-            <a:ext cx="457200" cy="457200"/>
-          </a:xfrm>
-          <a:prstGeom prst="rect">
-            <a:avLst/>
-          </a:prstGeom>
-          <a:noFill/>
-        </p:spPr>
-        <p:txBody>
-          <a:bodyPr wrap="square">
-            <a:spAutoFit/>
-          </a:bodyPr>
-          <a:lstStyle/>
-          <a:p>
-            <a:pPr algn="ctr"/>
-            <a:r>
-              <a:rPr sz="1400" b="1" i="0">
-                <a:solidFill>
-                  <a:srgbClr val="FFFFFF"/>
-                </a:solidFill>
-              </a:rPr>
-              <a:t>VS</a:t>
-            </a:r>
-          </a:p>
-        </p:txBody>
-      </p:sp>
-      <p:sp>
-        <p:nvSpPr>
-          <p:cNvPr id="8" name="TextBox 7"/>
-          <p:cNvSpPr txBox="1"/>
-          <p:nvPr/>
-        </p:nvSpPr>
-        <p:spPr>
-          <a:xfrm>
-            <a:off x="10040112" y="265176"/>
-            <a:ext cx="1143000" cy="256032"/>
-          </a:xfrm>
-          <a:prstGeom prst="rect">
-            <a:avLst/>
-          </a:prstGeom>
-          <a:noFill/>
-        </p:spPr>
-        <p:txBody>
-          <a:bodyPr wrap="square">
-            <a:spAutoFit/>
-          </a:bodyPr>
-          <a:lstStyle/>
-          <a:p>
-            <a:pPr algn="r"/>
-            <a:r>
-              <a:rPr sz="800" b="1" i="0">
-                <a:solidFill>
-                  <a:srgbClr val="EEF7F7"/>
-                </a:solidFill>
-              </a:rPr>
-              <a:t>VELA SYNC</a:t>
-            </a:r>
-          </a:p>
-        </p:txBody>
-      </p:sp>
-      <p:sp>
-        <p:nvSpPr>
-          <p:cNvPr id="9" name="TextBox 8"/>
-          <p:cNvSpPr txBox="1"/>
-          <p:nvPr/>
-        </p:nvSpPr>
-        <p:spPr>
-          <a:xfrm>
-            <a:off x="502920" y="128016"/>
-            <a:ext cx="7315200" cy="201168"/>
-          </a:xfrm>
-          <a:prstGeom prst="rect">
-            <a:avLst/>
-          </a:prstGeom>
-          <a:noFill/>
-        </p:spPr>
-        <p:txBody>
-          <a:bodyPr wrap="square">
-            <a:spAutoFit/>
-          </a:bodyPr>
-          <a:lstStyle/>
-          <a:p>
-            <a:pPr algn="l"/>
-            <a:r>
-              <a:rPr sz="750" b="1" i="0">
-                <a:solidFill>
-                  <a:srgbClr val="2B8E8E"/>
-                </a:solidFill>
-              </a:rPr>
-              <a:t>SALES ADVISOR QUICK REFERENCE  ·  PAGE 2 OF 2</a:t>
-            </a:r>
-          </a:p>
-        </p:txBody>
-      </p:sp>
-      <p:sp>
-        <p:nvSpPr>
-          <p:cNvPr id="10" name="TextBox 9"/>
-          <p:cNvSpPr txBox="1"/>
-          <p:nvPr/>
-        </p:nvSpPr>
-        <p:spPr>
-          <a:xfrm>
-            <a:off x="411480" y="347472"/>
-            <a:ext cx="9144000" cy="475488"/>
-          </a:xfrm>
-          <a:prstGeom prst="rect">
-            <a:avLst/>
-          </a:prstGeom>
-          <a:noFill/>
-        </p:spPr>
-        <p:txBody>
-          <a:bodyPr wrap="square">
-            <a:spAutoFit/>
-          </a:bodyPr>
-          <a:lstStyle/>
-          <a:p>
-            <a:pPr algn="l"/>
-            <a:r>
-              <a:rPr sz="2200" b="1" i="0">
-                <a:solidFill>
-                  <a:srgbClr val="FFFFFF"/>
-                </a:solidFill>
-              </a:rPr>
-              <a:t>Scripts, Objections &amp; Close Toolkit</a:t>
-            </a:r>
-          </a:p>
-        </p:txBody>
-      </p:sp>
-      <p:sp>
-        <p:nvSpPr>
-          <p:cNvPr id="11" name="TextBox 10"/>
-          <p:cNvSpPr txBox="1"/>
-          <p:nvPr/>
-        </p:nvSpPr>
-        <p:spPr>
-          <a:xfrm>
-            <a:off x="411480" y="804672"/>
-            <a:ext cx="8229600" cy="201168"/>
-          </a:xfrm>
-          <a:prstGeom prst="rect">
-            <a:avLst/>
-          </a:prstGeom>
-          <a:noFill/>
-        </p:spPr>
-        <p:txBody>
-          <a:bodyPr wrap="square">
-            <a:spAutoFit/>
-          </a:bodyPr>
-          <a:lstStyle/>
-          <a:p>
-            <a:pPr algn="l"/>
-            <a:r>
-              <a:rPr sz="850" b="0" i="0">
-                <a:solidFill>
-                  <a:srgbClr val="AACCCC"/>
-                </a:solidFill>
-              </a:rPr>
-              <a:t>Every word matters. Every silence is a weapon. Know this cold.</a:t>
-            </a:r>
-          </a:p>
-        </p:txBody>
-      </p:sp>
-      <p:sp>
-        <p:nvSpPr>
-          <p:cNvPr id="12" name="Rectangle 11"/>
-          <p:cNvSpPr/>
-          <p:nvPr/>
-        </p:nvSpPr>
-        <p:spPr>
-          <a:xfrm>
-            <a:off x="411480" y="1051560"/>
-            <a:ext cx="5303520" cy="274320"/>
-          </a:xfrm>
-          <a:prstGeom prst="rect">
-            <a:avLst/>
-          </a:prstGeom>
-          <a:solidFill>
-            <a:srgbClr val="2B8E8E"/>
-          </a:solidFill>
-          <a:ln>
-            <a:noFill/>
-          </a:ln>
-        </p:spPr>
-        <p:style>
-          <a:lnRef idx="1">
-            <a:schemeClr val="accent1"/>
-          </a:lnRef>
-          <a:fillRef idx="3">
-            <a:schemeClr val="accent1"/>
-          </a:fillRef>
-          <a:effectRef idx="2">
-            <a:schemeClr val="accent1"/>
-          </a:effectRef>
-          <a:fontRef idx="minor">
-            <a:schemeClr val="lt1"/>
-          </a:fontRef>
-        </p:style>
-        <p:txBody>
-          <a:bodyPr rtlCol="0" anchor="ctr"/>
-          <a:lstStyle/>
-          <a:p>
-            <a:pPr algn="ctr"/>
-          </a:p>
-        </p:txBody>
-      </p:sp>
-      <p:sp>
-        <p:nvSpPr>
-          <p:cNvPr id="13" name="TextBox 12"/>
-          <p:cNvSpPr txBox="1"/>
-          <p:nvPr/>
-        </p:nvSpPr>
-        <p:spPr>
-          <a:xfrm>
-            <a:off x="411480" y="1051560"/>
-            <a:ext cx="5303520" cy="274320"/>
-          </a:xfrm>
-          <a:prstGeom prst="rect">
-            <a:avLst/>
-          </a:prstGeom>
-          <a:noFill/>
-        </p:spPr>
-        <p:txBody>
-          <a:bodyPr wrap="square">
-            <a:spAutoFit/>
-          </a:bodyPr>
-          <a:lstStyle/>
-          <a:p>
-            <a:pPr algn="l"/>
-            <a:r>
-              <a:rPr sz="850" b="1" i="0">
-                <a:solidFill>
-                  <a:srgbClr val="FFFFFF"/>
-                </a:solidFill>
-              </a:rPr>
-              <a:t>  6 DISCOVERY QUESTIONS — IN ORDER</a:t>
-            </a:r>
-          </a:p>
-        </p:txBody>
-      </p:sp>
-      <p:sp>
-        <p:nvSpPr>
-          <p:cNvPr id="14" name="Rectangle 13"/>
-          <p:cNvSpPr/>
-          <p:nvPr/>
-        </p:nvSpPr>
-        <p:spPr>
-          <a:xfrm>
-            <a:off x="411480" y="1362456"/>
-            <a:ext cx="5303520" cy="475488"/>
-          </a:xfrm>
-          <a:prstGeom prst="rect">
-            <a:avLst/>
-          </a:prstGeom>
-          <a:solidFill>
-            <a:srgbClr val="1C2E2E"/>
-          </a:solidFill>
-          <a:ln>
-            <a:noFill/>
-          </a:ln>
-        </p:spPr>
-        <p:style>
-          <a:lnRef idx="1">
-            <a:schemeClr val="accent1"/>
-          </a:lnRef>
-          <a:fillRef idx="3">
-            <a:schemeClr val="accent1"/>
-          </a:fillRef>
-          <a:effectRef idx="2">
-            <a:schemeClr val="accent1"/>
-          </a:effectRef>
-          <a:fontRef idx="minor">
-            <a:schemeClr val="lt1"/>
-          </a:fontRef>
-        </p:style>
-        <p:txBody>
-          <a:bodyPr rtlCol="0" anchor="ctr"/>
-          <a:lstStyle/>
-          <a:p>
-            <a:pPr algn="ctr"/>
-          </a:p>
-        </p:txBody>
-      </p:sp>
-      <p:sp>
-        <p:nvSpPr>
-          <p:cNvPr id="15" name="Rectangle 14"/>
-          <p:cNvSpPr/>
-          <p:nvPr/>
-        </p:nvSpPr>
-        <p:spPr>
-          <a:xfrm>
-            <a:off x="411480" y="1362456"/>
-            <a:ext cx="274320" cy="475488"/>
-          </a:xfrm>
-          <a:prstGeom prst="rect">
-            <a:avLst/>
-          </a:prstGeom>
-          <a:solidFill>
-            <a:srgbClr val="2B8E8E"/>
-          </a:solidFill>
-          <a:ln>
-            <a:noFill/>
-          </a:ln>
-        </p:spPr>
-        <p:style>
-          <a:lnRef idx="1">
-            <a:schemeClr val="accent1"/>
-          </a:lnRef>
-          <a:fillRef idx="3">
-            <a:schemeClr val="accent1"/>
-          </a:fillRef>
-          <a:effectRef idx="2">
-            <a:schemeClr val="accent1"/>
-          </a:effectRef>
-          <a:fontRef idx="minor">
-            <a:schemeClr val="lt1"/>
-          </a:fontRef>
-        </p:style>
-        <p:txBody>
-          <a:bodyPr rtlCol="0" anchor="ctr"/>
-          <a:lstStyle/>
-          <a:p>
-            <a:pPr algn="ctr"/>
-          </a:p>
-        </p:txBody>
-      </p:sp>
-      <p:sp>
-        <p:nvSpPr>
-          <p:cNvPr id="16" name="TextBox 15"/>
-          <p:cNvSpPr txBox="1"/>
-          <p:nvPr/>
-        </p:nvSpPr>
-        <p:spPr>
-          <a:xfrm>
-            <a:off x="411480" y="1472184"/>
-            <a:ext cx="274320" cy="274320"/>
-          </a:xfrm>
-          <a:prstGeom prst="rect">
-            <a:avLst/>
-          </a:prstGeom>
-          <a:noFill/>
-        </p:spPr>
-        <p:txBody>
-          <a:bodyPr wrap="square">
-            <a:spAutoFit/>
-          </a:bodyPr>
-          <a:lstStyle/>
-          <a:p>
-            <a:pPr algn="ctr"/>
-            <a:r>
-              <a:rPr sz="1000" b="1" i="0">
-                <a:solidFill>
-                  <a:srgbClr val="FFFFFF"/>
-                </a:solidFill>
-              </a:rPr>
-              <a:t>1</a:t>
-            </a:r>
-          </a:p>
-        </p:txBody>
-      </p:sp>
-      <p:sp>
-        <p:nvSpPr>
-          <p:cNvPr id="17" name="TextBox 16"/>
-          <p:cNvSpPr txBox="1"/>
-          <p:nvPr/>
-        </p:nvSpPr>
-        <p:spPr>
-          <a:xfrm>
-            <a:off x="731520" y="1399032"/>
-            <a:ext cx="4937759" cy="182880"/>
-          </a:xfrm>
-          <a:prstGeom prst="rect">
-            <a:avLst/>
-          </a:prstGeom>
-          <a:noFill/>
-        </p:spPr>
-        <p:txBody>
-          <a:bodyPr wrap="square">
-            <a:spAutoFit/>
-          </a:bodyPr>
-          <a:lstStyle/>
-          <a:p>
-            <a:pPr algn="l"/>
-            <a:r>
-              <a:rPr sz="700" b="1" i="0">
-                <a:solidFill>
-                  <a:srgbClr val="3AAEAE"/>
-                </a:solidFill>
-              </a:rPr>
-              <a:t>CURRENT STATE</a:t>
-            </a:r>
-          </a:p>
-        </p:txBody>
-      </p:sp>
-      <p:sp>
-        <p:nvSpPr>
-          <p:cNvPr id="18" name="TextBox 17"/>
-          <p:cNvSpPr txBox="1"/>
-          <p:nvPr/>
-        </p:nvSpPr>
-        <p:spPr>
-          <a:xfrm>
-            <a:off x="731520" y="1581912"/>
-            <a:ext cx="4937759" cy="237744"/>
-          </a:xfrm>
-          <a:prstGeom prst="rect">
-            <a:avLst/>
-          </a:prstGeom>
-          <a:noFill/>
-        </p:spPr>
-        <p:txBody>
-          <a:bodyPr wrap="square">
-            <a:spAutoFit/>
-          </a:bodyPr>
-          <a:lstStyle/>
-          <a:p>
-            <a:pPr algn="l"/>
-            <a:r>
-              <a:rPr sz="680" b="0" i="1">
-                <a:solidFill>
-                  <a:srgbClr val="CCE5E5"/>
-                </a:solidFill>
-              </a:rPr>
-              <a:t>"When a potential customer Googles you — what do they find?"</a:t>
-            </a:r>
-          </a:p>
-        </p:txBody>
-      </p:sp>
-      <p:sp>
-        <p:nvSpPr>
-          <p:cNvPr id="19" name="Rectangle 18"/>
-          <p:cNvSpPr/>
-          <p:nvPr/>
-        </p:nvSpPr>
-        <p:spPr>
-          <a:xfrm>
-            <a:off x="411480" y="1874519"/>
-            <a:ext cx="5303520" cy="475488"/>
-          </a:xfrm>
-          <a:prstGeom prst="rect">
-            <a:avLst/>
-          </a:prstGeom>
-          <a:solidFill>
-            <a:srgbClr val="1C2E2E"/>
-          </a:solidFill>
-          <a:ln>
-            <a:noFill/>
-          </a:ln>
-        </p:spPr>
-        <p:style>
-          <a:lnRef idx="1">
-            <a:schemeClr val="accent1"/>
-          </a:lnRef>
-          <a:fillRef idx="3">
-            <a:schemeClr val="accent1"/>
-          </a:fillRef>
-          <a:effectRef idx="2">
-            <a:schemeClr val="accent1"/>
-          </a:effectRef>
-          <a:fontRef idx="minor">
-            <a:schemeClr val="lt1"/>
-          </a:fontRef>
-        </p:style>
-        <p:txBody>
-          <a:bodyPr rtlCol="0" anchor="ctr"/>
-          <a:lstStyle/>
-          <a:p>
-            <a:pPr algn="ctr"/>
-          </a:p>
-        </p:txBody>
-      </p:sp>
-      <p:sp>
-        <p:nvSpPr>
-          <p:cNvPr id="20" name="Rectangle 19"/>
-          <p:cNvSpPr/>
-          <p:nvPr/>
-        </p:nvSpPr>
-        <p:spPr>
-          <a:xfrm>
-            <a:off x="411480" y="1874519"/>
-            <a:ext cx="274320" cy="475488"/>
-          </a:xfrm>
-          <a:prstGeom prst="rect">
-            <a:avLst/>
-          </a:prstGeom>
-          <a:solidFill>
-            <a:srgbClr val="2B8E8E"/>
-          </a:solidFill>
-          <a:ln>
-            <a:noFill/>
-          </a:ln>
-        </p:spPr>
-        <p:style>
-          <a:lnRef idx="1">
-            <a:schemeClr val="accent1"/>
-          </a:lnRef>
-          <a:fillRef idx="3">
-            <a:schemeClr val="accent1"/>
-          </a:fillRef>
-          <a:effectRef idx="2">
-            <a:schemeClr val="accent1"/>
-          </a:effectRef>
-          <a:fontRef idx="minor">
-            <a:schemeClr val="lt1"/>
-          </a:fontRef>
-        </p:style>
-        <p:txBody>
-          <a:bodyPr rtlCol="0" anchor="ctr"/>
-          <a:lstStyle/>
-          <a:p>
-            <a:pPr algn="ctr"/>
-          </a:p>
-        </p:txBody>
-      </p:sp>
-      <p:sp>
-        <p:nvSpPr>
-          <p:cNvPr id="21" name="TextBox 20"/>
-          <p:cNvSpPr txBox="1"/>
-          <p:nvPr/>
-        </p:nvSpPr>
-        <p:spPr>
-          <a:xfrm>
-            <a:off x="411480" y="1984248"/>
-            <a:ext cx="274320" cy="274320"/>
-          </a:xfrm>
-          <a:prstGeom prst="rect">
-            <a:avLst/>
-          </a:prstGeom>
-          <a:noFill/>
-        </p:spPr>
-        <p:txBody>
-          <a:bodyPr wrap="square">
-            <a:spAutoFit/>
-          </a:bodyPr>
-          <a:lstStyle/>
-          <a:p>
-            <a:pPr algn="ctr"/>
-            <a:r>
-              <a:rPr sz="1000" b="1" i="0">
-                <a:solidFill>
-                  <a:srgbClr val="FFFFFF"/>
-                </a:solidFill>
-              </a:rPr>
-              <a:t>2</a:t>
-            </a:r>
-          </a:p>
-        </p:txBody>
-      </p:sp>
-      <p:sp>
-        <p:nvSpPr>
-          <p:cNvPr id="22" name="TextBox 21"/>
-          <p:cNvSpPr txBox="1"/>
-          <p:nvPr/>
-        </p:nvSpPr>
-        <p:spPr>
-          <a:xfrm>
-            <a:off x="731520" y="1911095"/>
-            <a:ext cx="4937759" cy="182880"/>
-          </a:xfrm>
-          <a:prstGeom prst="rect">
-            <a:avLst/>
-          </a:prstGeom>
-          <a:noFill/>
-        </p:spPr>
-        <p:txBody>
-          <a:bodyPr wrap="square">
-            <a:spAutoFit/>
-          </a:bodyPr>
-          <a:lstStyle/>
-          <a:p>
-            <a:pPr algn="l"/>
-            <a:r>
-              <a:rPr sz="700" b="1" i="0">
-                <a:solidFill>
-                  <a:srgbClr val="3AAEAE"/>
-                </a:solidFill>
-              </a:rPr>
-              <a:t>AWARENESS</a:t>
-            </a:r>
-          </a:p>
-        </p:txBody>
-      </p:sp>
-      <p:sp>
-        <p:nvSpPr>
-          <p:cNvPr id="23" name="TextBox 22"/>
-          <p:cNvSpPr txBox="1"/>
-          <p:nvPr/>
-        </p:nvSpPr>
-        <p:spPr>
-          <a:xfrm>
-            <a:off x="731520" y="2093976"/>
-            <a:ext cx="4937759" cy="237744"/>
-          </a:xfrm>
-          <a:prstGeom prst="rect">
-            <a:avLst/>
-          </a:prstGeom>
-          <a:noFill/>
-        </p:spPr>
-        <p:txBody>
-          <a:bodyPr wrap="square">
-            <a:spAutoFit/>
-          </a:bodyPr>
-          <a:lstStyle/>
-          <a:p>
-            <a:pPr algn="l"/>
-            <a:r>
-              <a:rPr sz="680" b="0" i="1">
-                <a:solidFill>
-                  <a:srgbClr val="CCE5E5"/>
-                </a:solidFill>
-              </a:rPr>
-              <a:t>"How are most of your customers finding you at the moment?"</a:t>
-            </a:r>
-          </a:p>
-        </p:txBody>
-      </p:sp>
-      <p:sp>
-        <p:nvSpPr>
-          <p:cNvPr id="24" name="Rectangle 23"/>
-          <p:cNvSpPr/>
-          <p:nvPr/>
-        </p:nvSpPr>
-        <p:spPr>
-          <a:xfrm>
-            <a:off x="411480" y="2386584"/>
-            <a:ext cx="5303520" cy="475488"/>
-          </a:xfrm>
-          <a:prstGeom prst="rect">
-            <a:avLst/>
-          </a:prstGeom>
-          <a:solidFill>
-            <a:srgbClr val="1C2E2E"/>
-          </a:solidFill>
-          <a:ln>
-            <a:noFill/>
-          </a:ln>
-        </p:spPr>
-        <p:style>
-          <a:lnRef idx="1">
-            <a:schemeClr val="accent1"/>
-          </a:lnRef>
-          <a:fillRef idx="3">
-            <a:schemeClr val="accent1"/>
-          </a:fillRef>
-          <a:effectRef idx="2">
-            <a:schemeClr val="accent1"/>
-          </a:effectRef>
-          <a:fontRef idx="minor">
-            <a:schemeClr val="lt1"/>
-          </a:fontRef>
-        </p:style>
-        <p:txBody>
-          <a:bodyPr rtlCol="0" anchor="ctr"/>
-          <a:lstStyle/>
-          <a:p>
-            <a:pPr algn="ctr"/>
-          </a:p>
-        </p:txBody>
-      </p:sp>
-      <p:sp>
-        <p:nvSpPr>
-          <p:cNvPr id="25" name="Rectangle 24"/>
-          <p:cNvSpPr/>
-          <p:nvPr/>
-        </p:nvSpPr>
-        <p:spPr>
-          <a:xfrm>
-            <a:off x="411480" y="2386584"/>
-            <a:ext cx="274320" cy="475488"/>
-          </a:xfrm>
-          <a:prstGeom prst="rect">
-            <a:avLst/>
-          </a:prstGeom>
-          <a:solidFill>
-            <a:srgbClr val="2B8E8E"/>
-          </a:solidFill>
-          <a:ln>
-            <a:noFill/>
-          </a:ln>
-        </p:spPr>
-        <p:style>
-          <a:lnRef idx="1">
-            <a:schemeClr val="accent1"/>
-          </a:lnRef>
-          <a:fillRef idx="3">
-            <a:schemeClr val="accent1"/>
-          </a:fillRef>
-          <a:effectRef idx="2">
-            <a:schemeClr val="accent1"/>
-          </a:effectRef>
-          <a:fontRef idx="minor">
-            <a:schemeClr val="lt1"/>
-          </a:fontRef>
-        </p:style>
-        <p:txBody>
-          <a:bodyPr rtlCol="0" anchor="ctr"/>
-          <a:lstStyle/>
-          <a:p>
-            <a:pPr algn="ctr"/>
-          </a:p>
-        </p:txBody>
-      </p:sp>
-      <p:sp>
-        <p:nvSpPr>
-          <p:cNvPr id="26" name="TextBox 25"/>
-          <p:cNvSpPr txBox="1"/>
-          <p:nvPr/>
-        </p:nvSpPr>
-        <p:spPr>
-          <a:xfrm>
-            <a:off x="411480" y="2496312"/>
-            <a:ext cx="274320" cy="274320"/>
-          </a:xfrm>
-          <a:prstGeom prst="rect">
-            <a:avLst/>
-          </a:prstGeom>
-          <a:noFill/>
-        </p:spPr>
-        <p:txBody>
-          <a:bodyPr wrap="square">
-            <a:spAutoFit/>
-          </a:bodyPr>
-          <a:lstStyle/>
-          <a:p>
-            <a:pPr algn="ctr"/>
-            <a:r>
-              <a:rPr sz="1000" b="1" i="0">
-                <a:solidFill>
-                  <a:srgbClr val="FFFFFF"/>
-                </a:solidFill>
-              </a:rPr>
-              <a:t>3</a:t>
-            </a:r>
-          </a:p>
-        </p:txBody>
-      </p:sp>
-      <p:sp>
-        <p:nvSpPr>
-          <p:cNvPr id="27" name="TextBox 26"/>
-          <p:cNvSpPr txBox="1"/>
-          <p:nvPr/>
-        </p:nvSpPr>
-        <p:spPr>
-          <a:xfrm>
-            <a:off x="731520" y="2423160"/>
-            <a:ext cx="4937759" cy="182880"/>
-          </a:xfrm>
-          <a:prstGeom prst="rect">
-            <a:avLst/>
-          </a:prstGeom>
-          <a:noFill/>
-        </p:spPr>
-        <p:txBody>
-          <a:bodyPr wrap="square">
-            <a:spAutoFit/>
-          </a:bodyPr>
-          <a:lstStyle/>
-          <a:p>
-            <a:pPr algn="l"/>
-            <a:r>
-              <a:rPr sz="700" b="1" i="0">
-                <a:solidFill>
-                  <a:srgbClr val="3AAEAE"/>
-                </a:solidFill>
-              </a:rPr>
-              <a:t>COMPETITION</a:t>
-            </a:r>
-          </a:p>
-        </p:txBody>
-      </p:sp>
-      <p:sp>
-        <p:nvSpPr>
-          <p:cNvPr id="28" name="TextBox 27"/>
-          <p:cNvSpPr txBox="1"/>
-          <p:nvPr/>
-        </p:nvSpPr>
-        <p:spPr>
-          <a:xfrm>
-            <a:off x="731520" y="2606040"/>
-            <a:ext cx="4937759" cy="237744"/>
-          </a:xfrm>
-          <a:prstGeom prst="rect">
-            <a:avLst/>
-          </a:prstGeom>
-          <a:noFill/>
-        </p:spPr>
-        <p:txBody>
-          <a:bodyPr wrap="square">
-            <a:spAutoFit/>
-          </a:bodyPr>
-          <a:lstStyle/>
-          <a:p>
-            <a:pPr algn="l"/>
-            <a:r>
-              <a:rPr sz="680" b="0" i="1">
-                <a:solidFill>
-                  <a:srgbClr val="CCE5E5"/>
-                </a:solidFill>
-              </a:rPr>
-              <a:t>"Have you looked at what your top 3 competitors do online?"</a:t>
-            </a:r>
-          </a:p>
-        </p:txBody>
-      </p:sp>
-      <p:sp>
-        <p:nvSpPr>
-          <p:cNvPr id="29" name="Rectangle 28"/>
-          <p:cNvSpPr/>
-          <p:nvPr/>
-        </p:nvSpPr>
-        <p:spPr>
-          <a:xfrm>
-            <a:off x="411480" y="2898648"/>
-            <a:ext cx="5303520" cy="475488"/>
-          </a:xfrm>
-          <a:prstGeom prst="rect">
-            <a:avLst/>
-          </a:prstGeom>
-          <a:solidFill>
-            <a:srgbClr val="1C2E2E"/>
-          </a:solidFill>
-          <a:ln>
-            <a:noFill/>
-          </a:ln>
-        </p:spPr>
-        <p:style>
-          <a:lnRef idx="1">
-            <a:schemeClr val="accent1"/>
-          </a:lnRef>
-          <a:fillRef idx="3">
-            <a:schemeClr val="accent1"/>
-          </a:fillRef>
-          <a:effectRef idx="2">
-            <a:schemeClr val="accent1"/>
-          </a:effectRef>
-          <a:fontRef idx="minor">
-            <a:schemeClr val="lt1"/>
-          </a:fontRef>
-        </p:style>
-        <p:txBody>
-          <a:bodyPr rtlCol="0" anchor="ctr"/>
-          <a:lstStyle/>
-          <a:p>
-            <a:pPr algn="ctr"/>
-          </a:p>
-        </p:txBody>
-      </p:sp>
-      <p:sp>
-        <p:nvSpPr>
-          <p:cNvPr id="30" name="Rectangle 29"/>
-          <p:cNvSpPr/>
-          <p:nvPr/>
-        </p:nvSpPr>
-        <p:spPr>
-          <a:xfrm>
-            <a:off x="411480" y="2898648"/>
-            <a:ext cx="274320" cy="475488"/>
-          </a:xfrm>
-          <a:prstGeom prst="rect">
-            <a:avLst/>
-          </a:prstGeom>
-          <a:solidFill>
-            <a:srgbClr val="2B8E8E"/>
-          </a:solidFill>
-          <a:ln>
-            <a:noFill/>
-          </a:ln>
-        </p:spPr>
-        <p:style>
-          <a:lnRef idx="1">
-            <a:schemeClr val="accent1"/>
-          </a:lnRef>
-          <a:fillRef idx="3">
-            <a:schemeClr val="accent1"/>
-          </a:fillRef>
-          <a:effectRef idx="2">
-            <a:schemeClr val="accent1"/>
-          </a:effectRef>
-          <a:fontRef idx="minor">
-            <a:schemeClr val="lt1"/>
-          </a:fontRef>
-        </p:style>
-        <p:txBody>
-          <a:bodyPr rtlCol="0" anchor="ctr"/>
-          <a:lstStyle/>
-          <a:p>
-            <a:pPr algn="ctr"/>
-          </a:p>
-        </p:txBody>
-      </p:sp>
-      <p:sp>
-        <p:nvSpPr>
-          <p:cNvPr id="31" name="TextBox 30"/>
-          <p:cNvSpPr txBox="1"/>
-          <p:nvPr/>
-        </p:nvSpPr>
-        <p:spPr>
-          <a:xfrm>
-            <a:off x="411480" y="3008376"/>
-            <a:ext cx="274320" cy="274320"/>
-          </a:xfrm>
-          <a:prstGeom prst="rect">
-            <a:avLst/>
-          </a:prstGeom>
-          <a:noFill/>
-        </p:spPr>
-        <p:txBody>
-          <a:bodyPr wrap="square">
-            <a:spAutoFit/>
-          </a:bodyPr>
-          <a:lstStyle/>
-          <a:p>
-            <a:pPr algn="ctr"/>
-            <a:r>
-              <a:rPr sz="1000" b="1" i="0">
-                <a:solidFill>
-                  <a:srgbClr val="FFFFFF"/>
-                </a:solidFill>
-              </a:rPr>
-              <a:t>4</a:t>
-            </a:r>
-          </a:p>
-        </p:txBody>
-      </p:sp>
-      <p:sp>
-        <p:nvSpPr>
-          <p:cNvPr id="32" name="TextBox 31"/>
-          <p:cNvSpPr txBox="1"/>
-          <p:nvPr/>
-        </p:nvSpPr>
-        <p:spPr>
-          <a:xfrm>
-            <a:off x="731520" y="2935224"/>
-            <a:ext cx="4937759" cy="182880"/>
-          </a:xfrm>
-          <a:prstGeom prst="rect">
-            <a:avLst/>
-          </a:prstGeom>
-          <a:noFill/>
-        </p:spPr>
-        <p:txBody>
-          <a:bodyPr wrap="square">
-            <a:spAutoFit/>
-          </a:bodyPr>
-          <a:lstStyle/>
-          <a:p>
-            <a:pPr algn="l"/>
-            <a:r>
-              <a:rPr sz="700" b="1" i="0">
-                <a:solidFill>
-                  <a:srgbClr val="3AAEAE"/>
-                </a:solidFill>
-              </a:rPr>
-              <a:t>REVENUE IMPACT</a:t>
-            </a:r>
-          </a:p>
-        </p:txBody>
-      </p:sp>
-      <p:sp>
-        <p:nvSpPr>
-          <p:cNvPr id="33" name="TextBox 32"/>
-          <p:cNvSpPr txBox="1"/>
-          <p:nvPr/>
-        </p:nvSpPr>
-        <p:spPr>
-          <a:xfrm>
-            <a:off x="731520" y="3118104"/>
-            <a:ext cx="4937759" cy="237744"/>
-          </a:xfrm>
-          <a:prstGeom prst="rect">
-            <a:avLst/>
-          </a:prstGeom>
-          <a:noFill/>
-        </p:spPr>
-        <p:txBody>
-          <a:bodyPr wrap="square">
-            <a:spAutoFit/>
-          </a:bodyPr>
-          <a:lstStyle/>
-          <a:p>
-            <a:pPr algn="l"/>
-            <a:r>
-              <a:rPr sz="680" b="0" i="1">
-                <a:solidFill>
-                  <a:srgbClr val="CCE5E5"/>
-                </a:solidFill>
-              </a:rPr>
-              <a:t>"76% research online first — what does that mean for you?"</a:t>
-            </a:r>
-          </a:p>
-        </p:txBody>
-      </p:sp>
-      <p:sp>
-        <p:nvSpPr>
-          <p:cNvPr id="34" name="Rectangle 33"/>
-          <p:cNvSpPr/>
-          <p:nvPr/>
-        </p:nvSpPr>
-        <p:spPr>
-          <a:xfrm>
-            <a:off x="411480" y="3410712"/>
-            <a:ext cx="5303520" cy="475488"/>
-          </a:xfrm>
-          <a:prstGeom prst="rect">
-            <a:avLst/>
-          </a:prstGeom>
-          <a:solidFill>
-            <a:srgbClr val="1C2E2E"/>
-          </a:solidFill>
-          <a:ln>
-            <a:noFill/>
-          </a:ln>
-        </p:spPr>
-        <p:style>
-          <a:lnRef idx="1">
-            <a:schemeClr val="accent1"/>
-          </a:lnRef>
-          <a:fillRef idx="3">
-            <a:schemeClr val="accent1"/>
-          </a:fillRef>
-          <a:effectRef idx="2">
-            <a:schemeClr val="accent1"/>
-          </a:effectRef>
-          <a:fontRef idx="minor">
-            <a:schemeClr val="lt1"/>
-          </a:fontRef>
-        </p:style>
-        <p:txBody>
-          <a:bodyPr rtlCol="0" anchor="ctr"/>
-          <a:lstStyle/>
-          <a:p>
-            <a:pPr algn="ctr"/>
-          </a:p>
-        </p:txBody>
-      </p:sp>
-      <p:sp>
-        <p:nvSpPr>
-          <p:cNvPr id="35" name="Rectangle 34"/>
-          <p:cNvSpPr/>
-          <p:nvPr/>
-        </p:nvSpPr>
-        <p:spPr>
-          <a:xfrm>
-            <a:off x="411480" y="3410712"/>
-            <a:ext cx="274320" cy="475488"/>
-          </a:xfrm>
-          <a:prstGeom prst="rect">
-            <a:avLst/>
-          </a:prstGeom>
-          <a:solidFill>
-            <a:srgbClr val="2B8E8E"/>
-          </a:solidFill>
-          <a:ln>
-            <a:noFill/>
-          </a:ln>
-        </p:spPr>
-        <p:style>
-          <a:lnRef idx="1">
-            <a:schemeClr val="accent1"/>
-          </a:lnRef>
-          <a:fillRef idx="3">
-            <a:schemeClr val="accent1"/>
-          </a:fillRef>
-          <a:effectRef idx="2">
-            <a:schemeClr val="accent1"/>
-          </a:effectRef>
-          <a:fontRef idx="minor">
-            <a:schemeClr val="lt1"/>
-          </a:fontRef>
-        </p:style>
-        <p:txBody>
-          <a:bodyPr rtlCol="0" anchor="ctr"/>
-          <a:lstStyle/>
-          <a:p>
-            <a:pPr algn="ctr"/>
-          </a:p>
-        </p:txBody>
-      </p:sp>
-      <p:sp>
-        <p:nvSpPr>
-          <p:cNvPr id="36" name="TextBox 35"/>
-          <p:cNvSpPr txBox="1"/>
-          <p:nvPr/>
-        </p:nvSpPr>
-        <p:spPr>
-          <a:xfrm>
-            <a:off x="411480" y="3520440"/>
-            <a:ext cx="274320" cy="274320"/>
-          </a:xfrm>
-          <a:prstGeom prst="rect">
-            <a:avLst/>
-          </a:prstGeom>
-          <a:noFill/>
-        </p:spPr>
-        <p:txBody>
-          <a:bodyPr wrap="square">
-            <a:spAutoFit/>
-          </a:bodyPr>
-          <a:lstStyle/>
-          <a:p>
-            <a:pPr algn="ctr"/>
-            <a:r>
-              <a:rPr sz="1000" b="1" i="0">
-                <a:solidFill>
-                  <a:srgbClr val="FFFFFF"/>
-                </a:solidFill>
-              </a:rPr>
-              <a:t>5</a:t>
-            </a:r>
-          </a:p>
-        </p:txBody>
-      </p:sp>
-      <p:sp>
-        <p:nvSpPr>
-          <p:cNvPr id="37" name="TextBox 36"/>
-          <p:cNvSpPr txBox="1"/>
-          <p:nvPr/>
-        </p:nvSpPr>
-        <p:spPr>
-          <a:xfrm>
-            <a:off x="731520" y="3447288"/>
-            <a:ext cx="4937759" cy="182880"/>
-          </a:xfrm>
-          <a:prstGeom prst="rect">
-            <a:avLst/>
-          </a:prstGeom>
-          <a:noFill/>
-        </p:spPr>
-        <p:txBody>
-          <a:bodyPr wrap="square">
-            <a:spAutoFit/>
-          </a:bodyPr>
-          <a:lstStyle/>
-          <a:p>
-            <a:pPr algn="l"/>
-            <a:r>
-              <a:rPr sz="700" b="1" i="0">
-                <a:solidFill>
-                  <a:srgbClr val="3AAEAE"/>
-                </a:solidFill>
-              </a:rPr>
-              <a:t>PAST EXP.</a:t>
-            </a:r>
-          </a:p>
-        </p:txBody>
-      </p:sp>
-      <p:sp>
-        <p:nvSpPr>
-          <p:cNvPr id="38" name="TextBox 37"/>
-          <p:cNvSpPr txBox="1"/>
-          <p:nvPr/>
-        </p:nvSpPr>
-        <p:spPr>
-          <a:xfrm>
-            <a:off x="731520" y="3630168"/>
-            <a:ext cx="4937759" cy="237744"/>
-          </a:xfrm>
-          <a:prstGeom prst="rect">
-            <a:avLst/>
-          </a:prstGeom>
-          <a:noFill/>
-        </p:spPr>
-        <p:txBody>
-          <a:bodyPr wrap="square">
-            <a:spAutoFit/>
-          </a:bodyPr>
-          <a:lstStyle/>
-          <a:p>
-            <a:pPr algn="l"/>
-            <a:r>
-              <a:rPr sz="680" b="0" i="1">
-                <a:solidFill>
-                  <a:srgbClr val="CCE5E5"/>
-                </a:solidFill>
-              </a:rPr>
-              <a:t>"Have you tried to get a website before? What happened?"</a:t>
-            </a:r>
-          </a:p>
-        </p:txBody>
-      </p:sp>
-      <p:sp>
-        <p:nvSpPr>
-          <p:cNvPr id="39" name="Rectangle 38"/>
-          <p:cNvSpPr/>
-          <p:nvPr/>
-        </p:nvSpPr>
-        <p:spPr>
-          <a:xfrm>
-            <a:off x="411480" y="3922776"/>
-            <a:ext cx="5303520" cy="475488"/>
-          </a:xfrm>
-          <a:prstGeom prst="rect">
-            <a:avLst/>
-          </a:prstGeom>
-          <a:solidFill>
-            <a:srgbClr val="1C2E2E"/>
-          </a:solidFill>
-          <a:ln>
-            <a:noFill/>
-          </a:ln>
-        </p:spPr>
-        <p:style>
-          <a:lnRef idx="1">
-            <a:schemeClr val="accent1"/>
-          </a:lnRef>
-          <a:fillRef idx="3">
-            <a:schemeClr val="accent1"/>
-          </a:fillRef>
-          <a:effectRef idx="2">
-            <a:schemeClr val="accent1"/>
-          </a:effectRef>
-          <a:fontRef idx="minor">
-            <a:schemeClr val="lt1"/>
-          </a:fontRef>
-        </p:style>
-        <p:txBody>
-          <a:bodyPr rtlCol="0" anchor="ctr"/>
-          <a:lstStyle/>
-          <a:p>
-            <a:pPr algn="ctr"/>
-          </a:p>
-        </p:txBody>
-      </p:sp>
-      <p:sp>
-        <p:nvSpPr>
-          <p:cNvPr id="40" name="Rectangle 39"/>
-          <p:cNvSpPr/>
-          <p:nvPr/>
-        </p:nvSpPr>
-        <p:spPr>
-          <a:xfrm>
-            <a:off x="411480" y="3922776"/>
-            <a:ext cx="274320" cy="475488"/>
-          </a:xfrm>
-          <a:prstGeom prst="rect">
-            <a:avLst/>
-          </a:prstGeom>
-          <a:solidFill>
-            <a:srgbClr val="3AAEAE"/>
-          </a:solidFill>
-          <a:ln>
-            <a:noFill/>
-          </a:ln>
-        </p:spPr>
-        <p:style>
-          <a:lnRef idx="1">
-            <a:schemeClr val="accent1"/>
-          </a:lnRef>
-          <a:fillRef idx="3">
-            <a:schemeClr val="accent1"/>
-          </a:fillRef>
-          <a:effectRef idx="2">
-            <a:schemeClr val="accent1"/>
-          </a:effectRef>
-          <a:fontRef idx="minor">
-            <a:schemeClr val="lt1"/>
-          </a:fontRef>
-        </p:style>
-        <p:txBody>
-          <a:bodyPr rtlCol="0" anchor="ctr"/>
-          <a:lstStyle/>
-          <a:p>
-            <a:pPr algn="ctr"/>
-          </a:p>
-        </p:txBody>
-      </p:sp>
-      <p:sp>
-        <p:nvSpPr>
-          <p:cNvPr id="41" name="TextBox 40"/>
-          <p:cNvSpPr txBox="1"/>
-          <p:nvPr/>
-        </p:nvSpPr>
-        <p:spPr>
-          <a:xfrm>
-            <a:off x="411480" y="4032504"/>
-            <a:ext cx="274320" cy="274320"/>
-          </a:xfrm>
-          <a:prstGeom prst="rect">
-            <a:avLst/>
-          </a:prstGeom>
-          <a:noFill/>
-        </p:spPr>
-        <p:txBody>
-          <a:bodyPr wrap="square">
-            <a:spAutoFit/>
-          </a:bodyPr>
-          <a:lstStyle/>
-          <a:p>
-            <a:pPr algn="ctr"/>
-            <a:r>
-              <a:rPr sz="1000" b="1" i="0">
-                <a:solidFill>
-                  <a:srgbClr val="FFFFFF"/>
-                </a:solidFill>
-              </a:rPr>
-              <a:t>6</a:t>
-            </a:r>
-          </a:p>
-        </p:txBody>
-      </p:sp>
-      <p:sp>
-        <p:nvSpPr>
-          <p:cNvPr id="42" name="TextBox 41"/>
-          <p:cNvSpPr txBox="1"/>
-          <p:nvPr/>
-        </p:nvSpPr>
-        <p:spPr>
-          <a:xfrm>
-            <a:off x="731520" y="3959352"/>
-            <a:ext cx="4937759" cy="182880"/>
-          </a:xfrm>
-          <a:prstGeom prst="rect">
-            <a:avLst/>
-          </a:prstGeom>
-          <a:noFill/>
-        </p:spPr>
-        <p:txBody>
-          <a:bodyPr wrap="square">
-            <a:spAutoFit/>
-          </a:bodyPr>
-          <a:lstStyle/>
-          <a:p>
-            <a:pPr algn="l"/>
-            <a:r>
-              <a:rPr sz="700" b="1" i="0">
-                <a:solidFill>
-                  <a:srgbClr val="3AAEAE"/>
-                </a:solidFill>
-              </a:rPr>
-              <a:t>VISION ★</a:t>
-            </a:r>
-          </a:p>
-        </p:txBody>
-      </p:sp>
-      <p:sp>
-        <p:nvSpPr>
-          <p:cNvPr id="43" name="TextBox 42"/>
-          <p:cNvSpPr txBox="1"/>
-          <p:nvPr/>
-        </p:nvSpPr>
-        <p:spPr>
-          <a:xfrm>
-            <a:off x="731520" y="4142232"/>
-            <a:ext cx="4937759" cy="237744"/>
-          </a:xfrm>
-          <a:prstGeom prst="rect">
-            <a:avLst/>
-          </a:prstGeom>
-          <a:noFill/>
-        </p:spPr>
-        <p:txBody>
-          <a:bodyPr wrap="square">
-            <a:spAutoFit/>
-          </a:bodyPr>
-          <a:lstStyle/>
-          <a:p>
-            <a:pPr algn="l"/>
-            <a:r>
-              <a:rPr sz="680" b="0" i="1">
-                <a:solidFill>
-                  <a:srgbClr val="CCE5E5"/>
-                </a:solidFill>
-              </a:rPr>
-              <a:t>"If your digital presence was perfect — what would change?"</a:t>
-            </a:r>
-          </a:p>
-        </p:txBody>
-      </p:sp>
-      <p:sp>
-        <p:nvSpPr>
-          <p:cNvPr id="44" name="Rectangle 43"/>
-          <p:cNvSpPr/>
-          <p:nvPr/>
-        </p:nvSpPr>
-        <p:spPr>
-          <a:xfrm>
-            <a:off x="411480" y="4480560"/>
-            <a:ext cx="5303520" cy="384048"/>
-          </a:xfrm>
-          <a:prstGeom prst="rect">
-            <a:avLst/>
-          </a:prstGeom>
-          <a:solidFill>
-            <a:srgbClr val="1C2E2E"/>
-          </a:solidFill>
-          <a:ln>
-            <a:noFill/>
-          </a:ln>
-        </p:spPr>
-        <p:style>
-          <a:lnRef idx="1">
-            <a:schemeClr val="accent1"/>
-          </a:lnRef>
-          <a:fillRef idx="3">
-            <a:schemeClr val="accent1"/>
-          </a:fillRef>
-          <a:effectRef idx="2">
-            <a:schemeClr val="accent1"/>
-          </a:effectRef>
-          <a:fontRef idx="minor">
-            <a:schemeClr val="lt1"/>
-          </a:fontRef>
-        </p:style>
-        <p:txBody>
-          <a:bodyPr rtlCol="0" anchor="ctr"/>
-          <a:lstStyle/>
-          <a:p>
-            <a:pPr algn="ctr"/>
-          </a:p>
-        </p:txBody>
-      </p:sp>
-      <p:sp>
-        <p:nvSpPr>
-          <p:cNvPr id="45" name="TextBox 44"/>
-          <p:cNvSpPr txBox="1"/>
-          <p:nvPr/>
-        </p:nvSpPr>
-        <p:spPr>
-          <a:xfrm>
-            <a:off x="484632" y="4526280"/>
-            <a:ext cx="5157216" cy="310896"/>
-          </a:xfrm>
-          <a:prstGeom prst="rect">
-            <a:avLst/>
-          </a:prstGeom>
-          <a:noFill/>
-        </p:spPr>
-        <p:txBody>
-          <a:bodyPr wrap="square">
-            <a:spAutoFit/>
-          </a:bodyPr>
-          <a:lstStyle/>
-          <a:p>
-            <a:pPr algn="l"/>
-            <a:r>
-              <a:rPr sz="700" b="0" i="0">
-                <a:solidFill>
-                  <a:srgbClr val="EEF7F7"/>
-                </a:solidFill>
-              </a:rPr>
-              <a:t>💡  After Q6: "So if I've understood you correctly..." — feed it back verbatim. Then pivot to the reveal.</a:t>
-            </a:r>
-          </a:p>
-        </p:txBody>
-      </p:sp>
-      <p:sp>
-        <p:nvSpPr>
-          <p:cNvPr id="46" name="Rectangle 45"/>
-          <p:cNvSpPr/>
-          <p:nvPr/>
-        </p:nvSpPr>
-        <p:spPr>
-          <a:xfrm>
-            <a:off x="5989320" y="1051560"/>
-            <a:ext cx="5788152" cy="274320"/>
-          </a:xfrm>
-          <a:prstGeom prst="rect">
-            <a:avLst/>
-          </a:prstGeom>
-          <a:solidFill>
-            <a:srgbClr val="2B8E8E"/>
-          </a:solidFill>
-          <a:ln>
-            <a:noFill/>
-          </a:ln>
-        </p:spPr>
-        <p:style>
-          <a:lnRef idx="1">
-            <a:schemeClr val="accent1"/>
-          </a:lnRef>
-          <a:fillRef idx="3">
-            <a:schemeClr val="accent1"/>
-          </a:fillRef>
-          <a:effectRef idx="2">
-            <a:schemeClr val="accent1"/>
-          </a:effectRef>
-          <a:fontRef idx="minor">
-            <a:schemeClr val="lt1"/>
-          </a:fontRef>
-        </p:style>
-        <p:txBody>
-          <a:bodyPr rtlCol="0" anchor="ctr"/>
-          <a:lstStyle/>
-          <a:p>
-            <a:pPr algn="ctr"/>
-          </a:p>
-        </p:txBody>
-      </p:sp>
-      <p:sp>
-        <p:nvSpPr>
-          <p:cNvPr id="47" name="TextBox 46"/>
-          <p:cNvSpPr txBox="1"/>
-          <p:nvPr/>
-        </p:nvSpPr>
-        <p:spPr>
-          <a:xfrm>
-            <a:off x="5989320" y="1051560"/>
-            <a:ext cx="5788152" cy="274320"/>
-          </a:xfrm>
-          <a:prstGeom prst="rect">
-            <a:avLst/>
-          </a:prstGeom>
-          <a:noFill/>
-        </p:spPr>
-        <p:txBody>
-          <a:bodyPr wrap="square">
-            <a:spAutoFit/>
-          </a:bodyPr>
-          <a:lstStyle/>
-          <a:p>
-            <a:pPr algn="l"/>
-            <a:r>
-              <a:rPr sz="850" b="1" i="0">
-                <a:solidFill>
-                  <a:srgbClr val="FFFFFF"/>
-                </a:solidFill>
-              </a:rPr>
-              <a:t>  OBJECTIONS → RESPONSES</a:t>
-            </a:r>
-          </a:p>
-        </p:txBody>
-      </p:sp>
-      <p:sp>
-        <p:nvSpPr>
-          <p:cNvPr id="48" name="Rectangle 47"/>
-          <p:cNvSpPr/>
-          <p:nvPr/>
-        </p:nvSpPr>
-        <p:spPr>
-          <a:xfrm>
-            <a:off x="5989320" y="1362456"/>
-            <a:ext cx="5788152" cy="457200"/>
-          </a:xfrm>
-          <a:prstGeom prst="rect">
-            <a:avLst/>
-          </a:prstGeom>
-          <a:solidFill>
-            <a:srgbClr val="1C2E2E"/>
-          </a:solidFill>
-          <a:ln>
-            <a:noFill/>
-          </a:ln>
-        </p:spPr>
-        <p:style>
-          <a:lnRef idx="1">
-            <a:schemeClr val="accent1"/>
-          </a:lnRef>
-          <a:fillRef idx="3">
-            <a:schemeClr val="accent1"/>
-          </a:fillRef>
-          <a:effectRef idx="2">
-            <a:schemeClr val="accent1"/>
-          </a:effectRef>
-          <a:fontRef idx="minor">
-            <a:schemeClr val="lt1"/>
-          </a:fontRef>
-        </p:style>
-        <p:txBody>
-          <a:bodyPr rtlCol="0" anchor="ctr"/>
-          <a:lstStyle/>
-          <a:p>
-            <a:pPr algn="ctr"/>
-          </a:p>
-        </p:txBody>
-      </p:sp>
-      <p:sp>
-        <p:nvSpPr>
-          <p:cNvPr id="49" name="Rectangle 48"/>
-          <p:cNvSpPr/>
-          <p:nvPr/>
-        </p:nvSpPr>
-        <p:spPr>
-          <a:xfrm>
-            <a:off x="5989320" y="1362456"/>
-            <a:ext cx="45720" cy="457200"/>
-          </a:xfrm>
-          <a:prstGeom prst="rect">
-            <a:avLst/>
-          </a:prstGeom>
-          <a:solidFill>
-            <a:srgbClr val="3AAEAE"/>
-          </a:solidFill>
-          <a:ln>
-            <a:noFill/>
-          </a:ln>
-        </p:spPr>
-        <p:style>
-          <a:lnRef idx="1">
-            <a:schemeClr val="accent1"/>
-          </a:lnRef>
-          <a:fillRef idx="3">
-            <a:schemeClr val="accent1"/>
-          </a:fillRef>
-          <a:effectRef idx="2">
-            <a:schemeClr val="accent1"/>
-          </a:effectRef>
-          <a:fontRef idx="minor">
-            <a:schemeClr val="lt1"/>
-          </a:fontRef>
-        </p:style>
-        <p:txBody>
-          <a:bodyPr rtlCol="0" anchor="ctr"/>
-          <a:lstStyle/>
-          <a:p>
-            <a:pPr algn="ctr"/>
-          </a:p>
-        </p:txBody>
-      </p:sp>
-      <p:sp>
-        <p:nvSpPr>
-          <p:cNvPr id="50" name="TextBox 49"/>
-          <p:cNvSpPr txBox="1"/>
-          <p:nvPr/>
-        </p:nvSpPr>
-        <p:spPr>
-          <a:xfrm>
-            <a:off x="6099048" y="1399032"/>
-            <a:ext cx="5632704" cy="182880"/>
-          </a:xfrm>
-          <a:prstGeom prst="rect">
-            <a:avLst/>
-          </a:prstGeom>
-          <a:noFill/>
-        </p:spPr>
-        <p:txBody>
-          <a:bodyPr wrap="square">
-            <a:spAutoFit/>
-          </a:bodyPr>
-          <a:lstStyle/>
-          <a:p>
-            <a:pPr algn="l"/>
-            <a:r>
-              <a:rPr sz="720" b="1" i="0">
-                <a:solidFill>
-                  <a:srgbClr val="FFFFFF"/>
-                </a:solidFill>
-              </a:rPr>
-              <a:t>"We already have a website."</a:t>
-            </a:r>
-          </a:p>
-        </p:txBody>
-      </p:sp>
-      <p:sp>
-        <p:nvSpPr>
-          <p:cNvPr id="51" name="TextBox 50"/>
-          <p:cNvSpPr txBox="1"/>
-          <p:nvPr/>
-        </p:nvSpPr>
-        <p:spPr>
-          <a:xfrm>
-            <a:off x="6099048" y="1600200"/>
-            <a:ext cx="5632704" cy="201168"/>
-          </a:xfrm>
-          <a:prstGeom prst="rect">
-            <a:avLst/>
-          </a:prstGeom>
-          <a:noFill/>
-        </p:spPr>
-        <p:txBody>
-          <a:bodyPr wrap="square">
-            <a:spAutoFit/>
-          </a:bodyPr>
-          <a:lstStyle/>
-          <a:p>
-            <a:pPr algn="l"/>
-            <a:r>
-              <a:rPr sz="680" b="0" i="0">
-                <a:solidFill>
-                  <a:srgbClr val="CCE5E5"/>
-                </a:solidFill>
-              </a:rPr>
-              <a:t>Is it ranking? Is it bringing in enquiries — or is it a liability?</a:t>
-            </a:r>
-          </a:p>
-        </p:txBody>
-      </p:sp>
-      <p:sp>
-        <p:nvSpPr>
-          <p:cNvPr id="52" name="Rectangle 51"/>
-          <p:cNvSpPr/>
-          <p:nvPr/>
-        </p:nvSpPr>
-        <p:spPr>
-          <a:xfrm>
-            <a:off x="5989320" y="1856232"/>
-            <a:ext cx="5788152" cy="457200"/>
-          </a:xfrm>
-          <a:prstGeom prst="rect">
-            <a:avLst/>
-          </a:prstGeom>
-          <a:solidFill>
-            <a:srgbClr val="1C2E2E"/>
-          </a:solidFill>
-          <a:ln>
-            <a:noFill/>
-          </a:ln>
-        </p:spPr>
-        <p:style>
-          <a:lnRef idx="1">
-            <a:schemeClr val="accent1"/>
-          </a:lnRef>
-          <a:fillRef idx="3">
-            <a:schemeClr val="accent1"/>
-          </a:fillRef>
-          <a:effectRef idx="2">
-            <a:schemeClr val="accent1"/>
-          </a:effectRef>
-          <a:fontRef idx="minor">
-            <a:schemeClr val="lt1"/>
-          </a:fontRef>
-        </p:style>
-        <p:txBody>
-          <a:bodyPr rtlCol="0" anchor="ctr"/>
-          <a:lstStyle/>
-          <a:p>
-            <a:pPr algn="ctr"/>
-          </a:p>
-        </p:txBody>
-      </p:sp>
-      <p:sp>
-        <p:nvSpPr>
-          <p:cNvPr id="53" name="Rectangle 52"/>
-          <p:cNvSpPr/>
-          <p:nvPr/>
-        </p:nvSpPr>
-        <p:spPr>
-          <a:xfrm>
-            <a:off x="5989320" y="1856232"/>
-            <a:ext cx="45720" cy="457200"/>
-          </a:xfrm>
-          <a:prstGeom prst="rect">
-            <a:avLst/>
-          </a:prstGeom>
-          <a:solidFill>
-            <a:srgbClr val="3AAEAE"/>
-          </a:solidFill>
-          <a:ln>
-            <a:noFill/>
-          </a:ln>
-        </p:spPr>
-        <p:style>
-          <a:lnRef idx="1">
-            <a:schemeClr val="accent1"/>
-          </a:lnRef>
-          <a:fillRef idx="3">
-            <a:schemeClr val="accent1"/>
-          </a:fillRef>
-          <a:effectRef idx="2">
-            <a:schemeClr val="accent1"/>
-          </a:effectRef>
-          <a:fontRef idx="minor">
-            <a:schemeClr val="lt1"/>
-          </a:fontRef>
-        </p:style>
-        <p:txBody>
-          <a:bodyPr rtlCol="0" anchor="ctr"/>
-          <a:lstStyle/>
-          <a:p>
-            <a:pPr algn="ctr"/>
-          </a:p>
-        </p:txBody>
-      </p:sp>
-      <p:sp>
-        <p:nvSpPr>
-          <p:cNvPr id="54" name="TextBox 53"/>
-          <p:cNvSpPr txBox="1"/>
-          <p:nvPr/>
-        </p:nvSpPr>
-        <p:spPr>
-          <a:xfrm>
-            <a:off x="6099048" y="1892808"/>
-            <a:ext cx="5632704" cy="182880"/>
-          </a:xfrm>
-          <a:prstGeom prst="rect">
-            <a:avLst/>
-          </a:prstGeom>
-          <a:noFill/>
-        </p:spPr>
-        <p:txBody>
-          <a:bodyPr wrap="square">
-            <a:spAutoFit/>
-          </a:bodyPr>
-          <a:lstStyle/>
-          <a:p>
-            <a:pPr algn="l"/>
-            <a:r>
-              <a:rPr sz="720" b="1" i="0">
-                <a:solidFill>
-                  <a:srgbClr val="FFFFFF"/>
-                </a:solidFill>
-              </a:rPr>
-              <a:t>"£450 seems too cheap."</a:t>
-            </a:r>
-          </a:p>
-        </p:txBody>
-      </p:sp>
-      <p:sp>
-        <p:nvSpPr>
-          <p:cNvPr id="55" name="TextBox 54"/>
-          <p:cNvSpPr txBox="1"/>
-          <p:nvPr/>
-        </p:nvSpPr>
-        <p:spPr>
-          <a:xfrm>
-            <a:off x="6099048" y="2093976"/>
-            <a:ext cx="5632704" cy="201168"/>
-          </a:xfrm>
-          <a:prstGeom prst="rect">
-            <a:avLst/>
-          </a:prstGeom>
-          <a:noFill/>
-        </p:spPr>
-        <p:txBody>
-          <a:bodyPr wrap="square">
-            <a:spAutoFit/>
-          </a:bodyPr>
-          <a:lstStyle/>
-          <a:p>
-            <a:pPr algn="l"/>
-            <a:r>
-              <a:rPr sz="680" b="0" i="0">
-                <a:solidFill>
-                  <a:srgbClr val="CCE5E5"/>
-                </a:solidFill>
-              </a:rPr>
-              <a:t>You've just seen it. Enterprise engineers, zero agency overhead.</a:t>
-            </a:r>
-          </a:p>
-        </p:txBody>
-      </p:sp>
-      <p:sp>
-        <p:nvSpPr>
-          <p:cNvPr id="56" name="Rectangle 55"/>
-          <p:cNvSpPr/>
-          <p:nvPr/>
-        </p:nvSpPr>
-        <p:spPr>
-          <a:xfrm>
-            <a:off x="5989320" y="2350008"/>
-            <a:ext cx="5788152" cy="457200"/>
-          </a:xfrm>
-          <a:prstGeom prst="rect">
-            <a:avLst/>
-          </a:prstGeom>
-          <a:solidFill>
-            <a:srgbClr val="1C2E2E"/>
-          </a:solidFill>
-          <a:ln>
-            <a:noFill/>
-          </a:ln>
-        </p:spPr>
-        <p:style>
-          <a:lnRef idx="1">
-            <a:schemeClr val="accent1"/>
-          </a:lnRef>
-          <a:fillRef idx="3">
-            <a:schemeClr val="accent1"/>
-          </a:fillRef>
-          <a:effectRef idx="2">
-            <a:schemeClr val="accent1"/>
-          </a:effectRef>
-          <a:fontRef idx="minor">
-            <a:schemeClr val="lt1"/>
-          </a:fontRef>
-        </p:style>
-        <p:txBody>
-          <a:bodyPr rtlCol="0" anchor="ctr"/>
-          <a:lstStyle/>
-          <a:p>
-            <a:pPr algn="ctr"/>
-          </a:p>
-        </p:txBody>
-      </p:sp>
-      <p:sp>
-        <p:nvSpPr>
-          <p:cNvPr id="57" name="Rectangle 56"/>
-          <p:cNvSpPr/>
-          <p:nvPr/>
-        </p:nvSpPr>
-        <p:spPr>
-          <a:xfrm>
-            <a:off x="5989320" y="2350008"/>
-            <a:ext cx="45720" cy="457200"/>
-          </a:xfrm>
-          <a:prstGeom prst="rect">
-            <a:avLst/>
-          </a:prstGeom>
-          <a:solidFill>
-            <a:srgbClr val="3AAEAE"/>
-          </a:solidFill>
-          <a:ln>
-            <a:noFill/>
-          </a:ln>
-        </p:spPr>
-        <p:style>
-          <a:lnRef idx="1">
-            <a:schemeClr val="accent1"/>
-          </a:lnRef>
-          <a:fillRef idx="3">
-            <a:schemeClr val="accent1"/>
-          </a:fillRef>
-          <a:effectRef idx="2">
-            <a:schemeClr val="accent1"/>
-          </a:effectRef>
-          <a:fontRef idx="minor">
-            <a:schemeClr val="lt1"/>
-          </a:fontRef>
-        </p:style>
-        <p:txBody>
-          <a:bodyPr rtlCol="0" anchor="ctr"/>
-          <a:lstStyle/>
-          <a:p>
-            <a:pPr algn="ctr"/>
-          </a:p>
-        </p:txBody>
-      </p:sp>
-      <p:sp>
-        <p:nvSpPr>
-          <p:cNvPr id="58" name="TextBox 57"/>
-          <p:cNvSpPr txBox="1"/>
-          <p:nvPr/>
-        </p:nvSpPr>
-        <p:spPr>
-          <a:xfrm>
-            <a:off x="6099048" y="2386584"/>
-            <a:ext cx="5632704" cy="182880"/>
-          </a:xfrm>
-          <a:prstGeom prst="rect">
-            <a:avLst/>
-          </a:prstGeom>
-          <a:noFill/>
-        </p:spPr>
-        <p:txBody>
-          <a:bodyPr wrap="square">
-            <a:spAutoFit/>
-          </a:bodyPr>
-          <a:lstStyle/>
-          <a:p>
-            <a:pPr algn="l"/>
-            <a:r>
-              <a:rPr sz="720" b="1" i="0">
-                <a:solidFill>
-                  <a:srgbClr val="FFFFFF"/>
-                </a:solidFill>
-              </a:rPr>
-              <a:t>"We need to think about it."</a:t>
-            </a:r>
-          </a:p>
-        </p:txBody>
-      </p:sp>
-      <p:sp>
-        <p:nvSpPr>
-          <p:cNvPr id="59" name="TextBox 58"/>
-          <p:cNvSpPr txBox="1"/>
-          <p:nvPr/>
-        </p:nvSpPr>
-        <p:spPr>
-          <a:xfrm>
-            <a:off x="6099048" y="2587752"/>
-            <a:ext cx="5632704" cy="201168"/>
-          </a:xfrm>
-          <a:prstGeom prst="rect">
-            <a:avLst/>
-          </a:prstGeom>
-          <a:noFill/>
-        </p:spPr>
-        <p:txBody>
-          <a:bodyPr wrap="square">
-            <a:spAutoFit/>
-          </a:bodyPr>
-          <a:lstStyle/>
-          <a:p>
-            <a:pPr algn="l"/>
-            <a:r>
-              <a:rPr sz="680" b="0" i="0">
-                <a:solidFill>
-                  <a:srgbClr val="CCE5E5"/>
-                </a:solidFill>
-              </a:rPr>
-              <a:t>What specifically? Name the real objection. Then stop talking.</a:t>
-            </a:r>
-          </a:p>
-        </p:txBody>
-      </p:sp>
-      <p:sp>
-        <p:nvSpPr>
-          <p:cNvPr id="60" name="Rectangle 59"/>
-          <p:cNvSpPr/>
-          <p:nvPr/>
-        </p:nvSpPr>
-        <p:spPr>
-          <a:xfrm>
-            <a:off x="5989320" y="2843784"/>
-            <a:ext cx="5788152" cy="457200"/>
-          </a:xfrm>
-          <a:prstGeom prst="rect">
-            <a:avLst/>
-          </a:prstGeom>
-          <a:solidFill>
-            <a:srgbClr val="1C2E2E"/>
-          </a:solidFill>
-          <a:ln>
-            <a:noFill/>
-          </a:ln>
-        </p:spPr>
-        <p:style>
-          <a:lnRef idx="1">
-            <a:schemeClr val="accent1"/>
-          </a:lnRef>
-          <a:fillRef idx="3">
-            <a:schemeClr val="accent1"/>
-          </a:fillRef>
-          <a:effectRef idx="2">
-            <a:schemeClr val="accent1"/>
-          </a:effectRef>
-          <a:fontRef idx="minor">
-            <a:schemeClr val="lt1"/>
-          </a:fontRef>
-        </p:style>
-        <p:txBody>
-          <a:bodyPr rtlCol="0" anchor="ctr"/>
-          <a:lstStyle/>
-          <a:p>
-            <a:pPr algn="ctr"/>
-          </a:p>
-        </p:txBody>
-      </p:sp>
-      <p:sp>
-        <p:nvSpPr>
-          <p:cNvPr id="61" name="Rectangle 60"/>
-          <p:cNvSpPr/>
-          <p:nvPr/>
-        </p:nvSpPr>
-        <p:spPr>
-          <a:xfrm>
-            <a:off x="5989320" y="2843784"/>
-            <a:ext cx="45720" cy="457200"/>
-          </a:xfrm>
-          <a:prstGeom prst="rect">
-            <a:avLst/>
-          </a:prstGeom>
-          <a:solidFill>
-            <a:srgbClr val="3AAEAE"/>
-          </a:solidFill>
-          <a:ln>
-            <a:noFill/>
-          </a:ln>
-        </p:spPr>
-        <p:style>
-          <a:lnRef idx="1">
-            <a:schemeClr val="accent1"/>
-          </a:lnRef>
-          <a:fillRef idx="3">
-            <a:schemeClr val="accent1"/>
-          </a:fillRef>
-          <a:effectRef idx="2">
-            <a:schemeClr val="accent1"/>
-          </a:effectRef>
-          <a:fontRef idx="minor">
-            <a:schemeClr val="lt1"/>
-          </a:fontRef>
-        </p:style>
-        <p:txBody>
-          <a:bodyPr rtlCol="0" anchor="ctr"/>
-          <a:lstStyle/>
-          <a:p>
-            <a:pPr algn="ctr"/>
-          </a:p>
-        </p:txBody>
-      </p:sp>
-      <p:sp>
-        <p:nvSpPr>
-          <p:cNvPr id="62" name="TextBox 61"/>
-          <p:cNvSpPr txBox="1"/>
-          <p:nvPr/>
-        </p:nvSpPr>
-        <p:spPr>
-          <a:xfrm>
-            <a:off x="6099048" y="2880360"/>
-            <a:ext cx="5632704" cy="182880"/>
-          </a:xfrm>
-          <a:prstGeom prst="rect">
-            <a:avLst/>
-          </a:prstGeom>
-          <a:noFill/>
-        </p:spPr>
-        <p:txBody>
-          <a:bodyPr wrap="square">
-            <a:spAutoFit/>
-          </a:bodyPr>
-          <a:lstStyle/>
-          <a:p>
-            <a:pPr algn="l"/>
-            <a:r>
-              <a:rPr sz="720" b="1" i="0">
-                <a:solidFill>
-                  <a:srgbClr val="FFFFFF"/>
-                </a:solidFill>
-              </a:rPr>
-              <a:t>"We want a few quotes."</a:t>
-            </a:r>
-          </a:p>
-        </p:txBody>
-      </p:sp>
-      <p:sp>
-        <p:nvSpPr>
-          <p:cNvPr id="63" name="TextBox 62"/>
-          <p:cNvSpPr txBox="1"/>
-          <p:nvPr/>
-        </p:nvSpPr>
-        <p:spPr>
-          <a:xfrm>
-            <a:off x="6099048" y="3081528"/>
-            <a:ext cx="5632704" cy="201168"/>
-          </a:xfrm>
-          <a:prstGeom prst="rect">
-            <a:avLst/>
-          </a:prstGeom>
-          <a:noFill/>
-        </p:spPr>
-        <p:txBody>
-          <a:bodyPr wrap="square">
-            <a:spAutoFit/>
-          </a:bodyPr>
-          <a:lstStyle/>
-          <a:p>
-            <a:pPr algn="l"/>
-            <a:r>
-              <a:rPr sz="680" b="0" i="0">
-                <a:solidFill>
-                  <a:srgbClr val="CCE5E5"/>
-                </a:solidFill>
-              </a:rPr>
-              <a:t>Equivalent quality starts at £2,000+. We'll beat any quote.</a:t>
-            </a:r>
-          </a:p>
-        </p:txBody>
-      </p:sp>
-      <p:sp>
-        <p:nvSpPr>
-          <p:cNvPr id="64" name="Rectangle 63"/>
-          <p:cNvSpPr/>
-          <p:nvPr/>
-        </p:nvSpPr>
-        <p:spPr>
-          <a:xfrm>
-            <a:off x="5989320" y="3337560"/>
-            <a:ext cx="5788152" cy="457200"/>
-          </a:xfrm>
-          <a:prstGeom prst="rect">
-            <a:avLst/>
-          </a:prstGeom>
-          <a:solidFill>
-            <a:srgbClr val="1C2E2E"/>
-          </a:solidFill>
-          <a:ln>
-            <a:noFill/>
-          </a:ln>
-        </p:spPr>
-        <p:style>
-          <a:lnRef idx="1">
-            <a:schemeClr val="accent1"/>
-          </a:lnRef>
-          <a:fillRef idx="3">
-            <a:schemeClr val="accent1"/>
-          </a:fillRef>
-          <a:effectRef idx="2">
-            <a:schemeClr val="accent1"/>
-          </a:effectRef>
-          <a:fontRef idx="minor">
-            <a:schemeClr val="lt1"/>
-          </a:fontRef>
-        </p:style>
-        <p:txBody>
-          <a:bodyPr rtlCol="0" anchor="ctr"/>
-          <a:lstStyle/>
-          <a:p>
-            <a:pPr algn="ctr"/>
-          </a:p>
-        </p:txBody>
-      </p:sp>
-      <p:sp>
-        <p:nvSpPr>
-          <p:cNvPr id="65" name="Rectangle 64"/>
-          <p:cNvSpPr/>
-          <p:nvPr/>
-        </p:nvSpPr>
-        <p:spPr>
-          <a:xfrm>
-            <a:off x="5989320" y="3337560"/>
-            <a:ext cx="45720" cy="457200"/>
-          </a:xfrm>
-          <a:prstGeom prst="rect">
-            <a:avLst/>
-          </a:prstGeom>
-          <a:solidFill>
-            <a:srgbClr val="3AAEAE"/>
-          </a:solidFill>
-          <a:ln>
-            <a:noFill/>
-          </a:ln>
-        </p:spPr>
-        <p:style>
-          <a:lnRef idx="1">
-            <a:schemeClr val="accent1"/>
-          </a:lnRef>
-          <a:fillRef idx="3">
-            <a:schemeClr val="accent1"/>
-          </a:fillRef>
-          <a:effectRef idx="2">
-            <a:schemeClr val="accent1"/>
-          </a:effectRef>
-          <a:fontRef idx="minor">
-            <a:schemeClr val="lt1"/>
-          </a:fontRef>
-        </p:style>
-        <p:txBody>
-          <a:bodyPr rtlCol="0" anchor="ctr"/>
-          <a:lstStyle/>
-          <a:p>
-            <a:pPr algn="ctr"/>
-          </a:p>
-        </p:txBody>
-      </p:sp>
-      <p:sp>
-        <p:nvSpPr>
-          <p:cNvPr id="66" name="TextBox 65"/>
-          <p:cNvSpPr txBox="1"/>
-          <p:nvPr/>
-        </p:nvSpPr>
-        <p:spPr>
-          <a:xfrm>
-            <a:off x="6099048" y="3374136"/>
-            <a:ext cx="5632704" cy="182880"/>
-          </a:xfrm>
-          <a:prstGeom prst="rect">
-            <a:avLst/>
-          </a:prstGeom>
-          <a:noFill/>
-        </p:spPr>
-        <p:txBody>
-          <a:bodyPr wrap="square">
-            <a:spAutoFit/>
-          </a:bodyPr>
-          <a:lstStyle/>
-          <a:p>
-            <a:pPr algn="l"/>
-            <a:r>
-              <a:rPr sz="720" b="1" i="0">
-                <a:solidFill>
-                  <a:srgbClr val="FFFFFF"/>
-                </a:solidFill>
-              </a:rPr>
-              <a:t>"We had a bad experience before."</a:t>
-            </a:r>
-          </a:p>
-        </p:txBody>
-      </p:sp>
-      <p:sp>
-        <p:nvSpPr>
-          <p:cNvPr id="67" name="TextBox 66"/>
-          <p:cNvSpPr txBox="1"/>
-          <p:nvPr/>
-        </p:nvSpPr>
-        <p:spPr>
-          <a:xfrm>
-            <a:off x="6099048" y="3575304"/>
-            <a:ext cx="5632704" cy="201168"/>
-          </a:xfrm>
-          <a:prstGeom prst="rect">
-            <a:avLst/>
-          </a:prstGeom>
-          <a:noFill/>
-        </p:spPr>
-        <p:txBody>
-          <a:bodyPr wrap="square">
-            <a:spAutoFit/>
-          </a:bodyPr>
-          <a:lstStyle/>
-          <a:p>
-            <a:pPr algn="l"/>
-            <a:r>
-              <a:rPr sz="680" b="0" i="0">
-                <a:solidFill>
-                  <a:srgbClr val="CCE5E5"/>
-                </a:solidFill>
-              </a:rPr>
-              <a:t>"Tell me what happened." Vela Sync was built for exactly that gap.</a:t>
-            </a:r>
-          </a:p>
-        </p:txBody>
-      </p:sp>
-      <p:sp>
-        <p:nvSpPr>
-          <p:cNvPr id="68" name="Rectangle 67"/>
-          <p:cNvSpPr/>
-          <p:nvPr/>
-        </p:nvSpPr>
-        <p:spPr>
-          <a:xfrm>
-            <a:off x="5989320" y="3831336"/>
-            <a:ext cx="5788152" cy="457200"/>
-          </a:xfrm>
-          <a:prstGeom prst="rect">
-            <a:avLst/>
-          </a:prstGeom>
-          <a:solidFill>
-            <a:srgbClr val="1C2E2E"/>
-          </a:solidFill>
-          <a:ln>
-            <a:noFill/>
-          </a:ln>
-        </p:spPr>
-        <p:style>
-          <a:lnRef idx="1">
-            <a:schemeClr val="accent1"/>
-          </a:lnRef>
-          <a:fillRef idx="3">
-            <a:schemeClr val="accent1"/>
-          </a:fillRef>
-          <a:effectRef idx="2">
-            <a:schemeClr val="accent1"/>
-          </a:effectRef>
-          <a:fontRef idx="minor">
-            <a:schemeClr val="lt1"/>
-          </a:fontRef>
-        </p:style>
-        <p:txBody>
-          <a:bodyPr rtlCol="0" anchor="ctr"/>
-          <a:lstStyle/>
-          <a:p>
-            <a:pPr algn="ctr"/>
-          </a:p>
-        </p:txBody>
-      </p:sp>
-      <p:sp>
-        <p:nvSpPr>
-          <p:cNvPr id="69" name="Rectangle 68"/>
-          <p:cNvSpPr/>
-          <p:nvPr/>
-        </p:nvSpPr>
-        <p:spPr>
-          <a:xfrm>
-            <a:off x="5989320" y="3831336"/>
-            <a:ext cx="45720" cy="457200"/>
-          </a:xfrm>
-          <a:prstGeom prst="rect">
-            <a:avLst/>
-          </a:prstGeom>
-          <a:solidFill>
-            <a:srgbClr val="3AAEAE"/>
-          </a:solidFill>
-          <a:ln>
-            <a:noFill/>
-          </a:ln>
-        </p:spPr>
-        <p:style>
-          <a:lnRef idx="1">
-            <a:schemeClr val="accent1"/>
-          </a:lnRef>
-          <a:fillRef idx="3">
-            <a:schemeClr val="accent1"/>
-          </a:fillRef>
-          <a:effectRef idx="2">
-            <a:schemeClr val="accent1"/>
-          </a:effectRef>
-          <a:fontRef idx="minor">
-            <a:schemeClr val="lt1"/>
-          </a:fontRef>
-        </p:style>
-        <p:txBody>
-          <a:bodyPr rtlCol="0" anchor="ctr"/>
-          <a:lstStyle/>
-          <a:p>
-            <a:pPr algn="ctr"/>
-          </a:p>
-        </p:txBody>
-      </p:sp>
-      <p:sp>
-        <p:nvSpPr>
-          <p:cNvPr id="70" name="TextBox 69"/>
-          <p:cNvSpPr txBox="1"/>
-          <p:nvPr/>
-        </p:nvSpPr>
-        <p:spPr>
-          <a:xfrm>
-            <a:off x="6099048" y="3867912"/>
-            <a:ext cx="5632704" cy="182880"/>
-          </a:xfrm>
-          <a:prstGeom prst="rect">
-            <a:avLst/>
-          </a:prstGeom>
-          <a:noFill/>
-        </p:spPr>
-        <p:txBody>
-          <a:bodyPr wrap="square">
-            <a:spAutoFit/>
-          </a:bodyPr>
-          <a:lstStyle/>
-          <a:p>
-            <a:pPr algn="l"/>
-            <a:r>
-              <a:rPr sz="720" b="1" i="0">
-                <a:solidFill>
-                  <a:srgbClr val="FFFFFF"/>
-                </a:solidFill>
-              </a:rPr>
-              <a:t>"Not sure about the monthly."</a:t>
-            </a:r>
-          </a:p>
-        </p:txBody>
-      </p:sp>
-      <p:sp>
-        <p:nvSpPr>
-          <p:cNvPr id="71" name="TextBox 70"/>
-          <p:cNvSpPr txBox="1"/>
-          <p:nvPr/>
-        </p:nvSpPr>
-        <p:spPr>
-          <a:xfrm>
-            <a:off x="6099048" y="4069080"/>
-            <a:ext cx="5632704" cy="201168"/>
-          </a:xfrm>
-          <a:prstGeom prst="rect">
-            <a:avLst/>
-          </a:prstGeom>
-          <a:noFill/>
-        </p:spPr>
-        <p:txBody>
-          <a:bodyPr wrap="square">
-            <a:spAutoFit/>
-          </a:bodyPr>
-          <a:lstStyle/>
-          <a:p>
-            <a:pPr algn="l"/>
-            <a:r>
-              <a:rPr sz="680" b="0" i="0">
-                <a:solidFill>
-                  <a:srgbClr val="CCE5E5"/>
-                </a:solidFill>
-              </a:rPr>
-              <a:t>£50/mo is insurance on a £450 asset. Easiest decision in the room.</a:t>
-            </a:r>
-          </a:p>
-        </p:txBody>
-      </p:sp>
-      <p:sp>
-        <p:nvSpPr>
-          <p:cNvPr id="72" name="Rectangle 71"/>
-          <p:cNvSpPr/>
-          <p:nvPr/>
-        </p:nvSpPr>
-        <p:spPr>
-          <a:xfrm>
-            <a:off x="5989320" y="4398264"/>
-            <a:ext cx="5788152" cy="274320"/>
-          </a:xfrm>
-          <a:prstGeom prst="rect">
-            <a:avLst/>
-          </a:prstGeom>
-          <a:solidFill>
-            <a:srgbClr val="1C2E2E"/>
-          </a:solidFill>
-          <a:ln>
-            <a:noFill/>
-          </a:ln>
-        </p:spPr>
-        <p:style>
-          <a:lnRef idx="1">
-            <a:schemeClr val="accent1"/>
-          </a:lnRef>
-          <a:fillRef idx="3">
-            <a:schemeClr val="accent1"/>
-          </a:fillRef>
-          <a:effectRef idx="2">
-            <a:schemeClr val="accent1"/>
-          </a:effectRef>
-          <a:fontRef idx="minor">
-            <a:schemeClr val="lt1"/>
-          </a:fontRef>
-        </p:style>
-        <p:txBody>
-          <a:bodyPr rtlCol="0" anchor="ctr"/>
-          <a:lstStyle/>
-          <a:p>
-            <a:pPr algn="ctr"/>
-          </a:p>
-        </p:txBody>
-      </p:sp>
-      <p:sp>
-        <p:nvSpPr>
-          <p:cNvPr id="73" name="Rectangle 72"/>
-          <p:cNvSpPr/>
-          <p:nvPr/>
-        </p:nvSpPr>
-        <p:spPr>
-          <a:xfrm>
-            <a:off x="5989320" y="4398264"/>
-            <a:ext cx="5788152" cy="27432"/>
-          </a:xfrm>
-          <a:prstGeom prst="rect">
-            <a:avLst/>
-          </a:prstGeom>
-          <a:solidFill>
-            <a:srgbClr val="3AAEAE"/>
-          </a:solidFill>
-          <a:ln>
-            <a:noFill/>
-          </a:ln>
-        </p:spPr>
-        <p:style>
-          <a:lnRef idx="1">
-            <a:schemeClr val="accent1"/>
-          </a:lnRef>
-          <a:fillRef idx="3">
-            <a:schemeClr val="accent1"/>
-          </a:fillRef>
-          <a:effectRef idx="2">
-            <a:schemeClr val="accent1"/>
-          </a:effectRef>
-          <a:fontRef idx="minor">
-            <a:schemeClr val="lt1"/>
-          </a:fontRef>
-        </p:style>
-        <p:txBody>
-          <a:bodyPr rtlCol="0" anchor="ctr"/>
-          <a:lstStyle/>
-          <a:p>
-            <a:pPr algn="ctr"/>
-          </a:p>
-        </p:txBody>
-      </p:sp>
-      <p:sp>
-        <p:nvSpPr>
-          <p:cNvPr id="74" name="TextBox 73"/>
-          <p:cNvSpPr txBox="1"/>
-          <p:nvPr/>
-        </p:nvSpPr>
-        <p:spPr>
-          <a:xfrm>
-            <a:off x="5989320" y="4453128"/>
-            <a:ext cx="5788152" cy="201168"/>
-          </a:xfrm>
-          <a:prstGeom prst="rect">
-            <a:avLst/>
-          </a:prstGeom>
-          <a:noFill/>
-        </p:spPr>
-        <p:txBody>
-          <a:bodyPr wrap="square">
-            <a:spAutoFit/>
-          </a:bodyPr>
-          <a:lstStyle/>
-          <a:p>
-            <a:pPr algn="l"/>
-            <a:r>
-              <a:rPr sz="850" b="1" i="0">
-                <a:solidFill>
-                  <a:srgbClr val="3AAEAE"/>
-                </a:solidFill>
-              </a:rPr>
-              <a:t>  CLOSE TECHNIQUES</a:t>
-            </a:r>
-          </a:p>
-        </p:txBody>
-      </p:sp>
-      <p:sp>
-        <p:nvSpPr>
-          <p:cNvPr id="75" name="Rectangle 74"/>
-          <p:cNvSpPr/>
-          <p:nvPr/>
-        </p:nvSpPr>
-        <p:spPr>
-          <a:xfrm>
-            <a:off x="5989320" y="4718304"/>
-            <a:ext cx="2857500" cy="457200"/>
-          </a:xfrm>
-          <a:prstGeom prst="rect">
-            <a:avLst/>
-          </a:prstGeom>
-          <a:solidFill>
-            <a:srgbClr val="152222"/>
-          </a:solidFill>
-          <a:ln>
-            <a:noFill/>
-          </a:ln>
-        </p:spPr>
-        <p:style>
-          <a:lnRef idx="1">
-            <a:schemeClr val="accent1"/>
-          </a:lnRef>
-          <a:fillRef idx="3">
-            <a:schemeClr val="accent1"/>
-          </a:fillRef>
-          <a:effectRef idx="2">
-            <a:schemeClr val="accent1"/>
-          </a:effectRef>
-          <a:fontRef idx="minor">
-            <a:schemeClr val="lt1"/>
-          </a:fontRef>
-        </p:style>
-        <p:txBody>
-          <a:bodyPr rtlCol="0" anchor="ctr"/>
-          <a:lstStyle/>
-          <a:p>
-            <a:pPr algn="ctr"/>
-          </a:p>
-        </p:txBody>
-      </p:sp>
-      <p:sp>
-        <p:nvSpPr>
-          <p:cNvPr id="76" name="TextBox 75"/>
-          <p:cNvSpPr txBox="1"/>
-          <p:nvPr/>
-        </p:nvSpPr>
-        <p:spPr>
-          <a:xfrm>
-            <a:off x="6062472" y="4754880"/>
-            <a:ext cx="2747772" cy="164592"/>
-          </a:xfrm>
-          <a:prstGeom prst="rect">
-            <a:avLst/>
-          </a:prstGeom>
-          <a:noFill/>
-        </p:spPr>
-        <p:txBody>
-          <a:bodyPr wrap="square">
-            <a:spAutoFit/>
-          </a:bodyPr>
-          <a:lstStyle/>
-          <a:p>
-            <a:pPr algn="l"/>
-            <a:r>
-              <a:rPr sz="750" b="1" i="0">
-                <a:solidFill>
-                  <a:srgbClr val="3AAEAE"/>
-                </a:solidFill>
-              </a:rPr>
-              <a:t>Assumptive</a:t>
-            </a:r>
-          </a:p>
-        </p:txBody>
-      </p:sp>
-      <p:sp>
-        <p:nvSpPr>
-          <p:cNvPr id="77" name="TextBox 76"/>
-          <p:cNvSpPr txBox="1"/>
-          <p:nvPr/>
-        </p:nvSpPr>
-        <p:spPr>
-          <a:xfrm>
-            <a:off x="6062472" y="4928616"/>
-            <a:ext cx="2747772" cy="228600"/>
-          </a:xfrm>
-          <a:prstGeom prst="rect">
-            <a:avLst/>
-          </a:prstGeom>
-          <a:noFill/>
-        </p:spPr>
-        <p:txBody>
-          <a:bodyPr wrap="square">
-            <a:spAutoFit/>
-          </a:bodyPr>
-          <a:lstStyle/>
-          <a:p>
-            <a:pPr algn="l"/>
-            <a:r>
-              <a:rPr sz="650" b="0" i="1">
-                <a:solidFill>
-                  <a:srgbClr val="CCE5E5"/>
-                </a:solidFill>
-              </a:rPr>
-              <a:t>"What's the domain name you're using?"</a:t>
-            </a:r>
-          </a:p>
-        </p:txBody>
-      </p:sp>
-      <p:sp>
-        <p:nvSpPr>
-          <p:cNvPr id="78" name="Rectangle 77"/>
-          <p:cNvSpPr/>
-          <p:nvPr/>
-        </p:nvSpPr>
-        <p:spPr>
-          <a:xfrm>
-            <a:off x="8919972" y="4718304"/>
-            <a:ext cx="2857500" cy="457200"/>
-          </a:xfrm>
-          <a:prstGeom prst="rect">
-            <a:avLst/>
-          </a:prstGeom>
-          <a:solidFill>
-            <a:srgbClr val="152222"/>
-          </a:solidFill>
-          <a:ln>
-            <a:noFill/>
-          </a:ln>
-        </p:spPr>
-        <p:style>
-          <a:lnRef idx="1">
-            <a:schemeClr val="accent1"/>
-          </a:lnRef>
-          <a:fillRef idx="3">
-            <a:schemeClr val="accent1"/>
-          </a:fillRef>
-          <a:effectRef idx="2">
-            <a:schemeClr val="accent1"/>
-          </a:effectRef>
-          <a:fontRef idx="minor">
-            <a:schemeClr val="lt1"/>
-          </a:fontRef>
-        </p:style>
-        <p:txBody>
-          <a:bodyPr rtlCol="0" anchor="ctr"/>
-          <a:lstStyle/>
-          <a:p>
-            <a:pPr algn="ctr"/>
-          </a:p>
-        </p:txBody>
-      </p:sp>
-      <p:sp>
-        <p:nvSpPr>
-          <p:cNvPr id="79" name="TextBox 78"/>
-          <p:cNvSpPr txBox="1"/>
-          <p:nvPr/>
-        </p:nvSpPr>
-        <p:spPr>
-          <a:xfrm>
-            <a:off x="8993124" y="4754880"/>
-            <a:ext cx="2747772" cy="164592"/>
-          </a:xfrm>
-          <a:prstGeom prst="rect">
-            <a:avLst/>
-          </a:prstGeom>
-          <a:noFill/>
-        </p:spPr>
-        <p:txBody>
-          <a:bodyPr wrap="square">
-            <a:spAutoFit/>
-          </a:bodyPr>
-          <a:lstStyle/>
-          <a:p>
-            <a:pPr algn="l"/>
-            <a:r>
-              <a:rPr sz="750" b="1" i="0">
-                <a:solidFill>
-                  <a:srgbClr val="3AAEAE"/>
-                </a:solidFill>
-              </a:rPr>
-              <a:t>ROI Frame</a:t>
-            </a:r>
-          </a:p>
-        </p:txBody>
-      </p:sp>
-      <p:sp>
-        <p:nvSpPr>
-          <p:cNvPr id="80" name="TextBox 79"/>
-          <p:cNvSpPr txBox="1"/>
-          <p:nvPr/>
-        </p:nvSpPr>
-        <p:spPr>
-          <a:xfrm>
-            <a:off x="8993124" y="4928616"/>
-            <a:ext cx="2747772" cy="228600"/>
-          </a:xfrm>
-          <a:prstGeom prst="rect">
-            <a:avLst/>
-          </a:prstGeom>
-          <a:noFill/>
-        </p:spPr>
-        <p:txBody>
-          <a:bodyPr wrap="square">
-            <a:spAutoFit/>
-          </a:bodyPr>
-          <a:lstStyle/>
-          <a:p>
-            <a:pPr algn="l"/>
-            <a:r>
-              <a:rPr sz="650" b="0" i="1">
-                <a:solidFill>
-                  <a:srgbClr val="CCE5E5"/>
-                </a:solidFill>
-              </a:rPr>
-              <a:t>"If it brings one extra customer — what's that worth?"</a:t>
-            </a:r>
-          </a:p>
-        </p:txBody>
-      </p:sp>
-      <p:sp>
-        <p:nvSpPr>
-          <p:cNvPr id="81" name="Rectangle 80"/>
-          <p:cNvSpPr/>
-          <p:nvPr/>
-        </p:nvSpPr>
-        <p:spPr>
-          <a:xfrm>
-            <a:off x="5989320" y="5221224"/>
-            <a:ext cx="2857500" cy="457200"/>
-          </a:xfrm>
-          <a:prstGeom prst="rect">
-            <a:avLst/>
-          </a:prstGeom>
-          <a:solidFill>
-            <a:srgbClr val="152222"/>
-          </a:solidFill>
-          <a:ln>
-            <a:noFill/>
-          </a:ln>
-        </p:spPr>
-        <p:style>
-          <a:lnRef idx="1">
-            <a:schemeClr val="accent1"/>
-          </a:lnRef>
-          <a:fillRef idx="3">
-            <a:schemeClr val="accent1"/>
-          </a:fillRef>
-          <a:effectRef idx="2">
-            <a:schemeClr val="accent1"/>
-          </a:effectRef>
-          <a:fontRef idx="minor">
-            <a:schemeClr val="lt1"/>
-          </a:fontRef>
-        </p:style>
-        <p:txBody>
-          <a:bodyPr rtlCol="0" anchor="ctr"/>
-          <a:lstStyle/>
-          <a:p>
-            <a:pPr algn="ctr"/>
-          </a:p>
-        </p:txBody>
-      </p:sp>
-      <p:sp>
-        <p:nvSpPr>
-          <p:cNvPr id="82" name="TextBox 81"/>
-          <p:cNvSpPr txBox="1"/>
-          <p:nvPr/>
-        </p:nvSpPr>
-        <p:spPr>
-          <a:xfrm>
-            <a:off x="6062472" y="5257800"/>
-            <a:ext cx="2747772" cy="164592"/>
-          </a:xfrm>
-          <a:prstGeom prst="rect">
-            <a:avLst/>
-          </a:prstGeom>
-          <a:noFill/>
-        </p:spPr>
-        <p:txBody>
-          <a:bodyPr wrap="square">
-            <a:spAutoFit/>
-          </a:bodyPr>
-          <a:lstStyle/>
-          <a:p>
-            <a:pPr algn="l"/>
-            <a:r>
-              <a:rPr sz="750" b="1" i="0">
-                <a:solidFill>
-                  <a:srgbClr val="3AAEAE"/>
-                </a:solidFill>
-              </a:rPr>
-              <a:t>Urgency</a:t>
-            </a:r>
-          </a:p>
-        </p:txBody>
-      </p:sp>
-      <p:sp>
-        <p:nvSpPr>
-          <p:cNvPr id="83" name="TextBox 82"/>
-          <p:cNvSpPr txBox="1"/>
-          <p:nvPr/>
-        </p:nvSpPr>
-        <p:spPr>
-          <a:xfrm>
-            <a:off x="6062472" y="5431536"/>
-            <a:ext cx="2747772" cy="228600"/>
-          </a:xfrm>
-          <a:prstGeom prst="rect">
-            <a:avLst/>
-          </a:prstGeom>
-          <a:noFill/>
-        </p:spPr>
-        <p:txBody>
-          <a:bodyPr wrap="square">
-            <a:spAutoFit/>
-          </a:bodyPr>
-          <a:lstStyle/>
-          <a:p>
-            <a:pPr algn="l"/>
-            <a:r>
-              <a:rPr sz="650" b="0" i="1">
-                <a:solidFill>
-                  <a:srgbClr val="CCE5E5"/>
-                </a:solidFill>
-              </a:rPr>
-              <a:t>"Someone is Googling you RIGHT NOW. What stops us doing this today?" → silence.</a:t>
-            </a:r>
-          </a:p>
-        </p:txBody>
-      </p:sp>
-      <p:sp>
-        <p:nvSpPr>
-          <p:cNvPr id="84" name="Rectangle 83"/>
-          <p:cNvSpPr/>
-          <p:nvPr/>
-        </p:nvSpPr>
-        <p:spPr>
-          <a:xfrm>
-            <a:off x="8919972" y="5221224"/>
-            <a:ext cx="2857500" cy="457200"/>
-          </a:xfrm>
-          <a:prstGeom prst="rect">
-            <a:avLst/>
-          </a:prstGeom>
-          <a:solidFill>
-            <a:srgbClr val="152222"/>
-          </a:solidFill>
-          <a:ln>
-            <a:noFill/>
-          </a:ln>
-        </p:spPr>
-        <p:style>
-          <a:lnRef idx="1">
-            <a:schemeClr val="accent1"/>
-          </a:lnRef>
-          <a:fillRef idx="3">
-            <a:schemeClr val="accent1"/>
-          </a:fillRef>
-          <a:effectRef idx="2">
-            <a:schemeClr val="accent1"/>
-          </a:effectRef>
-          <a:fontRef idx="minor">
-            <a:schemeClr val="lt1"/>
-          </a:fontRef>
-        </p:style>
-        <p:txBody>
-          <a:bodyPr rtlCol="0" anchor="ctr"/>
-          <a:lstStyle/>
-          <a:p>
-            <a:pPr algn="ctr"/>
-          </a:p>
-        </p:txBody>
-      </p:sp>
-      <p:sp>
-        <p:nvSpPr>
-          <p:cNvPr id="85" name="TextBox 84"/>
-          <p:cNvSpPr txBox="1"/>
-          <p:nvPr/>
-        </p:nvSpPr>
-        <p:spPr>
-          <a:xfrm>
-            <a:off x="8993124" y="5257800"/>
-            <a:ext cx="2747772" cy="164592"/>
-          </a:xfrm>
-          <a:prstGeom prst="rect">
-            <a:avLst/>
-          </a:prstGeom>
-          <a:noFill/>
-        </p:spPr>
-        <p:txBody>
-          <a:bodyPr wrap="square">
-            <a:spAutoFit/>
-          </a:bodyPr>
-          <a:lstStyle/>
-          <a:p>
-            <a:pPr algn="l"/>
-            <a:r>
-              <a:rPr sz="750" b="1" i="0">
-                <a:solidFill>
-                  <a:srgbClr val="3AAEAE"/>
-                </a:solidFill>
-              </a:rPr>
-              <a:t>Option</a:t>
-            </a:r>
-          </a:p>
-        </p:txBody>
-      </p:sp>
-      <p:sp>
-        <p:nvSpPr>
-          <p:cNvPr id="86" name="TextBox 85"/>
-          <p:cNvSpPr txBox="1"/>
-          <p:nvPr/>
-        </p:nvSpPr>
-        <p:spPr>
-          <a:xfrm>
-            <a:off x="8993124" y="5431536"/>
-            <a:ext cx="2747772" cy="228600"/>
-          </a:xfrm>
-          <a:prstGeom prst="rect">
-            <a:avLst/>
-          </a:prstGeom>
-          <a:noFill/>
-        </p:spPr>
-        <p:txBody>
-          <a:bodyPr wrap="square">
-            <a:spAutoFit/>
-          </a:bodyPr>
-          <a:lstStyle/>
-          <a:p>
-            <a:pPr algn="l"/>
-            <a:r>
-              <a:rPr sz="650" b="0" i="1">
-                <a:solidFill>
-                  <a:srgbClr val="CCE5E5"/>
-                </a:solidFill>
-              </a:rPr>
-              <a:t>"£450 standard or £650 SEO — which feels right?"</a:t>
-            </a:r>
-          </a:p>
-        </p:txBody>
-      </p:sp>
-      <p:sp>
-        <p:nvSpPr>
-          <p:cNvPr id="87" name="Rectangle 86"/>
-          <p:cNvSpPr/>
-          <p:nvPr/>
-        </p:nvSpPr>
-        <p:spPr>
-          <a:xfrm>
-            <a:off x="411480" y="4983480"/>
-            <a:ext cx="5303520" cy="274320"/>
-          </a:xfrm>
-          <a:prstGeom prst="rect">
-            <a:avLst/>
-          </a:prstGeom>
-          <a:solidFill>
-            <a:srgbClr val="2B8E8E"/>
-          </a:solidFill>
-          <a:ln>
-            <a:noFill/>
-          </a:ln>
-        </p:spPr>
-        <p:style>
-          <a:lnRef idx="1">
-            <a:schemeClr val="accent1"/>
-          </a:lnRef>
-          <a:fillRef idx="3">
-            <a:schemeClr val="accent1"/>
-          </a:fillRef>
-          <a:effectRef idx="2">
-            <a:schemeClr val="accent1"/>
-          </a:effectRef>
-          <a:fontRef idx="minor">
-            <a:schemeClr val="lt1"/>
-          </a:fontRef>
-        </p:style>
-        <p:txBody>
-          <a:bodyPr rtlCol="0" anchor="ctr"/>
-          <a:lstStyle/>
-          <a:p>
-            <a:pPr algn="ctr"/>
-          </a:p>
-        </p:txBody>
-      </p:sp>
-      <p:sp>
-        <p:nvSpPr>
-          <p:cNvPr id="88" name="TextBox 87"/>
-          <p:cNvSpPr txBox="1"/>
-          <p:nvPr/>
-        </p:nvSpPr>
-        <p:spPr>
-          <a:xfrm>
-            <a:off x="411480" y="4983480"/>
-            <a:ext cx="5303520" cy="274320"/>
-          </a:xfrm>
-          <a:prstGeom prst="rect">
-            <a:avLst/>
-          </a:prstGeom>
-          <a:noFill/>
-        </p:spPr>
-        <p:txBody>
-          <a:bodyPr wrap="square">
-            <a:spAutoFit/>
-          </a:bodyPr>
-          <a:lstStyle/>
-          <a:p>
-            <a:pPr algn="l"/>
-            <a:r>
-              <a:rPr sz="850" b="1" i="0">
-                <a:solidFill>
-                  <a:srgbClr val="FFFFFF"/>
-                </a:solidFill>
-              </a:rPr>
-              <a:t>  PRICING — KNOW THESE COLD</a:t>
-            </a:r>
-          </a:p>
-        </p:txBody>
-      </p:sp>
-      <p:sp>
-        <p:nvSpPr>
-          <p:cNvPr id="89" name="Rectangle 88"/>
-          <p:cNvSpPr/>
-          <p:nvPr/>
-        </p:nvSpPr>
-        <p:spPr>
-          <a:xfrm>
-            <a:off x="411480" y="5294376"/>
-            <a:ext cx="2606040" cy="512064"/>
-          </a:xfrm>
-          <a:prstGeom prst="rect">
-            <a:avLst/>
-          </a:prstGeom>
-          <a:solidFill>
-            <a:srgbClr val="1C2E2E"/>
-          </a:solidFill>
-          <a:ln>
-            <a:noFill/>
-          </a:ln>
-        </p:spPr>
-        <p:style>
-          <a:lnRef idx="1">
-            <a:schemeClr val="accent1"/>
-          </a:lnRef>
-          <a:fillRef idx="3">
-            <a:schemeClr val="accent1"/>
-          </a:fillRef>
-          <a:effectRef idx="2">
-            <a:schemeClr val="accent1"/>
-          </a:effectRef>
-          <a:fontRef idx="minor">
-            <a:schemeClr val="lt1"/>
-          </a:fontRef>
-        </p:style>
-        <p:txBody>
-          <a:bodyPr rtlCol="0" anchor="ctr"/>
-          <a:lstStyle/>
-          <a:p>
-            <a:pPr algn="ctr"/>
-          </a:p>
-        </p:txBody>
-      </p:sp>
-      <p:sp>
-        <p:nvSpPr>
-          <p:cNvPr id="90" name="TextBox 89"/>
-          <p:cNvSpPr txBox="1"/>
-          <p:nvPr/>
-        </p:nvSpPr>
-        <p:spPr>
-          <a:xfrm>
-            <a:off x="502920" y="5330952"/>
-            <a:ext cx="2468879" cy="164592"/>
-          </a:xfrm>
-          <a:prstGeom prst="rect">
-            <a:avLst/>
-          </a:prstGeom>
-          <a:noFill/>
-        </p:spPr>
-        <p:txBody>
-          <a:bodyPr wrap="square">
-            <a:spAutoFit/>
-          </a:bodyPr>
-          <a:lstStyle/>
-          <a:p>
-            <a:pPr algn="l"/>
-            <a:r>
-              <a:rPr sz="800" b="1" i="0">
-                <a:solidFill>
-                  <a:srgbClr val="3AAEAE"/>
-                </a:solidFill>
-              </a:rPr>
-              <a:t>STANDARD</a:t>
-            </a:r>
-          </a:p>
-        </p:txBody>
-      </p:sp>
-      <p:sp>
-        <p:nvSpPr>
-          <p:cNvPr id="91" name="TextBox 90"/>
-          <p:cNvSpPr txBox="1"/>
-          <p:nvPr/>
-        </p:nvSpPr>
-        <p:spPr>
-          <a:xfrm>
-            <a:off x="502920" y="5495544"/>
-            <a:ext cx="2468879" cy="164592"/>
-          </a:xfrm>
-          <a:prstGeom prst="rect">
-            <a:avLst/>
-          </a:prstGeom>
-          <a:noFill/>
-        </p:spPr>
-        <p:txBody>
-          <a:bodyPr wrap="square">
-            <a:spAutoFit/>
-          </a:bodyPr>
-          <a:lstStyle/>
-          <a:p>
-            <a:pPr algn="l"/>
-            <a:r>
-              <a:rPr sz="900" b="1" i="0">
-                <a:solidFill>
-                  <a:srgbClr val="FFFFFF"/>
-                </a:solidFill>
-              </a:rPr>
-              <a:t>£450 setup  ·  £50/mo</a:t>
-            </a:r>
-          </a:p>
-        </p:txBody>
-      </p:sp>
-      <p:sp>
-        <p:nvSpPr>
-          <p:cNvPr id="92" name="TextBox 91"/>
-          <p:cNvSpPr txBox="1"/>
-          <p:nvPr/>
-        </p:nvSpPr>
-        <p:spPr>
-          <a:xfrm>
-            <a:off x="502920" y="5660136"/>
-            <a:ext cx="2468879" cy="146304"/>
-          </a:xfrm>
-          <a:prstGeom prst="rect">
-            <a:avLst/>
-          </a:prstGeom>
-          <a:noFill/>
-        </p:spPr>
-        <p:txBody>
-          <a:bodyPr wrap="square">
-            <a:spAutoFit/>
-          </a:bodyPr>
-          <a:lstStyle/>
-          <a:p>
-            <a:pPr algn="l"/>
-            <a:r>
-              <a:rPr sz="650" b="0" i="0">
-                <a:solidFill>
-                  <a:srgbClr val="AACCCC"/>
-                </a:solidFill>
-              </a:rPr>
-              <a:t>Professional site · 24h live · SSL · On-page SEO</a:t>
-            </a:r>
-          </a:p>
-        </p:txBody>
-      </p:sp>
-      <p:sp>
-        <p:nvSpPr>
-          <p:cNvPr id="93" name="Rectangle 92"/>
-          <p:cNvSpPr/>
-          <p:nvPr/>
-        </p:nvSpPr>
-        <p:spPr>
-          <a:xfrm>
-            <a:off x="3108960" y="5294376"/>
-            <a:ext cx="2606040" cy="512064"/>
-          </a:xfrm>
-          <a:prstGeom prst="rect">
-            <a:avLst/>
-          </a:prstGeom>
-          <a:solidFill>
-            <a:srgbClr val="1C2E2E"/>
-          </a:solidFill>
-          <a:ln>
-            <a:noFill/>
-          </a:ln>
-        </p:spPr>
-        <p:style>
-          <a:lnRef idx="1">
-            <a:schemeClr val="accent1"/>
-          </a:lnRef>
-          <a:fillRef idx="3">
-            <a:schemeClr val="accent1"/>
-          </a:fillRef>
-          <a:effectRef idx="2">
-            <a:schemeClr val="accent1"/>
-          </a:effectRef>
-          <a:fontRef idx="minor">
-            <a:schemeClr val="lt1"/>
-          </a:fontRef>
-        </p:style>
-        <p:txBody>
-          <a:bodyPr rtlCol="0" anchor="ctr"/>
-          <a:lstStyle/>
-          <a:p>
-            <a:pPr algn="ctr"/>
-          </a:p>
-        </p:txBody>
-      </p:sp>
-      <p:sp>
-        <p:nvSpPr>
-          <p:cNvPr id="94" name="Rectangle 93"/>
-          <p:cNvSpPr/>
-          <p:nvPr/>
-        </p:nvSpPr>
-        <p:spPr>
-          <a:xfrm>
-            <a:off x="3108960" y="5294376"/>
-            <a:ext cx="2606040" cy="27432"/>
-          </a:xfrm>
-          <a:prstGeom prst="rect">
-            <a:avLst/>
-          </a:prstGeom>
-          <a:solidFill>
-            <a:srgbClr val="3AAEAE"/>
-          </a:solidFill>
-          <a:ln>
-            <a:noFill/>
-          </a:ln>
-        </p:spPr>
-        <p:style>
-          <a:lnRef idx="1">
-            <a:schemeClr val="accent1"/>
-          </a:lnRef>
-          <a:fillRef idx="3">
-            <a:schemeClr val="accent1"/>
-          </a:fillRef>
-          <a:effectRef idx="2">
-            <a:schemeClr val="accent1"/>
-          </a:effectRef>
-          <a:fontRef idx="minor">
-            <a:schemeClr val="lt1"/>
-          </a:fontRef>
-        </p:style>
-        <p:txBody>
-          <a:bodyPr rtlCol="0" anchor="ctr"/>
-          <a:lstStyle/>
-          <a:p>
-            <a:pPr algn="ctr"/>
-          </a:p>
-        </p:txBody>
-      </p:sp>
-      <p:sp>
-        <p:nvSpPr>
-          <p:cNvPr id="95" name="TextBox 94"/>
-          <p:cNvSpPr txBox="1"/>
-          <p:nvPr/>
-        </p:nvSpPr>
-        <p:spPr>
-          <a:xfrm>
-            <a:off x="3200400" y="5330952"/>
-            <a:ext cx="2468879" cy="164592"/>
-          </a:xfrm>
-          <a:prstGeom prst="rect">
-            <a:avLst/>
-          </a:prstGeom>
-          <a:noFill/>
-        </p:spPr>
-        <p:txBody>
-          <a:bodyPr wrap="square">
-            <a:spAutoFit/>
-          </a:bodyPr>
-          <a:lstStyle/>
-          <a:p>
-            <a:pPr algn="l"/>
-            <a:r>
-              <a:rPr sz="800" b="1" i="0">
-                <a:solidFill>
-                  <a:srgbClr val="3AAEAE"/>
-                </a:solidFill>
-              </a:rPr>
-              <a:t>SEO &amp; GROWTH  ★</a:t>
-            </a:r>
-          </a:p>
-        </p:txBody>
-      </p:sp>
-      <p:sp>
-        <p:nvSpPr>
-          <p:cNvPr id="96" name="TextBox 95"/>
-          <p:cNvSpPr txBox="1"/>
-          <p:nvPr/>
-        </p:nvSpPr>
-        <p:spPr>
-          <a:xfrm>
-            <a:off x="3200400" y="5495544"/>
-            <a:ext cx="2468879" cy="164592"/>
-          </a:xfrm>
-          <a:prstGeom prst="rect">
-            <a:avLst/>
-          </a:prstGeom>
-          <a:noFill/>
-        </p:spPr>
-        <p:txBody>
-          <a:bodyPr wrap="square">
-            <a:spAutoFit/>
-          </a:bodyPr>
-          <a:lstStyle/>
-          <a:p>
-            <a:pPr algn="l"/>
-            <a:r>
-              <a:rPr sz="900" b="1" i="0">
-                <a:solidFill>
-                  <a:srgbClr val="FFFFFF"/>
-                </a:solidFill>
-              </a:rPr>
-              <a:t>£650 setup  ·  £100/mo</a:t>
-            </a:r>
-          </a:p>
-        </p:txBody>
-      </p:sp>
-      <p:sp>
-        <p:nvSpPr>
-          <p:cNvPr id="97" name="TextBox 96"/>
-          <p:cNvSpPr txBox="1"/>
-          <p:nvPr/>
-        </p:nvSpPr>
-        <p:spPr>
-          <a:xfrm>
-            <a:off x="3200400" y="5660136"/>
-            <a:ext cx="2468879" cy="146304"/>
-          </a:xfrm>
-          <a:prstGeom prst="rect">
-            <a:avLst/>
-          </a:prstGeom>
-          <a:noFill/>
-        </p:spPr>
-        <p:txBody>
-          <a:bodyPr wrap="square">
-            <a:spAutoFit/>
-          </a:bodyPr>
-          <a:lstStyle/>
-          <a:p>
-            <a:pPr algn="l"/>
-            <a:r>
-              <a:rPr sz="650" b="0" i="0">
-                <a:solidFill>
-                  <a:srgbClr val="AACCCC"/>
-                </a:solidFill>
-              </a:rPr>
-              <a:t>Everything + traffic strategy + ML-backed SEO</a:t>
-            </a:r>
-          </a:p>
-        </p:txBody>
-      </p:sp>
-      <p:sp>
-        <p:nvSpPr>
-          <p:cNvPr id="98" name="Rectangle 97"/>
-          <p:cNvSpPr/>
-          <p:nvPr/>
-        </p:nvSpPr>
-        <p:spPr>
-          <a:xfrm>
-            <a:off x="411480" y="5879592"/>
-            <a:ext cx="5303520" cy="310896"/>
-          </a:xfrm>
-          <a:prstGeom prst="rect">
-            <a:avLst/>
-          </a:prstGeom>
-          <a:solidFill>
-            <a:srgbClr val="152222"/>
-          </a:solidFill>
-          <a:ln>
-            <a:noFill/>
-          </a:ln>
-        </p:spPr>
-        <p:style>
-          <a:lnRef idx="1">
-            <a:schemeClr val="accent1"/>
-          </a:lnRef>
-          <a:fillRef idx="3">
-            <a:schemeClr val="accent1"/>
-          </a:fillRef>
-          <a:effectRef idx="2">
-            <a:schemeClr val="accent1"/>
-          </a:effectRef>
-          <a:fontRef idx="minor">
-            <a:schemeClr val="lt1"/>
-          </a:fontRef>
-        </p:style>
-        <p:txBody>
-          <a:bodyPr rtlCol="0" anchor="ctr"/>
-          <a:lstStyle/>
-          <a:p>
-            <a:pPr algn="ctr"/>
-          </a:p>
-        </p:txBody>
-      </p:sp>
-      <p:sp>
-        <p:nvSpPr>
-          <p:cNvPr id="99" name="TextBox 98"/>
-          <p:cNvSpPr txBox="1"/>
-          <p:nvPr/>
-        </p:nvSpPr>
-        <p:spPr>
-          <a:xfrm>
-            <a:off x="484632" y="5925312"/>
-            <a:ext cx="5157216" cy="237744"/>
-          </a:xfrm>
-          <a:prstGeom prst="rect">
-            <a:avLst/>
-          </a:prstGeom>
-          <a:noFill/>
-        </p:spPr>
-        <p:txBody>
-          <a:bodyPr wrap="square">
-            <a:spAutoFit/>
-          </a:bodyPr>
-          <a:lstStyle/>
-          <a:p>
-            <a:pPr algn="l"/>
-            <a:r>
-              <a:rPr sz="700" b="0" i="1">
-                <a:solidFill>
-                  <a:srgbClr val="FFFFFF"/>
-                </a:solidFill>
-              </a:rPr>
-              <a:t>⚖️  Anchor: "A traditional agency charges £2,000+ for this. We charge £450. You're live tomorrow."</a:t>
-            </a:r>
-          </a:p>
-        </p:txBody>
-      </p:sp>
-      <p:sp>
-        <p:nvSpPr>
-          <p:cNvPr id="100" name="Rectangle 99"/>
-          <p:cNvSpPr/>
-          <p:nvPr/>
-        </p:nvSpPr>
-        <p:spPr>
-          <a:xfrm>
-            <a:off x="0" y="6629400"/>
-            <a:ext cx="12188952" cy="228600"/>
-          </a:xfrm>
-          <a:prstGeom prst="rect">
-            <a:avLst/>
-          </a:prstGeom>
-          <a:solidFill>
-            <a:srgbClr val="1C2E2E"/>
-          </a:solidFill>
-          <a:ln>
-            <a:noFill/>
-          </a:ln>
-        </p:spPr>
-        <p:style>
-          <a:lnRef idx="1">
-            <a:schemeClr val="accent1"/>
-          </a:lnRef>
-          <a:fillRef idx="3">
-            <a:schemeClr val="accent1"/>
-          </a:fillRef>
-          <a:effectRef idx="2">
-            <a:schemeClr val="accent1"/>
-          </a:effectRef>
-          <a:fontRef idx="minor">
-            <a:schemeClr val="lt1"/>
-          </a:fontRef>
-        </p:style>
-        <p:txBody>
-          <a:bodyPr rtlCol="0" anchor="ctr"/>
-          <a:lstStyle/>
-          <a:p>
-            <a:pPr algn="ctr"/>
-          </a:p>
-        </p:txBody>
-      </p:sp>
-      <p:sp>
-        <p:nvSpPr>
-          <p:cNvPr id="101" name="TextBox 100"/>
-          <p:cNvSpPr txBox="1"/>
-          <p:nvPr/>
-        </p:nvSpPr>
-        <p:spPr>
-          <a:xfrm>
-            <a:off x="411480" y="6656832"/>
-            <a:ext cx="11365992" cy="164592"/>
-          </a:xfrm>
-          <a:prstGeom prst="rect">
-            <a:avLst/>
-          </a:prstGeom>
-          <a:noFill/>
-        </p:spPr>
-        <p:txBody>
-          <a:bodyPr wrap="square">
-            <a:spAutoFit/>
-          </a:bodyPr>
-          <a:lstStyle/>
-          <a:p>
-            <a:pPr algn="ctr"/>
-            <a:r>
-              <a:rPr sz="650" b="0" i="0">
-                <a:solidFill>
-                  <a:srgbClr val="2B8E8E"/>
-                </a:solidFill>
-              </a:rPr>
-              <a:t>INTERNAL OPERATIONS  ·  CONFIDENTIAL  ·  NOT FOR DISTRIBUTION  ·  © 2026 VELA SYNC LTD  ·  CO. 17051204</a:t>
             </a:r>
           </a:p>
         </p:txBody>

--- a/VelaSync_Sales_Process_WithLogo.pptx
+++ b/VelaSync_Sales_Process_WithLogo.pptx
@@ -7905,23 +7905,61 @@
       </p:sp>
       <p:sp>
         <p:nvSpPr>
-          <p:cNvPr id="86" name="Rectangle 85"/>
+          <p:cNvPr id="88" name="TextBox 87"/>
+          <p:cNvSpPr txBox="1"/>
+          <p:nvPr/>
+        </p:nvSpPr>
+        <p:spPr>
+          <a:xfrm>
+            <a:off x="10360152" y="320040"/>
+            <a:ext cx="1005840" cy="274320"/>
+          </a:xfrm>
+          <a:prstGeom prst="rect">
+            <a:avLst/>
+          </a:prstGeom>
+          <a:noFill/>
+        </p:spPr>
+        <p:txBody>
+          <a:bodyPr wrap="none">
+            <a:spAutoFit/>
+          </a:bodyPr>
+          <a:lstStyle/>
+          <a:p>
+            <a:pPr algn="r"/>
+            <a:r>
+              <a:rPr b="1" sz="800">
+                <a:solidFill>
+                  <a:srgbClr val="EEF7F7"/>
+                </a:solidFill>
+              </a:rPr>
+              <a:t>VELA SYNC</a:t>
+            </a:r>
+          </a:p>
+        </p:txBody>
+      </p:sp>
+      <p:sp>
+        <p:nvSpPr>
+          <p:cNvPr id="89" name="logo_bg"/>
           <p:cNvSpPr/>
           <p:nvPr/>
         </p:nvSpPr>
         <p:spPr>
           <a:xfrm>
-            <a:off x="11411712" y="228600"/>
-            <a:ext cx="457200" cy="457200"/>
-          </a:xfrm>
-          <a:prstGeom prst="rect">
-            <a:avLst/>
-          </a:prstGeom>
-          <a:solidFill>
-            <a:srgbClr val="2B8E8E"/>
-          </a:solidFill>
-          <a:ln>
-            <a:noFill/>
+            <a:off x="10378440" y="164592"/>
+            <a:ext cx="1600200" cy="438912"/>
+          </a:xfrm>
+          <a:prstGeom prst="roundRect">
+            <a:avLst>
+              <a:gd name="adj" fmla="val 25000"/>
+            </a:avLst>
+          </a:prstGeom>
+          <a:solidFill>
+            <a:srgbClr val="0F1A1A"/>
+          </a:solidFill>
+          <a:ln w="7620">
+            <a:solidFill>
+              <a:srgbClr val="268282"/>
+            </a:solidFill>
           </a:ln>
         </p:spPr>
         <p:style>
@@ -7948,14 +7986,57 @@
       </p:sp>
       <p:sp>
         <p:nvSpPr>
-          <p:cNvPr id="87" name="TextBox 86"/>
-          <p:cNvSpPr txBox="1"/>
-          <p:nvPr/>
-        </p:nvSpPr>
-        <p:spPr>
-          <a:xfrm>
-            <a:off x="11411712" y="228600"/>
-            <a:ext cx="457200" cy="457200"/>
+          <p:cNvPr id="90" name="logo_circle"/>
+          <p:cNvSpPr/>
+          <p:nvPr/>
+        </p:nvSpPr>
+        <p:spPr>
+          <a:xfrm>
+            <a:off x="10397093" y="197510"/>
+            <a:ext cx="373075" cy="373075"/>
+          </a:xfrm>
+          <a:prstGeom prst="ellipse">
+            <a:avLst/>
+          </a:prstGeom>
+          <a:solidFill>
+            <a:srgbClr val="268282"/>
+          </a:solidFill>
+          <a:ln>
+            <a:noFill/>
+          </a:ln>
+        </p:spPr>
+        <p:style>
+          <a:lnRef idx="1">
+            <a:schemeClr val="accent1"/>
+          </a:lnRef>
+          <a:fillRef idx="3">
+            <a:schemeClr val="accent1"/>
+          </a:fillRef>
+          <a:effectRef idx="2">
+            <a:schemeClr val="accent1"/>
+          </a:effectRef>
+          <a:fontRef idx="minor">
+            <a:schemeClr val="lt1"/>
+          </a:fontRef>
+        </p:style>
+        <p:txBody>
+          <a:bodyPr rtlCol="0" anchor="ctr"/>
+          <a:lstStyle/>
+          <a:p>
+            <a:pPr algn="ctr"/>
+          </a:p>
+        </p:txBody>
+      </p:sp>
+      <p:sp>
+        <p:nvSpPr>
+          <p:cNvPr id="91" name="logo_text"/>
+          <p:cNvSpPr txBox="1"/>
+          <p:nvPr/>
+        </p:nvSpPr>
+        <p:spPr>
+          <a:xfrm>
+            <a:off x="10843686" y="201168"/>
+            <a:ext cx="1134953" cy="241401"/>
           </a:xfrm>
           <a:prstGeom prst="rect">
             <a:avLst/>
@@ -7968,48 +8049,84 @@
           </a:bodyPr>
           <a:lstStyle/>
           <a:p>
-            <a:pPr algn="ctr"/>
-            <a:r>
-              <a:rPr b="1" sz="1400">
+            <a:pPr algn="l"/>
+            <a:r>
+              <a:rPr sz="750" b="1">
+                <a:solidFill>
+                  <a:srgbClr val="EEF7F7"/>
+                </a:solidFill>
+                <a:latin typeface="Helvetica Neue"/>
+              </a:rPr>
+              <a:t>VELA SYNC</a:t>
+            </a:r>
+          </a:p>
+        </p:txBody>
+      </p:sp>
+      <p:sp>
+        <p:nvSpPr>
+          <p:cNvPr id="92" name="logo_subtext"/>
+          <p:cNvSpPr txBox="1"/>
+          <p:nvPr/>
+        </p:nvSpPr>
+        <p:spPr>
+          <a:xfrm>
+            <a:off x="10843686" y="405993"/>
+            <a:ext cx="1134953" cy="175564"/>
+          </a:xfrm>
+          <a:prstGeom prst="rect">
+            <a:avLst/>
+          </a:prstGeom>
+          <a:noFill/>
+        </p:spPr>
+        <p:txBody>
+          <a:bodyPr wrap="none">
+            <a:spAutoFit/>
+          </a:bodyPr>
+          <a:lstStyle/>
+          <a:p>
+            <a:pPr algn="l"/>
+            <a:r>
+              <a:rPr sz="500">
+                <a:solidFill>
+                  <a:srgbClr val="3AAEAE"/>
+                </a:solidFill>
+                <a:latin typeface="Helvetica Neue"/>
+              </a:rPr>
+              <a:t>velasync.co.uk</a:t>
+            </a:r>
+          </a:p>
+        </p:txBody>
+      </p:sp>
+      <p:sp>
+        <p:nvSpPr>
+          <p:cNvPr id="94" name="logo_icon"/>
+          <p:cNvSpPr txBox="1"/>
+          <p:nvPr/>
+        </p:nvSpPr>
+        <p:spPr>
+          <a:xfrm>
+            <a:off x="10441862" y="216164"/>
+            <a:ext cx="283537" cy="298460"/>
+          </a:xfrm>
+          <a:prstGeom prst="rect">
+            <a:avLst/>
+          </a:prstGeom>
+          <a:noFill/>
+        </p:spPr>
+        <p:txBody>
+          <a:bodyPr wrap="none">
+            <a:spAutoFit/>
+          </a:bodyPr>
+          <a:lstStyle/>
+          <a:p>
+            <a:pPr algn="ctr"/>
+            <a:r>
+              <a:rPr sz="1527">
                 <a:solidFill>
                   <a:srgbClr val="FFFFFF"/>
                 </a:solidFill>
               </a:rPr>
-              <a:t>VS</a:t>
-            </a:r>
-          </a:p>
-        </p:txBody>
-      </p:sp>
-      <p:sp>
-        <p:nvSpPr>
-          <p:cNvPr id="88" name="TextBox 87"/>
-          <p:cNvSpPr txBox="1"/>
-          <p:nvPr/>
-        </p:nvSpPr>
-        <p:spPr>
-          <a:xfrm>
-            <a:off x="10360152" y="320040"/>
-            <a:ext cx="1005840" cy="274320"/>
-          </a:xfrm>
-          <a:prstGeom prst="rect">
-            <a:avLst/>
-          </a:prstGeom>
-          <a:noFill/>
-        </p:spPr>
-        <p:txBody>
-          <a:bodyPr wrap="none">
-            <a:spAutoFit/>
-          </a:bodyPr>
-          <a:lstStyle/>
-          <a:p>
-            <a:pPr algn="r"/>
-            <a:r>
-              <a:rPr b="1" sz="800">
-                <a:solidFill>
-                  <a:srgbClr val="EEF7F7"/>
-                </a:solidFill>
-              </a:rPr>
-              <a:t>VELA SYNC</a:t>
+              <a:t>⛵</a:t>
             </a:r>
           </a:p>
         </p:txBody>
@@ -9283,6 +9400,200 @@
           </a:p>
         </p:txBody>
       </p:sp>
+      <p:sp>
+        <p:nvSpPr>
+          <p:cNvPr id="34" name="logo_bg"/>
+          <p:cNvSpPr/>
+          <p:nvPr/>
+        </p:nvSpPr>
+        <p:spPr>
+          <a:xfrm>
+            <a:off x="10378440" y="164592"/>
+            <a:ext cx="1600200" cy="438912"/>
+          </a:xfrm>
+          <a:prstGeom prst="roundRect">
+            <a:avLst>
+              <a:gd name="adj" fmla="val 25000"/>
+            </a:avLst>
+          </a:prstGeom>
+          <a:solidFill>
+            <a:srgbClr val="0F1A1A"/>
+          </a:solidFill>
+          <a:ln w="7620">
+            <a:solidFill>
+              <a:srgbClr val="268282"/>
+            </a:solidFill>
+          </a:ln>
+        </p:spPr>
+        <p:style>
+          <a:lnRef idx="1">
+            <a:schemeClr val="accent1"/>
+          </a:lnRef>
+          <a:fillRef idx="3">
+            <a:schemeClr val="accent1"/>
+          </a:fillRef>
+          <a:effectRef idx="2">
+            <a:schemeClr val="accent1"/>
+          </a:effectRef>
+          <a:fontRef idx="minor">
+            <a:schemeClr val="lt1"/>
+          </a:fontRef>
+        </p:style>
+        <p:txBody>
+          <a:bodyPr rtlCol="0" anchor="ctr"/>
+          <a:lstStyle/>
+          <a:p>
+            <a:pPr algn="ctr"/>
+          </a:p>
+        </p:txBody>
+      </p:sp>
+      <p:sp>
+        <p:nvSpPr>
+          <p:cNvPr id="35" name="logo_circle"/>
+          <p:cNvSpPr/>
+          <p:nvPr/>
+        </p:nvSpPr>
+        <p:spPr>
+          <a:xfrm>
+            <a:off x="10397093" y="197510"/>
+            <a:ext cx="373075" cy="373075"/>
+          </a:xfrm>
+          <a:prstGeom prst="ellipse">
+            <a:avLst/>
+          </a:prstGeom>
+          <a:solidFill>
+            <a:srgbClr val="268282"/>
+          </a:solidFill>
+          <a:ln>
+            <a:noFill/>
+          </a:ln>
+        </p:spPr>
+        <p:style>
+          <a:lnRef idx="1">
+            <a:schemeClr val="accent1"/>
+          </a:lnRef>
+          <a:fillRef idx="3">
+            <a:schemeClr val="accent1"/>
+          </a:fillRef>
+          <a:effectRef idx="2">
+            <a:schemeClr val="accent1"/>
+          </a:effectRef>
+          <a:fontRef idx="minor">
+            <a:schemeClr val="lt1"/>
+          </a:fontRef>
+        </p:style>
+        <p:txBody>
+          <a:bodyPr rtlCol="0" anchor="ctr"/>
+          <a:lstStyle/>
+          <a:p>
+            <a:pPr algn="ctr"/>
+          </a:p>
+        </p:txBody>
+      </p:sp>
+      <p:sp>
+        <p:nvSpPr>
+          <p:cNvPr id="36" name="logo_text"/>
+          <p:cNvSpPr txBox="1"/>
+          <p:nvPr/>
+        </p:nvSpPr>
+        <p:spPr>
+          <a:xfrm>
+            <a:off x="10843686" y="201168"/>
+            <a:ext cx="1134953" cy="241401"/>
+          </a:xfrm>
+          <a:prstGeom prst="rect">
+            <a:avLst/>
+          </a:prstGeom>
+          <a:noFill/>
+        </p:spPr>
+        <p:txBody>
+          <a:bodyPr wrap="none">
+            <a:spAutoFit/>
+          </a:bodyPr>
+          <a:lstStyle/>
+          <a:p>
+            <a:pPr algn="l"/>
+            <a:r>
+              <a:rPr sz="750" b="1">
+                <a:solidFill>
+                  <a:srgbClr val="EEF7F7"/>
+                </a:solidFill>
+                <a:latin typeface="Helvetica Neue"/>
+              </a:rPr>
+              <a:t>VELA SYNC</a:t>
+            </a:r>
+          </a:p>
+        </p:txBody>
+      </p:sp>
+      <p:sp>
+        <p:nvSpPr>
+          <p:cNvPr id="37" name="logo_subtext"/>
+          <p:cNvSpPr txBox="1"/>
+          <p:nvPr/>
+        </p:nvSpPr>
+        <p:spPr>
+          <a:xfrm>
+            <a:off x="10843686" y="405993"/>
+            <a:ext cx="1134953" cy="175564"/>
+          </a:xfrm>
+          <a:prstGeom prst="rect">
+            <a:avLst/>
+          </a:prstGeom>
+          <a:noFill/>
+        </p:spPr>
+        <p:txBody>
+          <a:bodyPr wrap="none">
+            <a:spAutoFit/>
+          </a:bodyPr>
+          <a:lstStyle/>
+          <a:p>
+            <a:pPr algn="l"/>
+            <a:r>
+              <a:rPr sz="500">
+                <a:solidFill>
+                  <a:srgbClr val="3AAEAE"/>
+                </a:solidFill>
+                <a:latin typeface="Helvetica Neue"/>
+              </a:rPr>
+              <a:t>velasync.co.uk</a:t>
+            </a:r>
+          </a:p>
+        </p:txBody>
+      </p:sp>
+      <p:sp>
+        <p:nvSpPr>
+          <p:cNvPr id="39" name="logo_icon"/>
+          <p:cNvSpPr txBox="1"/>
+          <p:nvPr/>
+        </p:nvSpPr>
+        <p:spPr>
+          <a:xfrm>
+            <a:off x="10441862" y="216164"/>
+            <a:ext cx="283537" cy="298460"/>
+          </a:xfrm>
+          <a:prstGeom prst="rect">
+            <a:avLst/>
+          </a:prstGeom>
+          <a:noFill/>
+        </p:spPr>
+        <p:txBody>
+          <a:bodyPr wrap="none">
+            <a:spAutoFit/>
+          </a:bodyPr>
+          <a:lstStyle/>
+          <a:p>
+            <a:pPr algn="ctr"/>
+            <a:r>
+              <a:rPr sz="1527">
+                <a:solidFill>
+                  <a:srgbClr val="FFFFFF"/>
+                </a:solidFill>
+              </a:rPr>
+              <a:t>⛵</a:t>
+            </a:r>
+          </a:p>
+        </p:txBody>
+      </p:sp>
     </p:spTree>
   </p:cSld>
   <p:clrMapOvr>
@@ -12197,23 +12508,61 @@
       </p:sp>
       <p:sp>
         <p:nvSpPr>
-          <p:cNvPr id="79" name="Rectangle 78"/>
+          <p:cNvPr id="81" name="TextBox 80"/>
+          <p:cNvSpPr txBox="1"/>
+          <p:nvPr/>
+        </p:nvSpPr>
+        <p:spPr>
+          <a:xfrm>
+            <a:off x="10360152" y="320040"/>
+            <a:ext cx="1005840" cy="274320"/>
+          </a:xfrm>
+          <a:prstGeom prst="rect">
+            <a:avLst/>
+          </a:prstGeom>
+          <a:noFill/>
+        </p:spPr>
+        <p:txBody>
+          <a:bodyPr wrap="none">
+            <a:spAutoFit/>
+          </a:bodyPr>
+          <a:lstStyle/>
+          <a:p>
+            <a:pPr algn="r"/>
+            <a:r>
+              <a:rPr b="1" sz="800">
+                <a:solidFill>
+                  <a:srgbClr val="EEF7F7"/>
+                </a:solidFill>
+              </a:rPr>
+              <a:t>VELA SYNC</a:t>
+            </a:r>
+          </a:p>
+        </p:txBody>
+      </p:sp>
+      <p:sp>
+        <p:nvSpPr>
+          <p:cNvPr id="82" name="logo_bg"/>
           <p:cNvSpPr/>
           <p:nvPr/>
         </p:nvSpPr>
         <p:spPr>
           <a:xfrm>
-            <a:off x="11411712" y="228600"/>
-            <a:ext cx="457200" cy="457200"/>
-          </a:xfrm>
-          <a:prstGeom prst="rect">
-            <a:avLst/>
-          </a:prstGeom>
-          <a:solidFill>
-            <a:srgbClr val="2B8E8E"/>
-          </a:solidFill>
-          <a:ln>
-            <a:noFill/>
+            <a:off x="10378440" y="164592"/>
+            <a:ext cx="1600200" cy="438912"/>
+          </a:xfrm>
+          <a:prstGeom prst="roundRect">
+            <a:avLst>
+              <a:gd name="adj" fmla="val 25000"/>
+            </a:avLst>
+          </a:prstGeom>
+          <a:solidFill>
+            <a:srgbClr val="0F1A1A"/>
+          </a:solidFill>
+          <a:ln w="7620">
+            <a:solidFill>
+              <a:srgbClr val="268282"/>
+            </a:solidFill>
           </a:ln>
         </p:spPr>
         <p:style>
@@ -12240,14 +12589,57 @@
       </p:sp>
       <p:sp>
         <p:nvSpPr>
-          <p:cNvPr id="80" name="TextBox 79"/>
-          <p:cNvSpPr txBox="1"/>
-          <p:nvPr/>
-        </p:nvSpPr>
-        <p:spPr>
-          <a:xfrm>
-            <a:off x="11411712" y="228600"/>
-            <a:ext cx="457200" cy="457200"/>
+          <p:cNvPr id="83" name="logo_circle"/>
+          <p:cNvSpPr/>
+          <p:nvPr/>
+        </p:nvSpPr>
+        <p:spPr>
+          <a:xfrm>
+            <a:off x="10397093" y="197510"/>
+            <a:ext cx="373075" cy="373075"/>
+          </a:xfrm>
+          <a:prstGeom prst="ellipse">
+            <a:avLst/>
+          </a:prstGeom>
+          <a:solidFill>
+            <a:srgbClr val="268282"/>
+          </a:solidFill>
+          <a:ln>
+            <a:noFill/>
+          </a:ln>
+        </p:spPr>
+        <p:style>
+          <a:lnRef idx="1">
+            <a:schemeClr val="accent1"/>
+          </a:lnRef>
+          <a:fillRef idx="3">
+            <a:schemeClr val="accent1"/>
+          </a:fillRef>
+          <a:effectRef idx="2">
+            <a:schemeClr val="accent1"/>
+          </a:effectRef>
+          <a:fontRef idx="minor">
+            <a:schemeClr val="lt1"/>
+          </a:fontRef>
+        </p:style>
+        <p:txBody>
+          <a:bodyPr rtlCol="0" anchor="ctr"/>
+          <a:lstStyle/>
+          <a:p>
+            <a:pPr algn="ctr"/>
+          </a:p>
+        </p:txBody>
+      </p:sp>
+      <p:sp>
+        <p:nvSpPr>
+          <p:cNvPr id="84" name="logo_text"/>
+          <p:cNvSpPr txBox="1"/>
+          <p:nvPr/>
+        </p:nvSpPr>
+        <p:spPr>
+          <a:xfrm>
+            <a:off x="10843686" y="201168"/>
+            <a:ext cx="1134953" cy="241401"/>
           </a:xfrm>
           <a:prstGeom prst="rect">
             <a:avLst/>
@@ -12260,48 +12652,84 @@
           </a:bodyPr>
           <a:lstStyle/>
           <a:p>
-            <a:pPr algn="ctr"/>
-            <a:r>
-              <a:rPr b="1" sz="1400">
+            <a:pPr algn="l"/>
+            <a:r>
+              <a:rPr sz="750" b="1">
+                <a:solidFill>
+                  <a:srgbClr val="EEF7F7"/>
+                </a:solidFill>
+                <a:latin typeface="Helvetica Neue"/>
+              </a:rPr>
+              <a:t>VELA SYNC</a:t>
+            </a:r>
+          </a:p>
+        </p:txBody>
+      </p:sp>
+      <p:sp>
+        <p:nvSpPr>
+          <p:cNvPr id="85" name="logo_subtext"/>
+          <p:cNvSpPr txBox="1"/>
+          <p:nvPr/>
+        </p:nvSpPr>
+        <p:spPr>
+          <a:xfrm>
+            <a:off x="10843686" y="405993"/>
+            <a:ext cx="1134953" cy="175564"/>
+          </a:xfrm>
+          <a:prstGeom prst="rect">
+            <a:avLst/>
+          </a:prstGeom>
+          <a:noFill/>
+        </p:spPr>
+        <p:txBody>
+          <a:bodyPr wrap="none">
+            <a:spAutoFit/>
+          </a:bodyPr>
+          <a:lstStyle/>
+          <a:p>
+            <a:pPr algn="l"/>
+            <a:r>
+              <a:rPr sz="500">
+                <a:solidFill>
+                  <a:srgbClr val="3AAEAE"/>
+                </a:solidFill>
+                <a:latin typeface="Helvetica Neue"/>
+              </a:rPr>
+              <a:t>velasync.co.uk</a:t>
+            </a:r>
+          </a:p>
+        </p:txBody>
+      </p:sp>
+      <p:sp>
+        <p:nvSpPr>
+          <p:cNvPr id="87" name="logo_icon"/>
+          <p:cNvSpPr txBox="1"/>
+          <p:nvPr/>
+        </p:nvSpPr>
+        <p:spPr>
+          <a:xfrm>
+            <a:off x="10441862" y="216164"/>
+            <a:ext cx="283537" cy="298460"/>
+          </a:xfrm>
+          <a:prstGeom prst="rect">
+            <a:avLst/>
+          </a:prstGeom>
+          <a:noFill/>
+        </p:spPr>
+        <p:txBody>
+          <a:bodyPr wrap="none">
+            <a:spAutoFit/>
+          </a:bodyPr>
+          <a:lstStyle/>
+          <a:p>
+            <a:pPr algn="ctr"/>
+            <a:r>
+              <a:rPr sz="1527">
                 <a:solidFill>
                   <a:srgbClr val="FFFFFF"/>
                 </a:solidFill>
               </a:rPr>
-              <a:t>VS</a:t>
-            </a:r>
-          </a:p>
-        </p:txBody>
-      </p:sp>
-      <p:sp>
-        <p:nvSpPr>
-          <p:cNvPr id="81" name="TextBox 80"/>
-          <p:cNvSpPr txBox="1"/>
-          <p:nvPr/>
-        </p:nvSpPr>
-        <p:spPr>
-          <a:xfrm>
-            <a:off x="10360152" y="320040"/>
-            <a:ext cx="1005840" cy="274320"/>
-          </a:xfrm>
-          <a:prstGeom prst="rect">
-            <a:avLst/>
-          </a:prstGeom>
-          <a:noFill/>
-        </p:spPr>
-        <p:txBody>
-          <a:bodyPr wrap="none">
-            <a:spAutoFit/>
-          </a:bodyPr>
-          <a:lstStyle/>
-          <a:p>
-            <a:pPr algn="r"/>
-            <a:r>
-              <a:rPr b="1" sz="800">
-                <a:solidFill>
-                  <a:srgbClr val="EEF7F7"/>
-                </a:solidFill>
-              </a:rPr>
-              <a:t>VELA SYNC</a:t>
+              <a:t>⛵</a:t>
             </a:r>
           </a:p>
         </p:txBody>
@@ -14347,23 +14775,61 @@
       </p:sp>
       <p:sp>
         <p:nvSpPr>
-          <p:cNvPr id="55" name="Rectangle 54"/>
+          <p:cNvPr id="57" name="TextBox 56"/>
+          <p:cNvSpPr txBox="1"/>
+          <p:nvPr/>
+        </p:nvSpPr>
+        <p:spPr>
+          <a:xfrm>
+            <a:off x="10360152" y="320040"/>
+            <a:ext cx="1005840" cy="274320"/>
+          </a:xfrm>
+          <a:prstGeom prst="rect">
+            <a:avLst/>
+          </a:prstGeom>
+          <a:noFill/>
+        </p:spPr>
+        <p:txBody>
+          <a:bodyPr wrap="none">
+            <a:spAutoFit/>
+          </a:bodyPr>
+          <a:lstStyle/>
+          <a:p>
+            <a:pPr algn="r"/>
+            <a:r>
+              <a:rPr b="1" sz="800">
+                <a:solidFill>
+                  <a:srgbClr val="EEF7F7"/>
+                </a:solidFill>
+              </a:rPr>
+              <a:t>VELA SYNC</a:t>
+            </a:r>
+          </a:p>
+        </p:txBody>
+      </p:sp>
+      <p:sp>
+        <p:nvSpPr>
+          <p:cNvPr id="58" name="logo_bg"/>
           <p:cNvSpPr/>
           <p:nvPr/>
         </p:nvSpPr>
         <p:spPr>
           <a:xfrm>
-            <a:off x="11411712" y="228600"/>
-            <a:ext cx="457200" cy="457200"/>
-          </a:xfrm>
-          <a:prstGeom prst="rect">
-            <a:avLst/>
-          </a:prstGeom>
-          <a:solidFill>
-            <a:srgbClr val="2B8E8E"/>
-          </a:solidFill>
-          <a:ln>
-            <a:noFill/>
+            <a:off x="10378440" y="164592"/>
+            <a:ext cx="1600200" cy="438912"/>
+          </a:xfrm>
+          <a:prstGeom prst="roundRect">
+            <a:avLst>
+              <a:gd name="adj" fmla="val 25000"/>
+            </a:avLst>
+          </a:prstGeom>
+          <a:solidFill>
+            <a:srgbClr val="0F1A1A"/>
+          </a:solidFill>
+          <a:ln w="7620">
+            <a:solidFill>
+              <a:srgbClr val="268282"/>
+            </a:solidFill>
           </a:ln>
         </p:spPr>
         <p:style>
@@ -14390,14 +14856,57 @@
       </p:sp>
       <p:sp>
         <p:nvSpPr>
-          <p:cNvPr id="56" name="TextBox 55"/>
-          <p:cNvSpPr txBox="1"/>
-          <p:nvPr/>
-        </p:nvSpPr>
-        <p:spPr>
-          <a:xfrm>
-            <a:off x="11411712" y="228600"/>
-            <a:ext cx="457200" cy="457200"/>
+          <p:cNvPr id="59" name="logo_circle"/>
+          <p:cNvSpPr/>
+          <p:nvPr/>
+        </p:nvSpPr>
+        <p:spPr>
+          <a:xfrm>
+            <a:off x="10397093" y="197510"/>
+            <a:ext cx="373075" cy="373075"/>
+          </a:xfrm>
+          <a:prstGeom prst="ellipse">
+            <a:avLst/>
+          </a:prstGeom>
+          <a:solidFill>
+            <a:srgbClr val="268282"/>
+          </a:solidFill>
+          <a:ln>
+            <a:noFill/>
+          </a:ln>
+        </p:spPr>
+        <p:style>
+          <a:lnRef idx="1">
+            <a:schemeClr val="accent1"/>
+          </a:lnRef>
+          <a:fillRef idx="3">
+            <a:schemeClr val="accent1"/>
+          </a:fillRef>
+          <a:effectRef idx="2">
+            <a:schemeClr val="accent1"/>
+          </a:effectRef>
+          <a:fontRef idx="minor">
+            <a:schemeClr val="lt1"/>
+          </a:fontRef>
+        </p:style>
+        <p:txBody>
+          <a:bodyPr rtlCol="0" anchor="ctr"/>
+          <a:lstStyle/>
+          <a:p>
+            <a:pPr algn="ctr"/>
+          </a:p>
+        </p:txBody>
+      </p:sp>
+      <p:sp>
+        <p:nvSpPr>
+          <p:cNvPr id="60" name="logo_text"/>
+          <p:cNvSpPr txBox="1"/>
+          <p:nvPr/>
+        </p:nvSpPr>
+        <p:spPr>
+          <a:xfrm>
+            <a:off x="10843686" y="201168"/>
+            <a:ext cx="1134953" cy="241401"/>
           </a:xfrm>
           <a:prstGeom prst="rect">
             <a:avLst/>
@@ -14410,48 +14919,84 @@
           </a:bodyPr>
           <a:lstStyle/>
           <a:p>
-            <a:pPr algn="ctr"/>
-            <a:r>
-              <a:rPr b="1" sz="1400">
+            <a:pPr algn="l"/>
+            <a:r>
+              <a:rPr sz="750" b="1">
+                <a:solidFill>
+                  <a:srgbClr val="EEF7F7"/>
+                </a:solidFill>
+                <a:latin typeface="Helvetica Neue"/>
+              </a:rPr>
+              <a:t>VELA SYNC</a:t>
+            </a:r>
+          </a:p>
+        </p:txBody>
+      </p:sp>
+      <p:sp>
+        <p:nvSpPr>
+          <p:cNvPr id="61" name="logo_subtext"/>
+          <p:cNvSpPr txBox="1"/>
+          <p:nvPr/>
+        </p:nvSpPr>
+        <p:spPr>
+          <a:xfrm>
+            <a:off x="10843686" y="405993"/>
+            <a:ext cx="1134953" cy="175564"/>
+          </a:xfrm>
+          <a:prstGeom prst="rect">
+            <a:avLst/>
+          </a:prstGeom>
+          <a:noFill/>
+        </p:spPr>
+        <p:txBody>
+          <a:bodyPr wrap="none">
+            <a:spAutoFit/>
+          </a:bodyPr>
+          <a:lstStyle/>
+          <a:p>
+            <a:pPr algn="l"/>
+            <a:r>
+              <a:rPr sz="500">
+                <a:solidFill>
+                  <a:srgbClr val="3AAEAE"/>
+                </a:solidFill>
+                <a:latin typeface="Helvetica Neue"/>
+              </a:rPr>
+              <a:t>velasync.co.uk</a:t>
+            </a:r>
+          </a:p>
+        </p:txBody>
+      </p:sp>
+      <p:sp>
+        <p:nvSpPr>
+          <p:cNvPr id="63" name="logo_icon"/>
+          <p:cNvSpPr txBox="1"/>
+          <p:nvPr/>
+        </p:nvSpPr>
+        <p:spPr>
+          <a:xfrm>
+            <a:off x="10441862" y="216164"/>
+            <a:ext cx="283537" cy="298460"/>
+          </a:xfrm>
+          <a:prstGeom prst="rect">
+            <a:avLst/>
+          </a:prstGeom>
+          <a:noFill/>
+        </p:spPr>
+        <p:txBody>
+          <a:bodyPr wrap="none">
+            <a:spAutoFit/>
+          </a:bodyPr>
+          <a:lstStyle/>
+          <a:p>
+            <a:pPr algn="ctr"/>
+            <a:r>
+              <a:rPr sz="1527">
                 <a:solidFill>
                   <a:srgbClr val="FFFFFF"/>
                 </a:solidFill>
               </a:rPr>
-              <a:t>VS</a:t>
-            </a:r>
-          </a:p>
-        </p:txBody>
-      </p:sp>
-      <p:sp>
-        <p:nvSpPr>
-          <p:cNvPr id="57" name="TextBox 56"/>
-          <p:cNvSpPr txBox="1"/>
-          <p:nvPr/>
-        </p:nvSpPr>
-        <p:spPr>
-          <a:xfrm>
-            <a:off x="10360152" y="320040"/>
-            <a:ext cx="1005840" cy="274320"/>
-          </a:xfrm>
-          <a:prstGeom prst="rect">
-            <a:avLst/>
-          </a:prstGeom>
-          <a:noFill/>
-        </p:spPr>
-        <p:txBody>
-          <a:bodyPr wrap="none">
-            <a:spAutoFit/>
-          </a:bodyPr>
-          <a:lstStyle/>
-          <a:p>
-            <a:pPr algn="r"/>
-            <a:r>
-              <a:rPr b="1" sz="800">
-                <a:solidFill>
-                  <a:srgbClr val="EEF7F7"/>
-                </a:solidFill>
-              </a:rPr>
-              <a:t>VELA SYNC</a:t>
+              <a:t>⛵</a:t>
             </a:r>
           </a:p>
         </p:txBody>
@@ -18043,23 +18588,61 @@
       </p:sp>
       <p:sp>
         <p:nvSpPr>
-          <p:cNvPr id="97" name="Rectangle 96"/>
+          <p:cNvPr id="99" name="TextBox 98"/>
+          <p:cNvSpPr txBox="1"/>
+          <p:nvPr/>
+        </p:nvSpPr>
+        <p:spPr>
+          <a:xfrm>
+            <a:off x="10360152" y="320040"/>
+            <a:ext cx="1005840" cy="274320"/>
+          </a:xfrm>
+          <a:prstGeom prst="rect">
+            <a:avLst/>
+          </a:prstGeom>
+          <a:noFill/>
+        </p:spPr>
+        <p:txBody>
+          <a:bodyPr wrap="none">
+            <a:spAutoFit/>
+          </a:bodyPr>
+          <a:lstStyle/>
+          <a:p>
+            <a:pPr algn="r"/>
+            <a:r>
+              <a:rPr b="1" sz="800">
+                <a:solidFill>
+                  <a:srgbClr val="EEF7F7"/>
+                </a:solidFill>
+              </a:rPr>
+              <a:t>VELA SYNC</a:t>
+            </a:r>
+          </a:p>
+        </p:txBody>
+      </p:sp>
+      <p:sp>
+        <p:nvSpPr>
+          <p:cNvPr id="100" name="logo_bg"/>
           <p:cNvSpPr/>
           <p:nvPr/>
         </p:nvSpPr>
         <p:spPr>
           <a:xfrm>
-            <a:off x="11411712" y="228600"/>
-            <a:ext cx="457200" cy="457200"/>
-          </a:xfrm>
-          <a:prstGeom prst="rect">
-            <a:avLst/>
-          </a:prstGeom>
-          <a:solidFill>
-            <a:srgbClr val="2B8E8E"/>
-          </a:solidFill>
-          <a:ln>
-            <a:noFill/>
+            <a:off x="10378440" y="164592"/>
+            <a:ext cx="1600200" cy="438912"/>
+          </a:xfrm>
+          <a:prstGeom prst="roundRect">
+            <a:avLst>
+              <a:gd name="adj" fmla="val 25000"/>
+            </a:avLst>
+          </a:prstGeom>
+          <a:solidFill>
+            <a:srgbClr val="0F1A1A"/>
+          </a:solidFill>
+          <a:ln w="7620">
+            <a:solidFill>
+              <a:srgbClr val="268282"/>
+            </a:solidFill>
           </a:ln>
         </p:spPr>
         <p:style>
@@ -18086,14 +18669,57 @@
       </p:sp>
       <p:sp>
         <p:nvSpPr>
-          <p:cNvPr id="98" name="TextBox 97"/>
-          <p:cNvSpPr txBox="1"/>
-          <p:nvPr/>
-        </p:nvSpPr>
-        <p:spPr>
-          <a:xfrm>
-            <a:off x="11411712" y="228600"/>
-            <a:ext cx="457200" cy="457200"/>
+          <p:cNvPr id="101" name="logo_circle"/>
+          <p:cNvSpPr/>
+          <p:nvPr/>
+        </p:nvSpPr>
+        <p:spPr>
+          <a:xfrm>
+            <a:off x="10397093" y="197510"/>
+            <a:ext cx="373075" cy="373075"/>
+          </a:xfrm>
+          <a:prstGeom prst="ellipse">
+            <a:avLst/>
+          </a:prstGeom>
+          <a:solidFill>
+            <a:srgbClr val="268282"/>
+          </a:solidFill>
+          <a:ln>
+            <a:noFill/>
+          </a:ln>
+        </p:spPr>
+        <p:style>
+          <a:lnRef idx="1">
+            <a:schemeClr val="accent1"/>
+          </a:lnRef>
+          <a:fillRef idx="3">
+            <a:schemeClr val="accent1"/>
+          </a:fillRef>
+          <a:effectRef idx="2">
+            <a:schemeClr val="accent1"/>
+          </a:effectRef>
+          <a:fontRef idx="minor">
+            <a:schemeClr val="lt1"/>
+          </a:fontRef>
+        </p:style>
+        <p:txBody>
+          <a:bodyPr rtlCol="0" anchor="ctr"/>
+          <a:lstStyle/>
+          <a:p>
+            <a:pPr algn="ctr"/>
+          </a:p>
+        </p:txBody>
+      </p:sp>
+      <p:sp>
+        <p:nvSpPr>
+          <p:cNvPr id="102" name="logo_text"/>
+          <p:cNvSpPr txBox="1"/>
+          <p:nvPr/>
+        </p:nvSpPr>
+        <p:spPr>
+          <a:xfrm>
+            <a:off x="10843686" y="201168"/>
+            <a:ext cx="1134953" cy="241401"/>
           </a:xfrm>
           <a:prstGeom prst="rect">
             <a:avLst/>
@@ -18106,48 +18732,84 @@
           </a:bodyPr>
           <a:lstStyle/>
           <a:p>
-            <a:pPr algn="ctr"/>
-            <a:r>
-              <a:rPr b="1" sz="1400">
+            <a:pPr algn="l"/>
+            <a:r>
+              <a:rPr sz="750" b="1">
+                <a:solidFill>
+                  <a:srgbClr val="EEF7F7"/>
+                </a:solidFill>
+                <a:latin typeface="Helvetica Neue"/>
+              </a:rPr>
+              <a:t>VELA SYNC</a:t>
+            </a:r>
+          </a:p>
+        </p:txBody>
+      </p:sp>
+      <p:sp>
+        <p:nvSpPr>
+          <p:cNvPr id="103" name="logo_subtext"/>
+          <p:cNvSpPr txBox="1"/>
+          <p:nvPr/>
+        </p:nvSpPr>
+        <p:spPr>
+          <a:xfrm>
+            <a:off x="10843686" y="405993"/>
+            <a:ext cx="1134953" cy="175564"/>
+          </a:xfrm>
+          <a:prstGeom prst="rect">
+            <a:avLst/>
+          </a:prstGeom>
+          <a:noFill/>
+        </p:spPr>
+        <p:txBody>
+          <a:bodyPr wrap="none">
+            <a:spAutoFit/>
+          </a:bodyPr>
+          <a:lstStyle/>
+          <a:p>
+            <a:pPr algn="l"/>
+            <a:r>
+              <a:rPr sz="500">
+                <a:solidFill>
+                  <a:srgbClr val="3AAEAE"/>
+                </a:solidFill>
+                <a:latin typeface="Helvetica Neue"/>
+              </a:rPr>
+              <a:t>velasync.co.uk</a:t>
+            </a:r>
+          </a:p>
+        </p:txBody>
+      </p:sp>
+      <p:sp>
+        <p:nvSpPr>
+          <p:cNvPr id="105" name="logo_icon"/>
+          <p:cNvSpPr txBox="1"/>
+          <p:nvPr/>
+        </p:nvSpPr>
+        <p:spPr>
+          <a:xfrm>
+            <a:off x="10441862" y="216164"/>
+            <a:ext cx="283537" cy="298460"/>
+          </a:xfrm>
+          <a:prstGeom prst="rect">
+            <a:avLst/>
+          </a:prstGeom>
+          <a:noFill/>
+        </p:spPr>
+        <p:txBody>
+          <a:bodyPr wrap="none">
+            <a:spAutoFit/>
+          </a:bodyPr>
+          <a:lstStyle/>
+          <a:p>
+            <a:pPr algn="ctr"/>
+            <a:r>
+              <a:rPr sz="1527">
                 <a:solidFill>
                   <a:srgbClr val="FFFFFF"/>
                 </a:solidFill>
               </a:rPr>
-              <a:t>VS</a:t>
-            </a:r>
-          </a:p>
-        </p:txBody>
-      </p:sp>
-      <p:sp>
-        <p:nvSpPr>
-          <p:cNvPr id="99" name="TextBox 98"/>
-          <p:cNvSpPr txBox="1"/>
-          <p:nvPr/>
-        </p:nvSpPr>
-        <p:spPr>
-          <a:xfrm>
-            <a:off x="10360152" y="320040"/>
-            <a:ext cx="1005840" cy="274320"/>
-          </a:xfrm>
-          <a:prstGeom prst="rect">
-            <a:avLst/>
-          </a:prstGeom>
-          <a:noFill/>
-        </p:spPr>
-        <p:txBody>
-          <a:bodyPr wrap="none">
-            <a:spAutoFit/>
-          </a:bodyPr>
-          <a:lstStyle/>
-          <a:p>
-            <a:pPr algn="r"/>
-            <a:r>
-              <a:rPr b="1" sz="800">
-                <a:solidFill>
-                  <a:srgbClr val="EEF7F7"/>
-                </a:solidFill>
-              </a:rPr>
-              <a:t>VELA SYNC</a:t>
+              <a:t>⛵</a:t>
             </a:r>
           </a:p>
         </p:txBody>
@@ -19960,23 +20622,61 @@
       </p:sp>
       <p:sp>
         <p:nvSpPr>
-          <p:cNvPr id="48" name="Rectangle 47"/>
+          <p:cNvPr id="50" name="TextBox 49"/>
+          <p:cNvSpPr txBox="1"/>
+          <p:nvPr/>
+        </p:nvSpPr>
+        <p:spPr>
+          <a:xfrm>
+            <a:off x="10360152" y="320040"/>
+            <a:ext cx="1005840" cy="274320"/>
+          </a:xfrm>
+          <a:prstGeom prst="rect">
+            <a:avLst/>
+          </a:prstGeom>
+          <a:noFill/>
+        </p:spPr>
+        <p:txBody>
+          <a:bodyPr wrap="none">
+            <a:spAutoFit/>
+          </a:bodyPr>
+          <a:lstStyle/>
+          <a:p>
+            <a:pPr algn="r"/>
+            <a:r>
+              <a:rPr b="1" sz="800">
+                <a:solidFill>
+                  <a:srgbClr val="EEF7F7"/>
+                </a:solidFill>
+              </a:rPr>
+              <a:t>VELA SYNC</a:t>
+            </a:r>
+          </a:p>
+        </p:txBody>
+      </p:sp>
+      <p:sp>
+        <p:nvSpPr>
+          <p:cNvPr id="51" name="logo_bg"/>
           <p:cNvSpPr/>
           <p:nvPr/>
         </p:nvSpPr>
         <p:spPr>
           <a:xfrm>
-            <a:off x="11411712" y="228600"/>
-            <a:ext cx="457200" cy="457200"/>
-          </a:xfrm>
-          <a:prstGeom prst="rect">
-            <a:avLst/>
-          </a:prstGeom>
-          <a:solidFill>
-            <a:srgbClr val="2B8E8E"/>
-          </a:solidFill>
-          <a:ln>
-            <a:noFill/>
+            <a:off x="10378440" y="164592"/>
+            <a:ext cx="1600200" cy="438912"/>
+          </a:xfrm>
+          <a:prstGeom prst="roundRect">
+            <a:avLst>
+              <a:gd name="adj" fmla="val 25000"/>
+            </a:avLst>
+          </a:prstGeom>
+          <a:solidFill>
+            <a:srgbClr val="0F1A1A"/>
+          </a:solidFill>
+          <a:ln w="7620">
+            <a:solidFill>
+              <a:srgbClr val="268282"/>
+            </a:solidFill>
           </a:ln>
         </p:spPr>
         <p:style>
@@ -20003,14 +20703,57 @@
       </p:sp>
       <p:sp>
         <p:nvSpPr>
-          <p:cNvPr id="49" name="TextBox 48"/>
-          <p:cNvSpPr txBox="1"/>
-          <p:nvPr/>
-        </p:nvSpPr>
-        <p:spPr>
-          <a:xfrm>
-            <a:off x="11411712" y="228600"/>
-            <a:ext cx="457200" cy="457200"/>
+          <p:cNvPr id="52" name="logo_circle"/>
+          <p:cNvSpPr/>
+          <p:nvPr/>
+        </p:nvSpPr>
+        <p:spPr>
+          <a:xfrm>
+            <a:off x="10397093" y="197510"/>
+            <a:ext cx="373075" cy="373075"/>
+          </a:xfrm>
+          <a:prstGeom prst="ellipse">
+            <a:avLst/>
+          </a:prstGeom>
+          <a:solidFill>
+            <a:srgbClr val="268282"/>
+          </a:solidFill>
+          <a:ln>
+            <a:noFill/>
+          </a:ln>
+        </p:spPr>
+        <p:style>
+          <a:lnRef idx="1">
+            <a:schemeClr val="accent1"/>
+          </a:lnRef>
+          <a:fillRef idx="3">
+            <a:schemeClr val="accent1"/>
+          </a:fillRef>
+          <a:effectRef idx="2">
+            <a:schemeClr val="accent1"/>
+          </a:effectRef>
+          <a:fontRef idx="minor">
+            <a:schemeClr val="lt1"/>
+          </a:fontRef>
+        </p:style>
+        <p:txBody>
+          <a:bodyPr rtlCol="0" anchor="ctr"/>
+          <a:lstStyle/>
+          <a:p>
+            <a:pPr algn="ctr"/>
+          </a:p>
+        </p:txBody>
+      </p:sp>
+      <p:sp>
+        <p:nvSpPr>
+          <p:cNvPr id="53" name="logo_text"/>
+          <p:cNvSpPr txBox="1"/>
+          <p:nvPr/>
+        </p:nvSpPr>
+        <p:spPr>
+          <a:xfrm>
+            <a:off x="10843686" y="201168"/>
+            <a:ext cx="1134953" cy="241401"/>
           </a:xfrm>
           <a:prstGeom prst="rect">
             <a:avLst/>
@@ -20023,48 +20766,84 @@
           </a:bodyPr>
           <a:lstStyle/>
           <a:p>
-            <a:pPr algn="ctr"/>
-            <a:r>
-              <a:rPr b="1" sz="1400">
+            <a:pPr algn="l"/>
+            <a:r>
+              <a:rPr sz="750" b="1">
+                <a:solidFill>
+                  <a:srgbClr val="EEF7F7"/>
+                </a:solidFill>
+                <a:latin typeface="Helvetica Neue"/>
+              </a:rPr>
+              <a:t>VELA SYNC</a:t>
+            </a:r>
+          </a:p>
+        </p:txBody>
+      </p:sp>
+      <p:sp>
+        <p:nvSpPr>
+          <p:cNvPr id="54" name="logo_subtext"/>
+          <p:cNvSpPr txBox="1"/>
+          <p:nvPr/>
+        </p:nvSpPr>
+        <p:spPr>
+          <a:xfrm>
+            <a:off x="10843686" y="405993"/>
+            <a:ext cx="1134953" cy="175564"/>
+          </a:xfrm>
+          <a:prstGeom prst="rect">
+            <a:avLst/>
+          </a:prstGeom>
+          <a:noFill/>
+        </p:spPr>
+        <p:txBody>
+          <a:bodyPr wrap="none">
+            <a:spAutoFit/>
+          </a:bodyPr>
+          <a:lstStyle/>
+          <a:p>
+            <a:pPr algn="l"/>
+            <a:r>
+              <a:rPr sz="500">
+                <a:solidFill>
+                  <a:srgbClr val="3AAEAE"/>
+                </a:solidFill>
+                <a:latin typeface="Helvetica Neue"/>
+              </a:rPr>
+              <a:t>velasync.co.uk</a:t>
+            </a:r>
+          </a:p>
+        </p:txBody>
+      </p:sp>
+      <p:sp>
+        <p:nvSpPr>
+          <p:cNvPr id="56" name="logo_icon"/>
+          <p:cNvSpPr txBox="1"/>
+          <p:nvPr/>
+        </p:nvSpPr>
+        <p:spPr>
+          <a:xfrm>
+            <a:off x="10441862" y="216164"/>
+            <a:ext cx="283537" cy="298460"/>
+          </a:xfrm>
+          <a:prstGeom prst="rect">
+            <a:avLst/>
+          </a:prstGeom>
+          <a:noFill/>
+        </p:spPr>
+        <p:txBody>
+          <a:bodyPr wrap="none">
+            <a:spAutoFit/>
+          </a:bodyPr>
+          <a:lstStyle/>
+          <a:p>
+            <a:pPr algn="ctr"/>
+            <a:r>
+              <a:rPr sz="1527">
                 <a:solidFill>
                   <a:srgbClr val="FFFFFF"/>
                 </a:solidFill>
               </a:rPr>
-              <a:t>VS</a:t>
-            </a:r>
-          </a:p>
-        </p:txBody>
-      </p:sp>
-      <p:sp>
-        <p:nvSpPr>
-          <p:cNvPr id="50" name="TextBox 49"/>
-          <p:cNvSpPr txBox="1"/>
-          <p:nvPr/>
-        </p:nvSpPr>
-        <p:spPr>
-          <a:xfrm>
-            <a:off x="10360152" y="320040"/>
-            <a:ext cx="1005840" cy="274320"/>
-          </a:xfrm>
-          <a:prstGeom prst="rect">
-            <a:avLst/>
-          </a:prstGeom>
-          <a:noFill/>
-        </p:spPr>
-        <p:txBody>
-          <a:bodyPr wrap="none">
-            <a:spAutoFit/>
-          </a:bodyPr>
-          <a:lstStyle/>
-          <a:p>
-            <a:pPr algn="r"/>
-            <a:r>
-              <a:rPr b="1" sz="800">
-                <a:solidFill>
-                  <a:srgbClr val="EEF7F7"/>
-                </a:solidFill>
-              </a:rPr>
-              <a:t>VELA SYNC</a:t>
+              <a:t>⛵</a:t>
             </a:r>
           </a:p>
         </p:txBody>
@@ -21827,23 +22606,61 @@
       </p:sp>
       <p:sp>
         <p:nvSpPr>
-          <p:cNvPr id="48" name="Rectangle 47"/>
+          <p:cNvPr id="50" name="TextBox 49"/>
+          <p:cNvSpPr txBox="1"/>
+          <p:nvPr/>
+        </p:nvSpPr>
+        <p:spPr>
+          <a:xfrm>
+            <a:off x="10360152" y="320040"/>
+            <a:ext cx="1005840" cy="274320"/>
+          </a:xfrm>
+          <a:prstGeom prst="rect">
+            <a:avLst/>
+          </a:prstGeom>
+          <a:noFill/>
+        </p:spPr>
+        <p:txBody>
+          <a:bodyPr wrap="none">
+            <a:spAutoFit/>
+          </a:bodyPr>
+          <a:lstStyle/>
+          <a:p>
+            <a:pPr algn="r"/>
+            <a:r>
+              <a:rPr b="1" sz="800">
+                <a:solidFill>
+                  <a:srgbClr val="EEF7F7"/>
+                </a:solidFill>
+              </a:rPr>
+              <a:t>VELA SYNC</a:t>
+            </a:r>
+          </a:p>
+        </p:txBody>
+      </p:sp>
+      <p:sp>
+        <p:nvSpPr>
+          <p:cNvPr id="51" name="logo_bg"/>
           <p:cNvSpPr/>
           <p:nvPr/>
         </p:nvSpPr>
         <p:spPr>
           <a:xfrm>
-            <a:off x="11411712" y="228600"/>
-            <a:ext cx="457200" cy="457200"/>
-          </a:xfrm>
-          <a:prstGeom prst="rect">
-            <a:avLst/>
-          </a:prstGeom>
-          <a:solidFill>
-            <a:srgbClr val="2B8E8E"/>
-          </a:solidFill>
-          <a:ln>
-            <a:noFill/>
+            <a:off x="10378440" y="164592"/>
+            <a:ext cx="1600200" cy="438912"/>
+          </a:xfrm>
+          <a:prstGeom prst="roundRect">
+            <a:avLst>
+              <a:gd name="adj" fmla="val 25000"/>
+            </a:avLst>
+          </a:prstGeom>
+          <a:solidFill>
+            <a:srgbClr val="0F1A1A"/>
+          </a:solidFill>
+          <a:ln w="7620">
+            <a:solidFill>
+              <a:srgbClr val="268282"/>
+            </a:solidFill>
           </a:ln>
         </p:spPr>
         <p:style>
@@ -21870,14 +22687,57 @@
       </p:sp>
       <p:sp>
         <p:nvSpPr>
-          <p:cNvPr id="49" name="TextBox 48"/>
-          <p:cNvSpPr txBox="1"/>
-          <p:nvPr/>
-        </p:nvSpPr>
-        <p:spPr>
-          <a:xfrm>
-            <a:off x="11411712" y="228600"/>
-            <a:ext cx="457200" cy="457200"/>
+          <p:cNvPr id="52" name="logo_circle"/>
+          <p:cNvSpPr/>
+          <p:nvPr/>
+        </p:nvSpPr>
+        <p:spPr>
+          <a:xfrm>
+            <a:off x="10397093" y="197510"/>
+            <a:ext cx="373075" cy="373075"/>
+          </a:xfrm>
+          <a:prstGeom prst="ellipse">
+            <a:avLst/>
+          </a:prstGeom>
+          <a:solidFill>
+            <a:srgbClr val="268282"/>
+          </a:solidFill>
+          <a:ln>
+            <a:noFill/>
+          </a:ln>
+        </p:spPr>
+        <p:style>
+          <a:lnRef idx="1">
+            <a:schemeClr val="accent1"/>
+          </a:lnRef>
+          <a:fillRef idx="3">
+            <a:schemeClr val="accent1"/>
+          </a:fillRef>
+          <a:effectRef idx="2">
+            <a:schemeClr val="accent1"/>
+          </a:effectRef>
+          <a:fontRef idx="minor">
+            <a:schemeClr val="lt1"/>
+          </a:fontRef>
+        </p:style>
+        <p:txBody>
+          <a:bodyPr rtlCol="0" anchor="ctr"/>
+          <a:lstStyle/>
+          <a:p>
+            <a:pPr algn="ctr"/>
+          </a:p>
+        </p:txBody>
+      </p:sp>
+      <p:sp>
+        <p:nvSpPr>
+          <p:cNvPr id="53" name="logo_text"/>
+          <p:cNvSpPr txBox="1"/>
+          <p:nvPr/>
+        </p:nvSpPr>
+        <p:spPr>
+          <a:xfrm>
+            <a:off x="10843686" y="201168"/>
+            <a:ext cx="1134953" cy="241401"/>
           </a:xfrm>
           <a:prstGeom prst="rect">
             <a:avLst/>
@@ -21890,48 +22750,84 @@
           </a:bodyPr>
           <a:lstStyle/>
           <a:p>
-            <a:pPr algn="ctr"/>
-            <a:r>
-              <a:rPr b="1" sz="1400">
+            <a:pPr algn="l"/>
+            <a:r>
+              <a:rPr sz="750" b="1">
+                <a:solidFill>
+                  <a:srgbClr val="EEF7F7"/>
+                </a:solidFill>
+                <a:latin typeface="Helvetica Neue"/>
+              </a:rPr>
+              <a:t>VELA SYNC</a:t>
+            </a:r>
+          </a:p>
+        </p:txBody>
+      </p:sp>
+      <p:sp>
+        <p:nvSpPr>
+          <p:cNvPr id="54" name="logo_subtext"/>
+          <p:cNvSpPr txBox="1"/>
+          <p:nvPr/>
+        </p:nvSpPr>
+        <p:spPr>
+          <a:xfrm>
+            <a:off x="10843686" y="405993"/>
+            <a:ext cx="1134953" cy="175564"/>
+          </a:xfrm>
+          <a:prstGeom prst="rect">
+            <a:avLst/>
+          </a:prstGeom>
+          <a:noFill/>
+        </p:spPr>
+        <p:txBody>
+          <a:bodyPr wrap="none">
+            <a:spAutoFit/>
+          </a:bodyPr>
+          <a:lstStyle/>
+          <a:p>
+            <a:pPr algn="l"/>
+            <a:r>
+              <a:rPr sz="500">
+                <a:solidFill>
+                  <a:srgbClr val="3AAEAE"/>
+                </a:solidFill>
+                <a:latin typeface="Helvetica Neue"/>
+              </a:rPr>
+              <a:t>velasync.co.uk</a:t>
+            </a:r>
+          </a:p>
+        </p:txBody>
+      </p:sp>
+      <p:sp>
+        <p:nvSpPr>
+          <p:cNvPr id="56" name="logo_icon"/>
+          <p:cNvSpPr txBox="1"/>
+          <p:nvPr/>
+        </p:nvSpPr>
+        <p:spPr>
+          <a:xfrm>
+            <a:off x="10441862" y="216164"/>
+            <a:ext cx="283537" cy="298460"/>
+          </a:xfrm>
+          <a:prstGeom prst="rect">
+            <a:avLst/>
+          </a:prstGeom>
+          <a:noFill/>
+        </p:spPr>
+        <p:txBody>
+          <a:bodyPr wrap="none">
+            <a:spAutoFit/>
+          </a:bodyPr>
+          <a:lstStyle/>
+          <a:p>
+            <a:pPr algn="ctr"/>
+            <a:r>
+              <a:rPr sz="1527">
                 <a:solidFill>
                   <a:srgbClr val="FFFFFF"/>
                 </a:solidFill>
               </a:rPr>
-              <a:t>VS</a:t>
-            </a:r>
-          </a:p>
-        </p:txBody>
-      </p:sp>
-      <p:sp>
-        <p:nvSpPr>
-          <p:cNvPr id="50" name="TextBox 49"/>
-          <p:cNvSpPr txBox="1"/>
-          <p:nvPr/>
-        </p:nvSpPr>
-        <p:spPr>
-          <a:xfrm>
-            <a:off x="10360152" y="320040"/>
-            <a:ext cx="1005840" cy="274320"/>
-          </a:xfrm>
-          <a:prstGeom prst="rect">
-            <a:avLst/>
-          </a:prstGeom>
-          <a:noFill/>
-        </p:spPr>
-        <p:txBody>
-          <a:bodyPr wrap="none">
-            <a:spAutoFit/>
-          </a:bodyPr>
-          <a:lstStyle/>
-          <a:p>
-            <a:pPr algn="r"/>
-            <a:r>
-              <a:rPr b="1" sz="800">
-                <a:solidFill>
-                  <a:srgbClr val="EEF7F7"/>
-                </a:solidFill>
-              </a:rPr>
-              <a:t>VELA SYNC</a:t>
+              <a:t>⛵</a:t>
             </a:r>
           </a:p>
         </p:txBody>
@@ -23643,23 +24539,61 @@
       </p:sp>
       <p:sp>
         <p:nvSpPr>
-          <p:cNvPr id="47" name="Rectangle 46"/>
+          <p:cNvPr id="49" name="TextBox 48"/>
+          <p:cNvSpPr txBox="1"/>
+          <p:nvPr/>
+        </p:nvSpPr>
+        <p:spPr>
+          <a:xfrm>
+            <a:off x="10360152" y="320040"/>
+            <a:ext cx="1005840" cy="274320"/>
+          </a:xfrm>
+          <a:prstGeom prst="rect">
+            <a:avLst/>
+          </a:prstGeom>
+          <a:noFill/>
+        </p:spPr>
+        <p:txBody>
+          <a:bodyPr wrap="none">
+            <a:spAutoFit/>
+          </a:bodyPr>
+          <a:lstStyle/>
+          <a:p>
+            <a:pPr algn="r"/>
+            <a:r>
+              <a:rPr b="1" sz="800">
+                <a:solidFill>
+                  <a:srgbClr val="EEF7F7"/>
+                </a:solidFill>
+              </a:rPr>
+              <a:t>VELA SYNC</a:t>
+            </a:r>
+          </a:p>
+        </p:txBody>
+      </p:sp>
+      <p:sp>
+        <p:nvSpPr>
+          <p:cNvPr id="50" name="logo_bg"/>
           <p:cNvSpPr/>
           <p:nvPr/>
         </p:nvSpPr>
         <p:spPr>
           <a:xfrm>
-            <a:off x="11411712" y="228600"/>
-            <a:ext cx="457200" cy="457200"/>
-          </a:xfrm>
-          <a:prstGeom prst="rect">
-            <a:avLst/>
-          </a:prstGeom>
-          <a:solidFill>
-            <a:srgbClr val="2B8E8E"/>
-          </a:solidFill>
-          <a:ln>
-            <a:noFill/>
+            <a:off x="10378440" y="164592"/>
+            <a:ext cx="1600200" cy="438912"/>
+          </a:xfrm>
+          <a:prstGeom prst="roundRect">
+            <a:avLst>
+              <a:gd name="adj" fmla="val 25000"/>
+            </a:avLst>
+          </a:prstGeom>
+          <a:solidFill>
+            <a:srgbClr val="0F1A1A"/>
+          </a:solidFill>
+          <a:ln w="7620">
+            <a:solidFill>
+              <a:srgbClr val="268282"/>
+            </a:solidFill>
           </a:ln>
         </p:spPr>
         <p:style>
@@ -23686,14 +24620,57 @@
       </p:sp>
       <p:sp>
         <p:nvSpPr>
-          <p:cNvPr id="48" name="TextBox 47"/>
-          <p:cNvSpPr txBox="1"/>
-          <p:nvPr/>
-        </p:nvSpPr>
-        <p:spPr>
-          <a:xfrm>
-            <a:off x="11411712" y="228600"/>
-            <a:ext cx="457200" cy="457200"/>
+          <p:cNvPr id="51" name="logo_circle"/>
+          <p:cNvSpPr/>
+          <p:nvPr/>
+        </p:nvSpPr>
+        <p:spPr>
+          <a:xfrm>
+            <a:off x="10397093" y="197510"/>
+            <a:ext cx="373075" cy="373075"/>
+          </a:xfrm>
+          <a:prstGeom prst="ellipse">
+            <a:avLst/>
+          </a:prstGeom>
+          <a:solidFill>
+            <a:srgbClr val="268282"/>
+          </a:solidFill>
+          <a:ln>
+            <a:noFill/>
+          </a:ln>
+        </p:spPr>
+        <p:style>
+          <a:lnRef idx="1">
+            <a:schemeClr val="accent1"/>
+          </a:lnRef>
+          <a:fillRef idx="3">
+            <a:schemeClr val="accent1"/>
+          </a:fillRef>
+          <a:effectRef idx="2">
+            <a:schemeClr val="accent1"/>
+          </a:effectRef>
+          <a:fontRef idx="minor">
+            <a:schemeClr val="lt1"/>
+          </a:fontRef>
+        </p:style>
+        <p:txBody>
+          <a:bodyPr rtlCol="0" anchor="ctr"/>
+          <a:lstStyle/>
+          <a:p>
+            <a:pPr algn="ctr"/>
+          </a:p>
+        </p:txBody>
+      </p:sp>
+      <p:sp>
+        <p:nvSpPr>
+          <p:cNvPr id="52" name="logo_text"/>
+          <p:cNvSpPr txBox="1"/>
+          <p:nvPr/>
+        </p:nvSpPr>
+        <p:spPr>
+          <a:xfrm>
+            <a:off x="10843686" y="201168"/>
+            <a:ext cx="1134953" cy="241401"/>
           </a:xfrm>
           <a:prstGeom prst="rect">
             <a:avLst/>
@@ -23706,48 +24683,84 @@
           </a:bodyPr>
           <a:lstStyle/>
           <a:p>
-            <a:pPr algn="ctr"/>
-            <a:r>
-              <a:rPr b="1" sz="1400">
+            <a:pPr algn="l"/>
+            <a:r>
+              <a:rPr sz="750" b="1">
+                <a:solidFill>
+                  <a:srgbClr val="EEF7F7"/>
+                </a:solidFill>
+                <a:latin typeface="Helvetica Neue"/>
+              </a:rPr>
+              <a:t>VELA SYNC</a:t>
+            </a:r>
+          </a:p>
+        </p:txBody>
+      </p:sp>
+      <p:sp>
+        <p:nvSpPr>
+          <p:cNvPr id="53" name="logo_subtext"/>
+          <p:cNvSpPr txBox="1"/>
+          <p:nvPr/>
+        </p:nvSpPr>
+        <p:spPr>
+          <a:xfrm>
+            <a:off x="10843686" y="405993"/>
+            <a:ext cx="1134953" cy="175564"/>
+          </a:xfrm>
+          <a:prstGeom prst="rect">
+            <a:avLst/>
+          </a:prstGeom>
+          <a:noFill/>
+        </p:spPr>
+        <p:txBody>
+          <a:bodyPr wrap="none">
+            <a:spAutoFit/>
+          </a:bodyPr>
+          <a:lstStyle/>
+          <a:p>
+            <a:pPr algn="l"/>
+            <a:r>
+              <a:rPr sz="500">
+                <a:solidFill>
+                  <a:srgbClr val="3AAEAE"/>
+                </a:solidFill>
+                <a:latin typeface="Helvetica Neue"/>
+              </a:rPr>
+              <a:t>velasync.co.uk</a:t>
+            </a:r>
+          </a:p>
+        </p:txBody>
+      </p:sp>
+      <p:sp>
+        <p:nvSpPr>
+          <p:cNvPr id="55" name="logo_icon"/>
+          <p:cNvSpPr txBox="1"/>
+          <p:nvPr/>
+        </p:nvSpPr>
+        <p:spPr>
+          <a:xfrm>
+            <a:off x="10441862" y="216164"/>
+            <a:ext cx="283537" cy="298460"/>
+          </a:xfrm>
+          <a:prstGeom prst="rect">
+            <a:avLst/>
+          </a:prstGeom>
+          <a:noFill/>
+        </p:spPr>
+        <p:txBody>
+          <a:bodyPr wrap="none">
+            <a:spAutoFit/>
+          </a:bodyPr>
+          <a:lstStyle/>
+          <a:p>
+            <a:pPr algn="ctr"/>
+            <a:r>
+              <a:rPr sz="1527">
                 <a:solidFill>
                   <a:srgbClr val="FFFFFF"/>
                 </a:solidFill>
               </a:rPr>
-              <a:t>VS</a:t>
-            </a:r>
-          </a:p>
-        </p:txBody>
-      </p:sp>
-      <p:sp>
-        <p:nvSpPr>
-          <p:cNvPr id="49" name="TextBox 48"/>
-          <p:cNvSpPr txBox="1"/>
-          <p:nvPr/>
-        </p:nvSpPr>
-        <p:spPr>
-          <a:xfrm>
-            <a:off x="10360152" y="320040"/>
-            <a:ext cx="1005840" cy="274320"/>
-          </a:xfrm>
-          <a:prstGeom prst="rect">
-            <a:avLst/>
-          </a:prstGeom>
-          <a:noFill/>
-        </p:spPr>
-        <p:txBody>
-          <a:bodyPr wrap="none">
-            <a:spAutoFit/>
-          </a:bodyPr>
-          <a:lstStyle/>
-          <a:p>
-            <a:pPr algn="r"/>
-            <a:r>
-              <a:rPr b="1" sz="800">
-                <a:solidFill>
-                  <a:srgbClr val="EEF7F7"/>
-                </a:solidFill>
-              </a:rPr>
-              <a:t>VELA SYNC</a:t>
+              <a:t>⛵</a:t>
             </a:r>
           </a:p>
         </p:txBody>
@@ -26487,23 +27500,61 @@
       </p:sp>
       <p:sp>
         <p:nvSpPr>
-          <p:cNvPr id="71" name="Rectangle 70"/>
+          <p:cNvPr id="73" name="TextBox 72"/>
+          <p:cNvSpPr txBox="1"/>
+          <p:nvPr/>
+        </p:nvSpPr>
+        <p:spPr>
+          <a:xfrm>
+            <a:off x="10360152" y="320040"/>
+            <a:ext cx="1005840" cy="274320"/>
+          </a:xfrm>
+          <a:prstGeom prst="rect">
+            <a:avLst/>
+          </a:prstGeom>
+          <a:noFill/>
+        </p:spPr>
+        <p:txBody>
+          <a:bodyPr wrap="none">
+            <a:spAutoFit/>
+          </a:bodyPr>
+          <a:lstStyle/>
+          <a:p>
+            <a:pPr algn="r"/>
+            <a:r>
+              <a:rPr b="1" sz="800">
+                <a:solidFill>
+                  <a:srgbClr val="EEF7F7"/>
+                </a:solidFill>
+              </a:rPr>
+              <a:t>VELA SYNC</a:t>
+            </a:r>
+          </a:p>
+        </p:txBody>
+      </p:sp>
+      <p:sp>
+        <p:nvSpPr>
+          <p:cNvPr id="74" name="logo_bg"/>
           <p:cNvSpPr/>
           <p:nvPr/>
         </p:nvSpPr>
         <p:spPr>
           <a:xfrm>
-            <a:off x="11411712" y="228600"/>
-            <a:ext cx="457200" cy="457200"/>
-          </a:xfrm>
-          <a:prstGeom prst="rect">
-            <a:avLst/>
-          </a:prstGeom>
-          <a:solidFill>
-            <a:srgbClr val="2B8E8E"/>
-          </a:solidFill>
-          <a:ln>
-            <a:noFill/>
+            <a:off x="10378440" y="164592"/>
+            <a:ext cx="1600200" cy="438912"/>
+          </a:xfrm>
+          <a:prstGeom prst="roundRect">
+            <a:avLst>
+              <a:gd name="adj" fmla="val 25000"/>
+            </a:avLst>
+          </a:prstGeom>
+          <a:solidFill>
+            <a:srgbClr val="0F1A1A"/>
+          </a:solidFill>
+          <a:ln w="7620">
+            <a:solidFill>
+              <a:srgbClr val="268282"/>
+            </a:solidFill>
           </a:ln>
         </p:spPr>
         <p:style>
@@ -26530,14 +27581,57 @@
       </p:sp>
       <p:sp>
         <p:nvSpPr>
-          <p:cNvPr id="72" name="TextBox 71"/>
-          <p:cNvSpPr txBox="1"/>
-          <p:nvPr/>
-        </p:nvSpPr>
-        <p:spPr>
-          <a:xfrm>
-            <a:off x="11411712" y="228600"/>
-            <a:ext cx="457200" cy="457200"/>
+          <p:cNvPr id="75" name="logo_circle"/>
+          <p:cNvSpPr/>
+          <p:nvPr/>
+        </p:nvSpPr>
+        <p:spPr>
+          <a:xfrm>
+            <a:off x="10397093" y="197510"/>
+            <a:ext cx="373075" cy="373075"/>
+          </a:xfrm>
+          <a:prstGeom prst="ellipse">
+            <a:avLst/>
+          </a:prstGeom>
+          <a:solidFill>
+            <a:srgbClr val="268282"/>
+          </a:solidFill>
+          <a:ln>
+            <a:noFill/>
+          </a:ln>
+        </p:spPr>
+        <p:style>
+          <a:lnRef idx="1">
+            <a:schemeClr val="accent1"/>
+          </a:lnRef>
+          <a:fillRef idx="3">
+            <a:schemeClr val="accent1"/>
+          </a:fillRef>
+          <a:effectRef idx="2">
+            <a:schemeClr val="accent1"/>
+          </a:effectRef>
+          <a:fontRef idx="minor">
+            <a:schemeClr val="lt1"/>
+          </a:fontRef>
+        </p:style>
+        <p:txBody>
+          <a:bodyPr rtlCol="0" anchor="ctr"/>
+          <a:lstStyle/>
+          <a:p>
+            <a:pPr algn="ctr"/>
+          </a:p>
+        </p:txBody>
+      </p:sp>
+      <p:sp>
+        <p:nvSpPr>
+          <p:cNvPr id="76" name="logo_text"/>
+          <p:cNvSpPr txBox="1"/>
+          <p:nvPr/>
+        </p:nvSpPr>
+        <p:spPr>
+          <a:xfrm>
+            <a:off x="10843686" y="201168"/>
+            <a:ext cx="1134953" cy="241401"/>
           </a:xfrm>
           <a:prstGeom prst="rect">
             <a:avLst/>
@@ -26550,48 +27644,84 @@
           </a:bodyPr>
           <a:lstStyle/>
           <a:p>
-            <a:pPr algn="ctr"/>
-            <a:r>
-              <a:rPr b="1" sz="1400">
+            <a:pPr algn="l"/>
+            <a:r>
+              <a:rPr sz="750" b="1">
+                <a:solidFill>
+                  <a:srgbClr val="EEF7F7"/>
+                </a:solidFill>
+                <a:latin typeface="Helvetica Neue"/>
+              </a:rPr>
+              <a:t>VELA SYNC</a:t>
+            </a:r>
+          </a:p>
+        </p:txBody>
+      </p:sp>
+      <p:sp>
+        <p:nvSpPr>
+          <p:cNvPr id="77" name="logo_subtext"/>
+          <p:cNvSpPr txBox="1"/>
+          <p:nvPr/>
+        </p:nvSpPr>
+        <p:spPr>
+          <a:xfrm>
+            <a:off x="10843686" y="405993"/>
+            <a:ext cx="1134953" cy="175564"/>
+          </a:xfrm>
+          <a:prstGeom prst="rect">
+            <a:avLst/>
+          </a:prstGeom>
+          <a:noFill/>
+        </p:spPr>
+        <p:txBody>
+          <a:bodyPr wrap="none">
+            <a:spAutoFit/>
+          </a:bodyPr>
+          <a:lstStyle/>
+          <a:p>
+            <a:pPr algn="l"/>
+            <a:r>
+              <a:rPr sz="500">
+                <a:solidFill>
+                  <a:srgbClr val="3AAEAE"/>
+                </a:solidFill>
+                <a:latin typeface="Helvetica Neue"/>
+              </a:rPr>
+              <a:t>velasync.co.uk</a:t>
+            </a:r>
+          </a:p>
+        </p:txBody>
+      </p:sp>
+      <p:sp>
+        <p:nvSpPr>
+          <p:cNvPr id="79" name="logo_icon"/>
+          <p:cNvSpPr txBox="1"/>
+          <p:nvPr/>
+        </p:nvSpPr>
+        <p:spPr>
+          <a:xfrm>
+            <a:off x="10441862" y="216164"/>
+            <a:ext cx="283537" cy="298460"/>
+          </a:xfrm>
+          <a:prstGeom prst="rect">
+            <a:avLst/>
+          </a:prstGeom>
+          <a:noFill/>
+        </p:spPr>
+        <p:txBody>
+          <a:bodyPr wrap="none">
+            <a:spAutoFit/>
+          </a:bodyPr>
+          <a:lstStyle/>
+          <a:p>
+            <a:pPr algn="ctr"/>
+            <a:r>
+              <a:rPr sz="1527">
                 <a:solidFill>
                   <a:srgbClr val="FFFFFF"/>
                 </a:solidFill>
               </a:rPr>
-              <a:t>VS</a:t>
-            </a:r>
-          </a:p>
-        </p:txBody>
-      </p:sp>
-      <p:sp>
-        <p:nvSpPr>
-          <p:cNvPr id="73" name="TextBox 72"/>
-          <p:cNvSpPr txBox="1"/>
-          <p:nvPr/>
-        </p:nvSpPr>
-        <p:spPr>
-          <a:xfrm>
-            <a:off x="10360152" y="320040"/>
-            <a:ext cx="1005840" cy="274320"/>
-          </a:xfrm>
-          <a:prstGeom prst="rect">
-            <a:avLst/>
-          </a:prstGeom>
-          <a:noFill/>
-        </p:spPr>
-        <p:txBody>
-          <a:bodyPr wrap="none">
-            <a:spAutoFit/>
-          </a:bodyPr>
-          <a:lstStyle/>
-          <a:p>
-            <a:pPr algn="r"/>
-            <a:r>
-              <a:rPr b="1" sz="800">
-                <a:solidFill>
-                  <a:srgbClr val="EEF7F7"/>
-                </a:solidFill>
-              </a:rPr>
-              <a:t>VELA SYNC</a:t>
+              <a:t>⛵</a:t>
             </a:r>
           </a:p>
         </p:txBody>
@@ -28299,23 +29429,61 @@
       </p:sp>
       <p:sp>
         <p:nvSpPr>
-          <p:cNvPr id="48" name="Rectangle 47"/>
+          <p:cNvPr id="50" name="TextBox 49"/>
+          <p:cNvSpPr txBox="1"/>
+          <p:nvPr/>
+        </p:nvSpPr>
+        <p:spPr>
+          <a:xfrm>
+            <a:off x="10360152" y="320040"/>
+            <a:ext cx="1005840" cy="274320"/>
+          </a:xfrm>
+          <a:prstGeom prst="rect">
+            <a:avLst/>
+          </a:prstGeom>
+          <a:noFill/>
+        </p:spPr>
+        <p:txBody>
+          <a:bodyPr wrap="none">
+            <a:spAutoFit/>
+          </a:bodyPr>
+          <a:lstStyle/>
+          <a:p>
+            <a:pPr algn="r"/>
+            <a:r>
+              <a:rPr b="1" sz="800">
+                <a:solidFill>
+                  <a:srgbClr val="EEF7F7"/>
+                </a:solidFill>
+              </a:rPr>
+              <a:t>VELA SYNC</a:t>
+            </a:r>
+          </a:p>
+        </p:txBody>
+      </p:sp>
+      <p:sp>
+        <p:nvSpPr>
+          <p:cNvPr id="51" name="logo_bg"/>
           <p:cNvSpPr/>
           <p:nvPr/>
         </p:nvSpPr>
         <p:spPr>
           <a:xfrm>
-            <a:off x="11411712" y="228600"/>
-            <a:ext cx="457200" cy="457200"/>
-          </a:xfrm>
-          <a:prstGeom prst="rect">
-            <a:avLst/>
-          </a:prstGeom>
-          <a:solidFill>
-            <a:srgbClr val="2B8E8E"/>
-          </a:solidFill>
-          <a:ln>
-            <a:noFill/>
+            <a:off x="10378440" y="164592"/>
+            <a:ext cx="1600200" cy="438912"/>
+          </a:xfrm>
+          <a:prstGeom prst="roundRect">
+            <a:avLst>
+              <a:gd name="adj" fmla="val 25000"/>
+            </a:avLst>
+          </a:prstGeom>
+          <a:solidFill>
+            <a:srgbClr val="0F1A1A"/>
+          </a:solidFill>
+          <a:ln w="7620">
+            <a:solidFill>
+              <a:srgbClr val="268282"/>
+            </a:solidFill>
           </a:ln>
         </p:spPr>
         <p:style>
@@ -28342,14 +29510,57 @@
       </p:sp>
       <p:sp>
         <p:nvSpPr>
-          <p:cNvPr id="49" name="TextBox 48"/>
-          <p:cNvSpPr txBox="1"/>
-          <p:nvPr/>
-        </p:nvSpPr>
-        <p:spPr>
-          <a:xfrm>
-            <a:off x="11411712" y="228600"/>
-            <a:ext cx="457200" cy="457200"/>
+          <p:cNvPr id="52" name="logo_circle"/>
+          <p:cNvSpPr/>
+          <p:nvPr/>
+        </p:nvSpPr>
+        <p:spPr>
+          <a:xfrm>
+            <a:off x="10397093" y="197510"/>
+            <a:ext cx="373075" cy="373075"/>
+          </a:xfrm>
+          <a:prstGeom prst="ellipse">
+            <a:avLst/>
+          </a:prstGeom>
+          <a:solidFill>
+            <a:srgbClr val="268282"/>
+          </a:solidFill>
+          <a:ln>
+            <a:noFill/>
+          </a:ln>
+        </p:spPr>
+        <p:style>
+          <a:lnRef idx="1">
+            <a:schemeClr val="accent1"/>
+          </a:lnRef>
+          <a:fillRef idx="3">
+            <a:schemeClr val="accent1"/>
+          </a:fillRef>
+          <a:effectRef idx="2">
+            <a:schemeClr val="accent1"/>
+          </a:effectRef>
+          <a:fontRef idx="minor">
+            <a:schemeClr val="lt1"/>
+          </a:fontRef>
+        </p:style>
+        <p:txBody>
+          <a:bodyPr rtlCol="0" anchor="ctr"/>
+          <a:lstStyle/>
+          <a:p>
+            <a:pPr algn="ctr"/>
+          </a:p>
+        </p:txBody>
+      </p:sp>
+      <p:sp>
+        <p:nvSpPr>
+          <p:cNvPr id="53" name="logo_text"/>
+          <p:cNvSpPr txBox="1"/>
+          <p:nvPr/>
+        </p:nvSpPr>
+        <p:spPr>
+          <a:xfrm>
+            <a:off x="10843686" y="201168"/>
+            <a:ext cx="1134953" cy="241401"/>
           </a:xfrm>
           <a:prstGeom prst="rect">
             <a:avLst/>
@@ -28362,48 +29573,84 @@
           </a:bodyPr>
           <a:lstStyle/>
           <a:p>
-            <a:pPr algn="ctr"/>
-            <a:r>
-              <a:rPr b="1" sz="1400">
+            <a:pPr algn="l"/>
+            <a:r>
+              <a:rPr sz="750" b="1">
+                <a:solidFill>
+                  <a:srgbClr val="EEF7F7"/>
+                </a:solidFill>
+                <a:latin typeface="Helvetica Neue"/>
+              </a:rPr>
+              <a:t>VELA SYNC</a:t>
+            </a:r>
+          </a:p>
+        </p:txBody>
+      </p:sp>
+      <p:sp>
+        <p:nvSpPr>
+          <p:cNvPr id="54" name="logo_subtext"/>
+          <p:cNvSpPr txBox="1"/>
+          <p:nvPr/>
+        </p:nvSpPr>
+        <p:spPr>
+          <a:xfrm>
+            <a:off x="10843686" y="405993"/>
+            <a:ext cx="1134953" cy="175564"/>
+          </a:xfrm>
+          <a:prstGeom prst="rect">
+            <a:avLst/>
+          </a:prstGeom>
+          <a:noFill/>
+        </p:spPr>
+        <p:txBody>
+          <a:bodyPr wrap="none">
+            <a:spAutoFit/>
+          </a:bodyPr>
+          <a:lstStyle/>
+          <a:p>
+            <a:pPr algn="l"/>
+            <a:r>
+              <a:rPr sz="500">
+                <a:solidFill>
+                  <a:srgbClr val="3AAEAE"/>
+                </a:solidFill>
+                <a:latin typeface="Helvetica Neue"/>
+              </a:rPr>
+              <a:t>velasync.co.uk</a:t>
+            </a:r>
+          </a:p>
+        </p:txBody>
+      </p:sp>
+      <p:sp>
+        <p:nvSpPr>
+          <p:cNvPr id="56" name="logo_icon"/>
+          <p:cNvSpPr txBox="1"/>
+          <p:nvPr/>
+        </p:nvSpPr>
+        <p:spPr>
+          <a:xfrm>
+            <a:off x="10441862" y="216164"/>
+            <a:ext cx="283537" cy="298460"/>
+          </a:xfrm>
+          <a:prstGeom prst="rect">
+            <a:avLst/>
+          </a:prstGeom>
+          <a:noFill/>
+        </p:spPr>
+        <p:txBody>
+          <a:bodyPr wrap="none">
+            <a:spAutoFit/>
+          </a:bodyPr>
+          <a:lstStyle/>
+          <a:p>
+            <a:pPr algn="ctr"/>
+            <a:r>
+              <a:rPr sz="1527">
                 <a:solidFill>
                   <a:srgbClr val="FFFFFF"/>
                 </a:solidFill>
               </a:rPr>
-              <a:t>VS</a:t>
-            </a:r>
-          </a:p>
-        </p:txBody>
-      </p:sp>
-      <p:sp>
-        <p:nvSpPr>
-          <p:cNvPr id="50" name="TextBox 49"/>
-          <p:cNvSpPr txBox="1"/>
-          <p:nvPr/>
-        </p:nvSpPr>
-        <p:spPr>
-          <a:xfrm>
-            <a:off x="10360152" y="320040"/>
-            <a:ext cx="1005840" cy="274320"/>
-          </a:xfrm>
-          <a:prstGeom prst="rect">
-            <a:avLst/>
-          </a:prstGeom>
-          <a:noFill/>
-        </p:spPr>
-        <p:txBody>
-          <a:bodyPr wrap="none">
-            <a:spAutoFit/>
-          </a:bodyPr>
-          <a:lstStyle/>
-          <a:p>
-            <a:pPr algn="r"/>
-            <a:r>
-              <a:rPr b="1" sz="800">
-                <a:solidFill>
-                  <a:srgbClr val="EEF7F7"/>
-                </a:solidFill>
-              </a:rPr>
-              <a:t>VELA SYNC</a:t>
+              <a:t>⛵</a:t>
             </a:r>
           </a:p>
         </p:txBody>
